--- a/content/05-teaching-resources/slides/core/13-control-systems.pptx
+++ b/content/05-teaching-resources/slides/core/13-control-systems.pptx
@@ -9,12 +9,18 @@
     <p:sldId id="257" r:id="rId8"/>
     <p:sldId id="258" r:id="rId9"/>
     <p:sldId id="259" r:id="rId10"/>
-    <p:sldId id="260" r:id="rId12"/>
+    <p:sldId id="260" r:id="rId11"/>
     <p:sldId id="261" r:id="rId13"/>
     <p:sldId id="262" r:id="rId14"/>
     <p:sldId id="263" r:id="rId15"/>
     <p:sldId id="264" r:id="rId16"/>
     <p:sldId id="265" r:id="rId17"/>
+    <p:sldId id="266" r:id="rId18"/>
+    <p:sldId id="267" r:id="rId19"/>
+    <p:sldId id="268" r:id="rId20"/>
+    <p:sldId id="269" r:id="rId21"/>
+    <p:sldId id="270" r:id="rId22"/>
+    <p:sldId id="271" r:id="rId23"/>
   </p:sldIdLst>
   <p:sldSz cx="12191695" cy="6858000" type="screen4x3"/>
   <p:notesSz cx="6858000" cy="9144000"/>
@@ -511,7 +517,22 @@
           <a:lstStyle/>
           <a:p>
             <a:r>
-              <a:t>Steady-state error is the difference that remains between the set point and the output once the system settles. A transfer function describes the output/input relationship of a block.</a:t>
+              <a:t>Answers:</a:t>
+            </a:r>
+          </a:p>
+          <a:p>
+            <a:r>
+              <a:t>1. E.g. logic gates, timers, counters, comparators, latches.</a:t>
+            </a:r>
+          </a:p>
+          <a:p>
+            <a:r>
+              <a:t>2. Information about the output sent back to the input.</a:t>
+            </a:r>
+          </a:p>
+          <a:p>
+            <a:r>
+              <a:t>3. Both inputs to be 1.</a:t>
             </a:r>
           </a:p>
         </p:txBody>
@@ -581,7 +602,7 @@
           <a:lstStyle/>
           <a:p>
             <a:r>
-              <a:t>Give students a few minutes to answer on mini whiteboards or paper, then reveal the answers on the next slide.</a:t>
+              <a:t>Steady-state error is the difference that remains between the set point and the output once the system settles. A transfer function describes the output/input relationship of a block.</a:t>
             </a:r>
           </a:p>
         </p:txBody>
@@ -651,7 +672,22 @@
           <a:lstStyle/>
           <a:p>
             <a:r>
-              <a:t>Talk through any answers the class found difficult.</a:t>
+              <a:t>Answers:</a:t>
+            </a:r>
+          </a:p>
+          <a:p>
+            <a:r>
+              <a:t>1. Feedback.</a:t>
+            </a:r>
+          </a:p>
+          <a:p>
+            <a:r>
+              <a:t>2. One that overshoots and oscillates.</a:t>
+            </a:r>
+          </a:p>
+          <a:p>
+            <a:r>
+              <a:t>3. The difference left between set point and output once settled.</a:t>
             </a:r>
           </a:p>
         </p:txBody>
@@ -677,6 +713,231 @@
 </file>
 
 <file path=ppt/notesSlides/notesSlide4.xml><?xml version="1.0" encoding="utf-8"?>
+<p:notes xmlns:a="http://schemas.openxmlformats.org/drawingml/2006/main" xmlns:p="http://schemas.openxmlformats.org/presentationml/2006/main" xmlns:r="http://schemas.openxmlformats.org/officeDocument/2006/relationships">
+  <p:cSld>
+    <p:spTree>
+      <p:nvGrpSpPr>
+        <p:cNvPr id="1" name=""/>
+        <p:cNvGrpSpPr/>
+        <p:nvPr/>
+      </p:nvGrpSpPr>
+      <p:grpSpPr>
+        <a:xfrm>
+          <a:off x="0" y="0"/>
+          <a:ext cx="0" cy="0"/>
+          <a:chOff x="0" y="0"/>
+          <a:chExt cx="0" cy="0"/>
+        </a:xfrm>
+      </p:grpSpPr>
+      <p:sp>
+        <p:nvSpPr>
+          <p:cNvPr id="2" name="Slide Image Placeholder 1"/>
+          <p:cNvSpPr>
+            <a:spLocks noGrp="1"/>
+          </p:cNvSpPr>
+          <p:nvPr>
+            <p:ph type="sldImg" idx="2"/>
+          </p:nvPr>
+        </p:nvSpPr>
+        <p:spPr/>
+      </p:sp>
+      <p:sp>
+        <p:nvSpPr>
+          <p:cNvPr id="3" name="Notes Placeholder 2"/>
+          <p:cNvSpPr>
+            <a:spLocks noGrp="1"/>
+          </p:cNvSpPr>
+          <p:nvPr>
+            <p:ph type="body" idx="3" sz="quarter"/>
+          </p:nvPr>
+        </p:nvSpPr>
+        <p:spPr/>
+        <p:txBody>
+          <a:bodyPr/>
+          <a:lstStyle/>
+          <a:p>
+            <a:r>
+              <a:t>Answers:</a:t>
+            </a:r>
+          </a:p>
+          <a:p>
+            <a:r>
+              <a:t>1. A sensor that detects objects without contact.</a:t>
+            </a:r>
+          </a:p>
+          <a:p>
+            <a:r>
+              <a:t>2. Active sensors need power; passive ones don't.</a:t>
+            </a:r>
+          </a:p>
+          <a:p>
+            <a:r>
+              <a:t>3. E.g. inspecting products for defects.</a:t>
+            </a:r>
+          </a:p>
+        </p:txBody>
+      </p:sp>
+      <p:sp>
+        <p:nvSpPr>
+          <p:cNvPr id="4" name="Slide Number Placeholder 3"/>
+          <p:cNvSpPr>
+            <a:spLocks noGrp="1"/>
+          </p:cNvSpPr>
+          <p:nvPr>
+            <p:ph type="sldNum" idx="5" sz="quarter"/>
+          </p:nvPr>
+        </p:nvSpPr>
+        <p:spPr/>
+      </p:sp>
+    </p:spTree>
+  </p:cSld>
+  <p:clrMapOvr>
+    <a:masterClrMapping/>
+  </p:clrMapOvr>
+</p:notes>
+</file>
+
+<file path=ppt/notesSlides/notesSlide5.xml><?xml version="1.0" encoding="utf-8"?>
+<p:notes xmlns:a="http://schemas.openxmlformats.org/drawingml/2006/main" xmlns:p="http://schemas.openxmlformats.org/presentationml/2006/main" xmlns:r="http://schemas.openxmlformats.org/officeDocument/2006/relationships">
+  <p:cSld>
+    <p:spTree>
+      <p:nvGrpSpPr>
+        <p:cNvPr id="1" name=""/>
+        <p:cNvGrpSpPr/>
+        <p:nvPr/>
+      </p:nvGrpSpPr>
+      <p:grpSpPr>
+        <a:xfrm>
+          <a:off x="0" y="0"/>
+          <a:ext cx="0" cy="0"/>
+          <a:chOff x="0" y="0"/>
+          <a:chExt cx="0" cy="0"/>
+        </a:xfrm>
+      </p:grpSpPr>
+      <p:sp>
+        <p:nvSpPr>
+          <p:cNvPr id="2" name="Slide Image Placeholder 1"/>
+          <p:cNvSpPr>
+            <a:spLocks noGrp="1"/>
+          </p:cNvSpPr>
+          <p:nvPr>
+            <p:ph type="sldImg" idx="2"/>
+          </p:nvPr>
+        </p:nvSpPr>
+        <p:spPr/>
+      </p:sp>
+      <p:sp>
+        <p:nvSpPr>
+          <p:cNvPr id="3" name="Notes Placeholder 2"/>
+          <p:cNvSpPr>
+            <a:spLocks noGrp="1"/>
+          </p:cNvSpPr>
+          <p:nvPr>
+            <p:ph type="body" idx="3" sz="quarter"/>
+          </p:nvPr>
+        </p:nvSpPr>
+        <p:spPr/>
+        <p:txBody>
+          <a:bodyPr/>
+          <a:lstStyle/>
+          <a:p>
+            <a:r>
+              <a:t>Give students a few minutes to answer on mini whiteboards or paper, then reveal the answers on the next slide.</a:t>
+            </a:r>
+          </a:p>
+        </p:txBody>
+      </p:sp>
+      <p:sp>
+        <p:nvSpPr>
+          <p:cNvPr id="4" name="Slide Number Placeholder 3"/>
+          <p:cNvSpPr>
+            <a:spLocks noGrp="1"/>
+          </p:cNvSpPr>
+          <p:nvPr>
+            <p:ph type="sldNum" idx="5" sz="quarter"/>
+          </p:nvPr>
+        </p:nvSpPr>
+        <p:spPr/>
+      </p:sp>
+    </p:spTree>
+  </p:cSld>
+  <p:clrMapOvr>
+    <a:masterClrMapping/>
+  </p:clrMapOvr>
+</p:notes>
+</file>
+
+<file path=ppt/notesSlides/notesSlide6.xml><?xml version="1.0" encoding="utf-8"?>
+<p:notes xmlns:a="http://schemas.openxmlformats.org/drawingml/2006/main" xmlns:p="http://schemas.openxmlformats.org/presentationml/2006/main" xmlns:r="http://schemas.openxmlformats.org/officeDocument/2006/relationships">
+  <p:cSld>
+    <p:spTree>
+      <p:nvGrpSpPr>
+        <p:cNvPr id="1" name=""/>
+        <p:cNvGrpSpPr/>
+        <p:nvPr/>
+      </p:nvGrpSpPr>
+      <p:grpSpPr>
+        <a:xfrm>
+          <a:off x="0" y="0"/>
+          <a:ext cx="0" cy="0"/>
+          <a:chOff x="0" y="0"/>
+          <a:chExt cx="0" cy="0"/>
+        </a:xfrm>
+      </p:grpSpPr>
+      <p:sp>
+        <p:nvSpPr>
+          <p:cNvPr id="2" name="Slide Image Placeholder 1"/>
+          <p:cNvSpPr>
+            <a:spLocks noGrp="1"/>
+          </p:cNvSpPr>
+          <p:nvPr>
+            <p:ph type="sldImg" idx="2"/>
+          </p:nvPr>
+        </p:nvSpPr>
+        <p:spPr/>
+      </p:sp>
+      <p:sp>
+        <p:nvSpPr>
+          <p:cNvPr id="3" name="Notes Placeholder 2"/>
+          <p:cNvSpPr>
+            <a:spLocks noGrp="1"/>
+          </p:cNvSpPr>
+          <p:nvPr>
+            <p:ph type="body" idx="3" sz="quarter"/>
+          </p:nvPr>
+        </p:nvSpPr>
+        <p:spPr/>
+        <p:txBody>
+          <a:bodyPr/>
+          <a:lstStyle/>
+          <a:p>
+            <a:r>
+              <a:t>Talk through any answers the class found difficult.</a:t>
+            </a:r>
+          </a:p>
+        </p:txBody>
+      </p:sp>
+      <p:sp>
+        <p:nvSpPr>
+          <p:cNvPr id="4" name="Slide Number Placeholder 3"/>
+          <p:cNvSpPr>
+            <a:spLocks noGrp="1"/>
+          </p:cNvSpPr>
+          <p:nvPr>
+            <p:ph type="sldNum" idx="5" sz="quarter"/>
+          </p:nvPr>
+        </p:nvSpPr>
+        <p:spPr/>
+      </p:sp>
+    </p:spTree>
+  </p:cSld>
+  <p:clrMapOvr>
+    <a:masterClrMapping/>
+  </p:clrMapOvr>
+</p:notes>
+</file>
+
+<file path=ppt/notesSlides/notesSlide7.xml><?xml version="1.0" encoding="utf-8"?>
 <p:notes xmlns:a="http://schemas.openxmlformats.org/drawingml/2006/main" xmlns:p="http://schemas.openxmlformats.org/presentationml/2006/main" xmlns:r="http://schemas.openxmlformats.org/officeDocument/2006/relationships">
   <p:cSld>
     <p:spTree>
@@ -4052,6 +4313,3496 @@
     <p:bg>
       <p:bgPr>
         <a:solidFill>
+          <a:srgbClr val="FFFFFF"/>
+        </a:solidFill>
+        <a:effectLst/>
+      </p:bgPr>
+    </p:bg>
+    <p:spTree>
+      <p:nvGrpSpPr>
+        <p:cNvPr id="1" name=""/>
+        <p:cNvGrpSpPr/>
+        <p:nvPr/>
+      </p:nvGrpSpPr>
+      <p:grpSpPr/>
+      <p:sp>
+        <p:nvSpPr>
+          <p:cNvPr id="2" name="TextBox 1"/>
+          <p:cNvSpPr txBox="1"/>
+          <p:nvPr/>
+        </p:nvSpPr>
+        <p:spPr>
+          <a:xfrm>
+            <a:off x="548640" y="320040"/>
+            <a:ext cx="11094415" cy="274320"/>
+          </a:xfrm>
+          <a:prstGeom prst="rect">
+            <a:avLst/>
+          </a:prstGeom>
+          <a:noFill/>
+        </p:spPr>
+        <p:txBody>
+          <a:bodyPr wrap="square" anchor="t" lIns="0" rIns="0" tIns="0" bIns="0"/>
+          <a:lstStyle/>
+          <a:p>
+            <a:pPr algn="l"/>
+            <a:r>
+              <a:rPr sz="1100" b="1" i="0">
+                <a:solidFill>
+                  <a:srgbClr val="54595D"/>
+                </a:solidFill>
+                <a:latin typeface="Calibri"/>
+              </a:rPr>
+              <a:t>ENGINEERING CORE  ·  Core topic 10</a:t>
+            </a:r>
+          </a:p>
+        </p:txBody>
+      </p:sp>
+      <p:sp>
+        <p:nvSpPr>
+          <p:cNvPr id="3" name="TextBox 2"/>
+          <p:cNvSpPr txBox="1"/>
+          <p:nvPr/>
+        </p:nvSpPr>
+        <p:spPr>
+          <a:xfrm>
+            <a:off x="548640" y="566928"/>
+            <a:ext cx="11094415" cy="822960"/>
+          </a:xfrm>
+          <a:prstGeom prst="rect">
+            <a:avLst/>
+          </a:prstGeom>
+          <a:noFill/>
+        </p:spPr>
+        <p:txBody>
+          <a:bodyPr wrap="square" anchor="ctr" lIns="0" rIns="0" tIns="0" bIns="0"/>
+          <a:lstStyle/>
+          <a:p>
+            <a:pPr algn="l"/>
+            <a:r>
+              <a:rPr sz="3200" b="1" i="0">
+                <a:solidFill>
+                  <a:srgbClr val="03306E"/>
+                </a:solidFill>
+                <a:latin typeface="Cambria"/>
+              </a:rPr>
+              <a:t>Sensors and actuators in automation</a:t>
+            </a:r>
+          </a:p>
+        </p:txBody>
+      </p:sp>
+      <p:sp>
+        <p:nvSpPr>
+          <p:cNvPr id="4" name="TextBox 3"/>
+          <p:cNvSpPr txBox="1"/>
+          <p:nvPr/>
+        </p:nvSpPr>
+        <p:spPr>
+          <a:xfrm>
+            <a:off x="548640" y="6446520"/>
+            <a:ext cx="8229600" cy="274320"/>
+          </a:xfrm>
+          <a:prstGeom prst="rect">
+            <a:avLst/>
+          </a:prstGeom>
+          <a:noFill/>
+        </p:spPr>
+        <p:txBody>
+          <a:bodyPr wrap="square" anchor="t" lIns="0" rIns="0" tIns="0" bIns="0"/>
+          <a:lstStyle/>
+          <a:p>
+            <a:pPr algn="l"/>
+            <a:r>
+              <a:rPr sz="1000" b="0" i="0">
+                <a:solidFill>
+                  <a:srgbClr val="54595D"/>
+                </a:solidFill>
+                <a:latin typeface="Calibri"/>
+              </a:rPr>
+              <a:t>Design and Development for Engineering and Manufacturing T Level  ·  Control Systems, Sensors and Actuators</a:t>
+            </a:r>
+          </a:p>
+        </p:txBody>
+      </p:sp>
+      <p:sp>
+        <p:nvSpPr>
+          <p:cNvPr id="5" name="TextBox 4"/>
+          <p:cNvSpPr txBox="1"/>
+          <p:nvPr/>
+        </p:nvSpPr>
+        <p:spPr>
+          <a:xfrm>
+            <a:off x="10728655" y="6446520"/>
+            <a:ext cx="914400" cy="274320"/>
+          </a:xfrm>
+          <a:prstGeom prst="rect">
+            <a:avLst/>
+          </a:prstGeom>
+          <a:noFill/>
+        </p:spPr>
+        <p:txBody>
+          <a:bodyPr wrap="square" anchor="t" lIns="0" rIns="0" tIns="0" bIns="0"/>
+          <a:lstStyle/>
+          <a:p>
+            <a:pPr algn="r"/>
+            <a:r>
+              <a:rPr sz="1000" b="0" i="0">
+                <a:solidFill>
+                  <a:srgbClr val="54595D"/>
+                </a:solidFill>
+                <a:latin typeface="Calibri"/>
+              </a:rPr>
+              <a:t>10</a:t>
+            </a:r>
+          </a:p>
+        </p:txBody>
+      </p:sp>
+      <p:sp>
+        <p:nvSpPr>
+          <p:cNvPr id="6" name="TextBox 5"/>
+          <p:cNvSpPr txBox="1"/>
+          <p:nvPr/>
+        </p:nvSpPr>
+        <p:spPr>
+          <a:xfrm>
+            <a:off x="548640" y="1554480"/>
+            <a:ext cx="6720840" cy="4617720"/>
+          </a:xfrm>
+          <a:prstGeom prst="rect">
+            <a:avLst/>
+          </a:prstGeom>
+          <a:noFill/>
+        </p:spPr>
+        <p:txBody>
+          <a:bodyPr wrap="square" lIns="0" rIns="0" tIns="0" bIns="0">
+            <a:spAutoFit/>
+          </a:bodyPr>
+          <a:lstStyle/>
+          <a:p>
+            <a:pPr>
+              <a:spcAft>
+                <a:spcPts val="1200"/>
+              </a:spcAft>
+            </a:pPr>
+            <a:r>
+              <a:rPr sz="2000" b="0">
+                <a:solidFill>
+                  <a:srgbClr val="202122"/>
+                </a:solidFill>
+                <a:latin typeface="Calibri"/>
+              </a:rPr>
+              <a:t>Sensors can be analogue (a continuous range, like temperature) or digital (on or off, like a limit switch). Active sensors need power; passive ones don't.</a:t>
+            </a:r>
+          </a:p>
+          <a:p>
+            <a:pPr>
+              <a:spcAft>
+                <a:spcPts val="1200"/>
+              </a:spcAft>
+            </a:pPr>
+            <a:r>
+              <a:rPr sz="2000" b="0">
+                <a:solidFill>
+                  <a:srgbClr val="202122"/>
+                </a:solidFill>
+                <a:latin typeface="Calibri"/>
+              </a:rPr>
+              <a:t>Common examples are switches, proximity sensors (detecting objects without contact), lasers and vision systems (cameras that inspect or guide).</a:t>
+            </a:r>
+          </a:p>
+          <a:p>
+            <a:pPr>
+              <a:spcAft>
+                <a:spcPts val="1200"/>
+              </a:spcAft>
+            </a:pPr>
+            <a:r>
+              <a:rPr sz="2000" b="0">
+                <a:solidFill>
+                  <a:srgbClr val="202122"/>
+                </a:solidFill>
+                <a:latin typeface="Calibri"/>
+              </a:rPr>
+              <a:t>Connections can be hard-wired, which is reliable, or wireless, which is flexible.</a:t>
+            </a:r>
+          </a:p>
+          <a:p>
+            <a:pPr>
+              <a:spcAft>
+                <a:spcPts val="1200"/>
+              </a:spcAft>
+            </a:pPr>
+            <a:r>
+              <a:rPr sz="2000" b="0">
+                <a:solidFill>
+                  <a:srgbClr val="202122"/>
+                </a:solidFill>
+                <a:latin typeface="Calibri"/>
+              </a:rPr>
+              <a:t>In automation they position and measure objects and control lifting and moving, measuring electrical, mechanical, thermal, chemical, optical and acoustic quantities.</a:t>
+            </a:r>
+          </a:p>
+        </p:txBody>
+      </p:sp>
+      <p:sp>
+        <p:nvSpPr>
+          <p:cNvPr id="7" name="Rounded Rectangle 6"/>
+          <p:cNvSpPr/>
+          <p:nvPr/>
+        </p:nvSpPr>
+        <p:spPr>
+          <a:xfrm>
+            <a:off x="7772400" y="1554480"/>
+            <a:ext cx="3867912" cy="4526280"/>
+          </a:xfrm>
+          <a:prstGeom prst="roundRect">
+            <a:avLst>
+              <a:gd name="adj" fmla="val 8000"/>
+            </a:avLst>
+          </a:prstGeom>
+          <a:solidFill>
+            <a:srgbClr val="03306E"/>
+          </a:solidFill>
+          <a:ln>
+            <a:noFill/>
+          </a:ln>
+          <a:effectLst/>
+        </p:spPr>
+        <p:style>
+          <a:lnRef idx="1">
+            <a:schemeClr val="accent1"/>
+          </a:lnRef>
+          <a:fillRef idx="3">
+            <a:schemeClr val="accent1"/>
+          </a:fillRef>
+          <a:effectRef idx="2">
+            <a:schemeClr val="accent1"/>
+          </a:effectRef>
+          <a:fontRef idx="minor">
+            <a:schemeClr val="lt1"/>
+          </a:fontRef>
+        </p:style>
+        <p:txBody>
+          <a:bodyPr rtlCol="0" anchor="ctr"/>
+          <a:lstStyle/>
+          <a:p/>
+        </p:txBody>
+      </p:sp>
+      <p:sp>
+        <p:nvSpPr>
+          <p:cNvPr id="8" name="Oval 7"/>
+          <p:cNvSpPr/>
+          <p:nvPr/>
+        </p:nvSpPr>
+        <p:spPr>
+          <a:xfrm>
+            <a:off x="8046720" y="1828800"/>
+            <a:ext cx="548640" cy="548640"/>
+          </a:xfrm>
+          <a:prstGeom prst="ellipse">
+            <a:avLst/>
+          </a:prstGeom>
+          <a:solidFill>
+            <a:srgbClr val="F2B705"/>
+          </a:solidFill>
+          <a:ln>
+            <a:noFill/>
+          </a:ln>
+          <a:effectLst/>
+        </p:spPr>
+        <p:style>
+          <a:lnRef idx="1">
+            <a:schemeClr val="accent1"/>
+          </a:lnRef>
+          <a:fillRef idx="3">
+            <a:schemeClr val="accent1"/>
+          </a:fillRef>
+          <a:effectRef idx="2">
+            <a:schemeClr val="accent1"/>
+          </a:effectRef>
+          <a:fontRef idx="minor">
+            <a:schemeClr val="lt1"/>
+          </a:fontRef>
+        </p:style>
+        <p:txBody>
+          <a:bodyPr rtlCol="0" anchor="ctr" lIns="0" rIns="0" tIns="0" bIns="0"/>
+          <a:lstStyle/>
+          <a:p>
+            <a:pPr algn="ctr"/>
+            <a:r>
+              <a:rPr sz="1300" b="1">
+                <a:solidFill>
+                  <a:srgbClr val="202122"/>
+                </a:solidFill>
+                <a:latin typeface="Calibri"/>
+              </a:rPr>
+              <a:t>e.g.</a:t>
+            </a:r>
+          </a:p>
+        </p:txBody>
+      </p:sp>
+      <p:sp>
+        <p:nvSpPr>
+          <p:cNvPr id="9" name="TextBox 8"/>
+          <p:cNvSpPr txBox="1"/>
+          <p:nvPr/>
+        </p:nvSpPr>
+        <p:spPr>
+          <a:xfrm>
+            <a:off x="8046720" y="2560320"/>
+            <a:ext cx="3291840" cy="365760"/>
+          </a:xfrm>
+          <a:prstGeom prst="rect">
+            <a:avLst/>
+          </a:prstGeom>
+          <a:noFill/>
+        </p:spPr>
+        <p:txBody>
+          <a:bodyPr wrap="square" anchor="t" lIns="0" rIns="0" tIns="0" bIns="0"/>
+          <a:lstStyle/>
+          <a:p>
+            <a:pPr algn="l"/>
+            <a:r>
+              <a:rPr sz="1300" b="1" i="0">
+                <a:solidFill>
+                  <a:srgbClr val="A9C8F0"/>
+                </a:solidFill>
+                <a:latin typeface="Calibri"/>
+              </a:rPr>
+              <a:t>EXAMPLE</a:t>
+            </a:r>
+          </a:p>
+        </p:txBody>
+      </p:sp>
+      <p:sp>
+        <p:nvSpPr>
+          <p:cNvPr id="10" name="TextBox 9"/>
+          <p:cNvSpPr txBox="1"/>
+          <p:nvPr/>
+        </p:nvSpPr>
+        <p:spPr>
+          <a:xfrm>
+            <a:off x="8046720" y="2971800"/>
+            <a:ext cx="3291840" cy="2971800"/>
+          </a:xfrm>
+          <a:prstGeom prst="rect">
+            <a:avLst/>
+          </a:prstGeom>
+          <a:noFill/>
+        </p:spPr>
+        <p:txBody>
+          <a:bodyPr wrap="square" anchor="t" lIns="0" rIns="0" tIns="0" bIns="0"/>
+          <a:lstStyle/>
+          <a:p>
+            <a:pPr algn="l"/>
+            <a:r>
+              <a:rPr sz="1900" b="0" i="0">
+                <a:solidFill>
+                  <a:srgbClr val="FFFFFF"/>
+                </a:solidFill>
+                <a:latin typeface="Cambria"/>
+              </a:rPr>
+              <a:t>A vision system photographs every biscuit on a conveyor and signals an actuator to reject any that are broken.</a:t>
+            </a:r>
+          </a:p>
+        </p:txBody>
+      </p:sp>
+    </p:spTree>
+  </p:cSld>
+  <p:clrMapOvr>
+    <a:masterClrMapping/>
+  </p:clrMapOvr>
+</p:sld>
+</file>
+
+<file path=ppt/slides/slide11.xml><?xml version="1.0" encoding="utf-8"?>
+<p:sld xmlns:a="http://schemas.openxmlformats.org/drawingml/2006/main" xmlns:p="http://schemas.openxmlformats.org/presentationml/2006/main" xmlns:r="http://schemas.openxmlformats.org/officeDocument/2006/relationships">
+  <p:cSld>
+    <p:bg>
+      <p:bgPr>
+        <a:solidFill>
+          <a:srgbClr val="FFFFFF"/>
+        </a:solidFill>
+        <a:effectLst/>
+      </p:bgPr>
+    </p:bg>
+    <p:spTree>
+      <p:nvGrpSpPr>
+        <p:cNvPr id="1" name=""/>
+        <p:cNvGrpSpPr/>
+        <p:nvPr/>
+      </p:nvGrpSpPr>
+      <p:grpSpPr/>
+      <p:sp>
+        <p:nvSpPr>
+          <p:cNvPr id="2" name="TextBox 1"/>
+          <p:cNvSpPr txBox="1"/>
+          <p:nvPr/>
+        </p:nvSpPr>
+        <p:spPr>
+          <a:xfrm>
+            <a:off x="548640" y="320040"/>
+            <a:ext cx="11094415" cy="274320"/>
+          </a:xfrm>
+          <a:prstGeom prst="rect">
+            <a:avLst/>
+          </a:prstGeom>
+          <a:noFill/>
+        </p:spPr>
+        <p:txBody>
+          <a:bodyPr wrap="square" anchor="t" lIns="0" rIns="0" tIns="0" bIns="0"/>
+          <a:lstStyle/>
+          <a:p>
+            <a:pPr algn="l"/>
+            <a:r>
+              <a:rPr sz="1100" b="1" i="0">
+                <a:solidFill>
+                  <a:srgbClr val="54595D"/>
+                </a:solidFill>
+                <a:latin typeface="Calibri"/>
+              </a:rPr>
+              <a:t>ENGINEERING CORE  ·  Core topic 10</a:t>
+            </a:r>
+          </a:p>
+        </p:txBody>
+      </p:sp>
+      <p:sp>
+        <p:nvSpPr>
+          <p:cNvPr id="3" name="TextBox 2"/>
+          <p:cNvSpPr txBox="1"/>
+          <p:nvPr/>
+        </p:nvSpPr>
+        <p:spPr>
+          <a:xfrm>
+            <a:off x="548640" y="566928"/>
+            <a:ext cx="11094415" cy="822960"/>
+          </a:xfrm>
+          <a:prstGeom prst="rect">
+            <a:avLst/>
+          </a:prstGeom>
+          <a:noFill/>
+        </p:spPr>
+        <p:txBody>
+          <a:bodyPr wrap="square" anchor="ctr" lIns="0" rIns="0" tIns="0" bIns="0"/>
+          <a:lstStyle/>
+          <a:p>
+            <a:pPr algn="l"/>
+            <a:r>
+              <a:rPr sz="3200" b="1" i="0">
+                <a:solidFill>
+                  <a:srgbClr val="03306E"/>
+                </a:solidFill>
+                <a:latin typeface="Cambria"/>
+              </a:rPr>
+              <a:t>Sensors and actuators in automation</a:t>
+            </a:r>
+          </a:p>
+        </p:txBody>
+      </p:sp>
+      <p:sp>
+        <p:nvSpPr>
+          <p:cNvPr id="4" name="TextBox 3"/>
+          <p:cNvSpPr txBox="1"/>
+          <p:nvPr/>
+        </p:nvSpPr>
+        <p:spPr>
+          <a:xfrm>
+            <a:off x="548640" y="6446520"/>
+            <a:ext cx="8229600" cy="274320"/>
+          </a:xfrm>
+          <a:prstGeom prst="rect">
+            <a:avLst/>
+          </a:prstGeom>
+          <a:noFill/>
+        </p:spPr>
+        <p:txBody>
+          <a:bodyPr wrap="square" anchor="t" lIns="0" rIns="0" tIns="0" bIns="0"/>
+          <a:lstStyle/>
+          <a:p>
+            <a:pPr algn="l"/>
+            <a:r>
+              <a:rPr sz="1000" b="0" i="0">
+                <a:solidFill>
+                  <a:srgbClr val="54595D"/>
+                </a:solidFill>
+                <a:latin typeface="Calibri"/>
+              </a:rPr>
+              <a:t>Design and Development for Engineering and Manufacturing T Level  ·  Control Systems, Sensors and Actuators</a:t>
+            </a:r>
+          </a:p>
+        </p:txBody>
+      </p:sp>
+      <p:sp>
+        <p:nvSpPr>
+          <p:cNvPr id="5" name="TextBox 4"/>
+          <p:cNvSpPr txBox="1"/>
+          <p:nvPr/>
+        </p:nvSpPr>
+        <p:spPr>
+          <a:xfrm>
+            <a:off x="10728655" y="6446520"/>
+            <a:ext cx="914400" cy="274320"/>
+          </a:xfrm>
+          <a:prstGeom prst="rect">
+            <a:avLst/>
+          </a:prstGeom>
+          <a:noFill/>
+        </p:spPr>
+        <p:txBody>
+          <a:bodyPr wrap="square" anchor="t" lIns="0" rIns="0" tIns="0" bIns="0"/>
+          <a:lstStyle/>
+          <a:p>
+            <a:pPr algn="r"/>
+            <a:r>
+              <a:rPr sz="1000" b="0" i="0">
+                <a:solidFill>
+                  <a:srgbClr val="54595D"/>
+                </a:solidFill>
+                <a:latin typeface="Calibri"/>
+              </a:rPr>
+              <a:t>11</a:t>
+            </a:r>
+          </a:p>
+        </p:txBody>
+      </p:sp>
+      <p:sp>
+        <p:nvSpPr>
+          <p:cNvPr id="6" name="Rounded Rectangle 5"/>
+          <p:cNvSpPr/>
+          <p:nvPr/>
+        </p:nvSpPr>
+        <p:spPr>
+          <a:xfrm>
+            <a:off x="548640" y="1600200"/>
+            <a:ext cx="5410047" cy="2148840"/>
+          </a:xfrm>
+          <a:prstGeom prst="roundRect">
+            <a:avLst>
+              <a:gd name="adj" fmla="val 6000"/>
+            </a:avLst>
+          </a:prstGeom>
+          <a:solidFill>
+            <a:srgbClr val="EAF3FF"/>
+          </a:solidFill>
+          <a:ln>
+            <a:noFill/>
+          </a:ln>
+          <a:effectLst/>
+        </p:spPr>
+        <p:style>
+          <a:lnRef idx="1">
+            <a:schemeClr val="accent1"/>
+          </a:lnRef>
+          <a:fillRef idx="3">
+            <a:schemeClr val="accent1"/>
+          </a:fillRef>
+          <a:effectRef idx="2">
+            <a:schemeClr val="accent1"/>
+          </a:effectRef>
+          <a:fontRef idx="minor">
+            <a:schemeClr val="lt1"/>
+          </a:fontRef>
+        </p:style>
+        <p:txBody>
+          <a:bodyPr rtlCol="0" anchor="ctr"/>
+          <a:lstStyle/>
+          <a:p/>
+        </p:txBody>
+      </p:sp>
+      <p:sp>
+        <p:nvSpPr>
+          <p:cNvPr id="7" name="Oval 6"/>
+          <p:cNvSpPr/>
+          <p:nvPr/>
+        </p:nvSpPr>
+        <p:spPr>
+          <a:xfrm>
+            <a:off x="777240" y="1828800"/>
+            <a:ext cx="457200" cy="457200"/>
+          </a:xfrm>
+          <a:prstGeom prst="ellipse">
+            <a:avLst/>
+          </a:prstGeom>
+          <a:solidFill>
+            <a:srgbClr val="F2B705"/>
+          </a:solidFill>
+          <a:ln>
+            <a:noFill/>
+          </a:ln>
+          <a:effectLst/>
+        </p:spPr>
+        <p:style>
+          <a:lnRef idx="1">
+            <a:schemeClr val="accent1"/>
+          </a:lnRef>
+          <a:fillRef idx="3">
+            <a:schemeClr val="accent1"/>
+          </a:fillRef>
+          <a:effectRef idx="2">
+            <a:schemeClr val="accent1"/>
+          </a:effectRef>
+          <a:fontRef idx="minor">
+            <a:schemeClr val="lt1"/>
+          </a:fontRef>
+        </p:style>
+        <p:txBody>
+          <a:bodyPr rtlCol="0" anchor="ctr" lIns="0" rIns="0" tIns="0" bIns="0"/>
+          <a:lstStyle/>
+          <a:p>
+            <a:pPr algn="ctr"/>
+            <a:r>
+              <a:rPr sz="1500" b="1">
+                <a:solidFill>
+                  <a:srgbClr val="202122"/>
+                </a:solidFill>
+                <a:latin typeface="Calibri"/>
+              </a:rPr>
+              <a:t>1</a:t>
+            </a:r>
+          </a:p>
+        </p:txBody>
+      </p:sp>
+      <p:sp>
+        <p:nvSpPr>
+          <p:cNvPr id="8" name="TextBox 7"/>
+          <p:cNvSpPr txBox="1"/>
+          <p:nvPr/>
+        </p:nvSpPr>
+        <p:spPr>
+          <a:xfrm>
+            <a:off x="1371600" y="1801368"/>
+            <a:ext cx="4404207" cy="512064"/>
+          </a:xfrm>
+          <a:prstGeom prst="rect">
+            <a:avLst/>
+          </a:prstGeom>
+          <a:noFill/>
+        </p:spPr>
+        <p:txBody>
+          <a:bodyPr wrap="square" anchor="ctr" lIns="0" rIns="0" tIns="0" bIns="0"/>
+          <a:lstStyle/>
+          <a:p>
+            <a:pPr algn="l"/>
+            <a:r>
+              <a:rPr sz="1900" b="1" i="0">
+                <a:solidFill>
+                  <a:srgbClr val="03306E"/>
+                </a:solidFill>
+                <a:latin typeface="Calibri"/>
+              </a:rPr>
+              <a:t>Types</a:t>
+            </a:r>
+          </a:p>
+        </p:txBody>
+      </p:sp>
+      <p:sp>
+        <p:nvSpPr>
+          <p:cNvPr id="9" name="TextBox 8"/>
+          <p:cNvSpPr txBox="1"/>
+          <p:nvPr/>
+        </p:nvSpPr>
+        <p:spPr>
+          <a:xfrm>
+            <a:off x="777240" y="2468880"/>
+            <a:ext cx="4952847" cy="1143000"/>
+          </a:xfrm>
+          <a:prstGeom prst="rect">
+            <a:avLst/>
+          </a:prstGeom>
+          <a:noFill/>
+        </p:spPr>
+        <p:txBody>
+          <a:bodyPr wrap="square" anchor="t" lIns="0" rIns="0" tIns="0" bIns="0"/>
+          <a:lstStyle/>
+          <a:p>
+            <a:pPr algn="l"/>
+            <a:r>
+              <a:rPr sz="2000" b="0" i="0">
+                <a:solidFill>
+                  <a:srgbClr val="202122"/>
+                </a:solidFill>
+                <a:latin typeface="Calibri"/>
+              </a:rPr>
+              <a:t>Analogue or digital; active (needs power) or passive.</a:t>
+            </a:r>
+          </a:p>
+        </p:txBody>
+      </p:sp>
+      <p:sp>
+        <p:nvSpPr>
+          <p:cNvPr id="10" name="Rounded Rectangle 9"/>
+          <p:cNvSpPr/>
+          <p:nvPr/>
+        </p:nvSpPr>
+        <p:spPr>
+          <a:xfrm>
+            <a:off x="6233007" y="1600200"/>
+            <a:ext cx="5410047" cy="2148840"/>
+          </a:xfrm>
+          <a:prstGeom prst="roundRect">
+            <a:avLst>
+              <a:gd name="adj" fmla="val 6000"/>
+            </a:avLst>
+          </a:prstGeom>
+          <a:solidFill>
+            <a:srgbClr val="EAF3FF"/>
+          </a:solidFill>
+          <a:ln>
+            <a:noFill/>
+          </a:ln>
+          <a:effectLst/>
+        </p:spPr>
+        <p:style>
+          <a:lnRef idx="1">
+            <a:schemeClr val="accent1"/>
+          </a:lnRef>
+          <a:fillRef idx="3">
+            <a:schemeClr val="accent1"/>
+          </a:fillRef>
+          <a:effectRef idx="2">
+            <a:schemeClr val="accent1"/>
+          </a:effectRef>
+          <a:fontRef idx="minor">
+            <a:schemeClr val="lt1"/>
+          </a:fontRef>
+        </p:style>
+        <p:txBody>
+          <a:bodyPr rtlCol="0" anchor="ctr"/>
+          <a:lstStyle/>
+          <a:p/>
+        </p:txBody>
+      </p:sp>
+      <p:sp>
+        <p:nvSpPr>
+          <p:cNvPr id="11" name="Oval 10"/>
+          <p:cNvSpPr/>
+          <p:nvPr/>
+        </p:nvSpPr>
+        <p:spPr>
+          <a:xfrm>
+            <a:off x="6461607" y="1828800"/>
+            <a:ext cx="457200" cy="457200"/>
+          </a:xfrm>
+          <a:prstGeom prst="ellipse">
+            <a:avLst/>
+          </a:prstGeom>
+          <a:solidFill>
+            <a:srgbClr val="F2B705"/>
+          </a:solidFill>
+          <a:ln>
+            <a:noFill/>
+          </a:ln>
+          <a:effectLst/>
+        </p:spPr>
+        <p:style>
+          <a:lnRef idx="1">
+            <a:schemeClr val="accent1"/>
+          </a:lnRef>
+          <a:fillRef idx="3">
+            <a:schemeClr val="accent1"/>
+          </a:fillRef>
+          <a:effectRef idx="2">
+            <a:schemeClr val="accent1"/>
+          </a:effectRef>
+          <a:fontRef idx="minor">
+            <a:schemeClr val="lt1"/>
+          </a:fontRef>
+        </p:style>
+        <p:txBody>
+          <a:bodyPr rtlCol="0" anchor="ctr" lIns="0" rIns="0" tIns="0" bIns="0"/>
+          <a:lstStyle/>
+          <a:p>
+            <a:pPr algn="ctr"/>
+            <a:r>
+              <a:rPr sz="1500" b="1">
+                <a:solidFill>
+                  <a:srgbClr val="202122"/>
+                </a:solidFill>
+                <a:latin typeface="Calibri"/>
+              </a:rPr>
+              <a:t>2</a:t>
+            </a:r>
+          </a:p>
+        </p:txBody>
+      </p:sp>
+      <p:sp>
+        <p:nvSpPr>
+          <p:cNvPr id="12" name="TextBox 11"/>
+          <p:cNvSpPr txBox="1"/>
+          <p:nvPr/>
+        </p:nvSpPr>
+        <p:spPr>
+          <a:xfrm>
+            <a:off x="7055967" y="1801368"/>
+            <a:ext cx="4404207" cy="512064"/>
+          </a:xfrm>
+          <a:prstGeom prst="rect">
+            <a:avLst/>
+          </a:prstGeom>
+          <a:noFill/>
+        </p:spPr>
+        <p:txBody>
+          <a:bodyPr wrap="square" anchor="ctr" lIns="0" rIns="0" tIns="0" bIns="0"/>
+          <a:lstStyle/>
+          <a:p>
+            <a:pPr algn="l"/>
+            <a:r>
+              <a:rPr sz="1900" b="1" i="0">
+                <a:solidFill>
+                  <a:srgbClr val="03306E"/>
+                </a:solidFill>
+                <a:latin typeface="Calibri"/>
+              </a:rPr>
+              <a:t>Examples</a:t>
+            </a:r>
+          </a:p>
+        </p:txBody>
+      </p:sp>
+      <p:sp>
+        <p:nvSpPr>
+          <p:cNvPr id="13" name="TextBox 12"/>
+          <p:cNvSpPr txBox="1"/>
+          <p:nvPr/>
+        </p:nvSpPr>
+        <p:spPr>
+          <a:xfrm>
+            <a:off x="6461607" y="2468880"/>
+            <a:ext cx="4952847" cy="1143000"/>
+          </a:xfrm>
+          <a:prstGeom prst="rect">
+            <a:avLst/>
+          </a:prstGeom>
+          <a:noFill/>
+        </p:spPr>
+        <p:txBody>
+          <a:bodyPr wrap="square" anchor="t" lIns="0" rIns="0" tIns="0" bIns="0"/>
+          <a:lstStyle/>
+          <a:p>
+            <a:pPr algn="l"/>
+            <a:r>
+              <a:rPr sz="2000" b="0" i="0">
+                <a:solidFill>
+                  <a:srgbClr val="202122"/>
+                </a:solidFill>
+                <a:latin typeface="Calibri"/>
+              </a:rPr>
+              <a:t>Switches, proximity sensors, lasers, vision systems.</a:t>
+            </a:r>
+          </a:p>
+        </p:txBody>
+      </p:sp>
+      <p:sp>
+        <p:nvSpPr>
+          <p:cNvPr id="14" name="Rounded Rectangle 13"/>
+          <p:cNvSpPr/>
+          <p:nvPr/>
+        </p:nvSpPr>
+        <p:spPr>
+          <a:xfrm>
+            <a:off x="548640" y="4023360"/>
+            <a:ext cx="5410047" cy="2148840"/>
+          </a:xfrm>
+          <a:prstGeom prst="roundRect">
+            <a:avLst>
+              <a:gd name="adj" fmla="val 6000"/>
+            </a:avLst>
+          </a:prstGeom>
+          <a:solidFill>
+            <a:srgbClr val="EAF3FF"/>
+          </a:solidFill>
+          <a:ln>
+            <a:noFill/>
+          </a:ln>
+          <a:effectLst/>
+        </p:spPr>
+        <p:style>
+          <a:lnRef idx="1">
+            <a:schemeClr val="accent1"/>
+          </a:lnRef>
+          <a:fillRef idx="3">
+            <a:schemeClr val="accent1"/>
+          </a:fillRef>
+          <a:effectRef idx="2">
+            <a:schemeClr val="accent1"/>
+          </a:effectRef>
+          <a:fontRef idx="minor">
+            <a:schemeClr val="lt1"/>
+          </a:fontRef>
+        </p:style>
+        <p:txBody>
+          <a:bodyPr rtlCol="0" anchor="ctr"/>
+          <a:lstStyle/>
+          <a:p/>
+        </p:txBody>
+      </p:sp>
+      <p:sp>
+        <p:nvSpPr>
+          <p:cNvPr id="15" name="Oval 14"/>
+          <p:cNvSpPr/>
+          <p:nvPr/>
+        </p:nvSpPr>
+        <p:spPr>
+          <a:xfrm>
+            <a:off x="777240" y="4251960"/>
+            <a:ext cx="457200" cy="457200"/>
+          </a:xfrm>
+          <a:prstGeom prst="ellipse">
+            <a:avLst/>
+          </a:prstGeom>
+          <a:solidFill>
+            <a:srgbClr val="F2B705"/>
+          </a:solidFill>
+          <a:ln>
+            <a:noFill/>
+          </a:ln>
+          <a:effectLst/>
+        </p:spPr>
+        <p:style>
+          <a:lnRef idx="1">
+            <a:schemeClr val="accent1"/>
+          </a:lnRef>
+          <a:fillRef idx="3">
+            <a:schemeClr val="accent1"/>
+          </a:fillRef>
+          <a:effectRef idx="2">
+            <a:schemeClr val="accent1"/>
+          </a:effectRef>
+          <a:fontRef idx="minor">
+            <a:schemeClr val="lt1"/>
+          </a:fontRef>
+        </p:style>
+        <p:txBody>
+          <a:bodyPr rtlCol="0" anchor="ctr" lIns="0" rIns="0" tIns="0" bIns="0"/>
+          <a:lstStyle/>
+          <a:p>
+            <a:pPr algn="ctr"/>
+            <a:r>
+              <a:rPr sz="1500" b="1">
+                <a:solidFill>
+                  <a:srgbClr val="202122"/>
+                </a:solidFill>
+                <a:latin typeface="Calibri"/>
+              </a:rPr>
+              <a:t>3</a:t>
+            </a:r>
+          </a:p>
+        </p:txBody>
+      </p:sp>
+      <p:sp>
+        <p:nvSpPr>
+          <p:cNvPr id="16" name="TextBox 15"/>
+          <p:cNvSpPr txBox="1"/>
+          <p:nvPr/>
+        </p:nvSpPr>
+        <p:spPr>
+          <a:xfrm>
+            <a:off x="1371600" y="4224528"/>
+            <a:ext cx="4404207" cy="512064"/>
+          </a:xfrm>
+          <a:prstGeom prst="rect">
+            <a:avLst/>
+          </a:prstGeom>
+          <a:noFill/>
+        </p:spPr>
+        <p:txBody>
+          <a:bodyPr wrap="square" anchor="ctr" lIns="0" rIns="0" tIns="0" bIns="0"/>
+          <a:lstStyle/>
+          <a:p>
+            <a:pPr algn="l"/>
+            <a:r>
+              <a:rPr sz="1900" b="1" i="0">
+                <a:solidFill>
+                  <a:srgbClr val="03306E"/>
+                </a:solidFill>
+                <a:latin typeface="Calibri"/>
+              </a:rPr>
+              <a:t>Connections</a:t>
+            </a:r>
+          </a:p>
+        </p:txBody>
+      </p:sp>
+      <p:sp>
+        <p:nvSpPr>
+          <p:cNvPr id="17" name="TextBox 16"/>
+          <p:cNvSpPr txBox="1"/>
+          <p:nvPr/>
+        </p:nvSpPr>
+        <p:spPr>
+          <a:xfrm>
+            <a:off x="777240" y="4892040"/>
+            <a:ext cx="4952847" cy="1143000"/>
+          </a:xfrm>
+          <a:prstGeom prst="rect">
+            <a:avLst/>
+          </a:prstGeom>
+          <a:noFill/>
+        </p:spPr>
+        <p:txBody>
+          <a:bodyPr wrap="square" anchor="t" lIns="0" rIns="0" tIns="0" bIns="0"/>
+          <a:lstStyle/>
+          <a:p>
+            <a:pPr algn="l"/>
+            <a:r>
+              <a:rPr sz="2000" b="0" i="0">
+                <a:solidFill>
+                  <a:srgbClr val="202122"/>
+                </a:solidFill>
+                <a:latin typeface="Calibri"/>
+              </a:rPr>
+              <a:t>Hard-wired or wireless; suitable power sources.</a:t>
+            </a:r>
+          </a:p>
+        </p:txBody>
+      </p:sp>
+      <p:sp>
+        <p:nvSpPr>
+          <p:cNvPr id="18" name="Rounded Rectangle 17"/>
+          <p:cNvSpPr/>
+          <p:nvPr/>
+        </p:nvSpPr>
+        <p:spPr>
+          <a:xfrm>
+            <a:off x="6233007" y="4023360"/>
+            <a:ext cx="5410047" cy="2148840"/>
+          </a:xfrm>
+          <a:prstGeom prst="roundRect">
+            <a:avLst>
+              <a:gd name="adj" fmla="val 6000"/>
+            </a:avLst>
+          </a:prstGeom>
+          <a:solidFill>
+            <a:srgbClr val="EAF3FF"/>
+          </a:solidFill>
+          <a:ln>
+            <a:noFill/>
+          </a:ln>
+          <a:effectLst/>
+        </p:spPr>
+        <p:style>
+          <a:lnRef idx="1">
+            <a:schemeClr val="accent1"/>
+          </a:lnRef>
+          <a:fillRef idx="3">
+            <a:schemeClr val="accent1"/>
+          </a:fillRef>
+          <a:effectRef idx="2">
+            <a:schemeClr val="accent1"/>
+          </a:effectRef>
+          <a:fontRef idx="minor">
+            <a:schemeClr val="lt1"/>
+          </a:fontRef>
+        </p:style>
+        <p:txBody>
+          <a:bodyPr rtlCol="0" anchor="ctr"/>
+          <a:lstStyle/>
+          <a:p/>
+        </p:txBody>
+      </p:sp>
+      <p:sp>
+        <p:nvSpPr>
+          <p:cNvPr id="19" name="Oval 18"/>
+          <p:cNvSpPr/>
+          <p:nvPr/>
+        </p:nvSpPr>
+        <p:spPr>
+          <a:xfrm>
+            <a:off x="6461607" y="4251960"/>
+            <a:ext cx="457200" cy="457200"/>
+          </a:xfrm>
+          <a:prstGeom prst="ellipse">
+            <a:avLst/>
+          </a:prstGeom>
+          <a:solidFill>
+            <a:srgbClr val="F2B705"/>
+          </a:solidFill>
+          <a:ln>
+            <a:noFill/>
+          </a:ln>
+          <a:effectLst/>
+        </p:spPr>
+        <p:style>
+          <a:lnRef idx="1">
+            <a:schemeClr val="accent1"/>
+          </a:lnRef>
+          <a:fillRef idx="3">
+            <a:schemeClr val="accent1"/>
+          </a:fillRef>
+          <a:effectRef idx="2">
+            <a:schemeClr val="accent1"/>
+          </a:effectRef>
+          <a:fontRef idx="minor">
+            <a:schemeClr val="lt1"/>
+          </a:fontRef>
+        </p:style>
+        <p:txBody>
+          <a:bodyPr rtlCol="0" anchor="ctr" lIns="0" rIns="0" tIns="0" bIns="0"/>
+          <a:lstStyle/>
+          <a:p>
+            <a:pPr algn="ctr"/>
+            <a:r>
+              <a:rPr sz="1500" b="1">
+                <a:solidFill>
+                  <a:srgbClr val="202122"/>
+                </a:solidFill>
+                <a:latin typeface="Calibri"/>
+              </a:rPr>
+              <a:t>4</a:t>
+            </a:r>
+          </a:p>
+        </p:txBody>
+      </p:sp>
+      <p:sp>
+        <p:nvSpPr>
+          <p:cNvPr id="20" name="TextBox 19"/>
+          <p:cNvSpPr txBox="1"/>
+          <p:nvPr/>
+        </p:nvSpPr>
+        <p:spPr>
+          <a:xfrm>
+            <a:off x="7055967" y="4224528"/>
+            <a:ext cx="4404207" cy="512064"/>
+          </a:xfrm>
+          <a:prstGeom prst="rect">
+            <a:avLst/>
+          </a:prstGeom>
+          <a:noFill/>
+        </p:spPr>
+        <p:txBody>
+          <a:bodyPr wrap="square" anchor="ctr" lIns="0" rIns="0" tIns="0" bIns="0"/>
+          <a:lstStyle/>
+          <a:p>
+            <a:pPr algn="l"/>
+            <a:r>
+              <a:rPr sz="1900" b="1" i="0">
+                <a:solidFill>
+                  <a:srgbClr val="03306E"/>
+                </a:solidFill>
+                <a:latin typeface="Calibri"/>
+              </a:rPr>
+              <a:t>Uses</a:t>
+            </a:r>
+          </a:p>
+        </p:txBody>
+      </p:sp>
+      <p:sp>
+        <p:nvSpPr>
+          <p:cNvPr id="21" name="TextBox 20"/>
+          <p:cNvSpPr txBox="1"/>
+          <p:nvPr/>
+        </p:nvSpPr>
+        <p:spPr>
+          <a:xfrm>
+            <a:off x="6461607" y="4892040"/>
+            <a:ext cx="4952847" cy="1143000"/>
+          </a:xfrm>
+          <a:prstGeom prst="rect">
+            <a:avLst/>
+          </a:prstGeom>
+          <a:noFill/>
+        </p:spPr>
+        <p:txBody>
+          <a:bodyPr wrap="square" anchor="t" lIns="0" rIns="0" tIns="0" bIns="0"/>
+          <a:lstStyle/>
+          <a:p>
+            <a:pPr algn="l"/>
+            <a:r>
+              <a:rPr sz="2000" b="0" i="0">
+                <a:solidFill>
+                  <a:srgbClr val="202122"/>
+                </a:solidFill>
+                <a:latin typeface="Calibri"/>
+              </a:rPr>
+              <a:t>Positioning, measuring, lifting and moving objects.</a:t>
+            </a:r>
+          </a:p>
+        </p:txBody>
+      </p:sp>
+    </p:spTree>
+  </p:cSld>
+  <p:clrMapOvr>
+    <a:masterClrMapping/>
+  </p:clrMapOvr>
+</p:sld>
+</file>
+
+<file path=ppt/slides/slide12.xml><?xml version="1.0" encoding="utf-8"?>
+<p:sld xmlns:a="http://schemas.openxmlformats.org/drawingml/2006/main" xmlns:p="http://schemas.openxmlformats.org/presentationml/2006/main" xmlns:r="http://schemas.openxmlformats.org/officeDocument/2006/relationships">
+  <p:cSld>
+    <p:bg>
+      <p:bgPr>
+        <a:solidFill>
+          <a:srgbClr val="FFFFFF"/>
+        </a:solidFill>
+        <a:effectLst/>
+      </p:bgPr>
+    </p:bg>
+    <p:spTree>
+      <p:nvGrpSpPr>
+        <p:cNvPr id="1" name=""/>
+        <p:cNvGrpSpPr/>
+        <p:nvPr/>
+      </p:nvGrpSpPr>
+      <p:grpSpPr/>
+      <p:sp>
+        <p:nvSpPr>
+          <p:cNvPr id="2" name="TextBox 1"/>
+          <p:cNvSpPr txBox="1"/>
+          <p:nvPr/>
+        </p:nvSpPr>
+        <p:spPr>
+          <a:xfrm>
+            <a:off x="548640" y="320040"/>
+            <a:ext cx="11094415" cy="274320"/>
+          </a:xfrm>
+          <a:prstGeom prst="rect">
+            <a:avLst/>
+          </a:prstGeom>
+          <a:noFill/>
+        </p:spPr>
+        <p:txBody>
+          <a:bodyPr wrap="square" anchor="t" lIns="0" rIns="0" tIns="0" bIns="0"/>
+          <a:lstStyle/>
+          <a:p>
+            <a:pPr algn="l"/>
+            <a:r>
+              <a:rPr sz="1100" b="1" i="0">
+                <a:solidFill>
+                  <a:srgbClr val="54595D"/>
+                </a:solidFill>
+                <a:latin typeface="Calibri"/>
+              </a:rPr>
+              <a:t>ENGINEERING CORE  ·  Core topic 10</a:t>
+            </a:r>
+          </a:p>
+        </p:txBody>
+      </p:sp>
+      <p:sp>
+        <p:nvSpPr>
+          <p:cNvPr id="3" name="TextBox 2"/>
+          <p:cNvSpPr txBox="1"/>
+          <p:nvPr/>
+        </p:nvSpPr>
+        <p:spPr>
+          <a:xfrm>
+            <a:off x="548640" y="566928"/>
+            <a:ext cx="11094415" cy="822960"/>
+          </a:xfrm>
+          <a:prstGeom prst="rect">
+            <a:avLst/>
+          </a:prstGeom>
+          <a:noFill/>
+        </p:spPr>
+        <p:txBody>
+          <a:bodyPr wrap="square" anchor="ctr" lIns="0" rIns="0" tIns="0" bIns="0"/>
+          <a:lstStyle/>
+          <a:p>
+            <a:pPr algn="l"/>
+            <a:r>
+              <a:rPr sz="3200" b="1" i="0">
+                <a:solidFill>
+                  <a:srgbClr val="03306E"/>
+                </a:solidFill>
+                <a:latin typeface="Cambria"/>
+              </a:rPr>
+              <a:t>Quick check: Sensors and actuators in automation</a:t>
+            </a:r>
+          </a:p>
+        </p:txBody>
+      </p:sp>
+      <p:sp>
+        <p:nvSpPr>
+          <p:cNvPr id="4" name="TextBox 3"/>
+          <p:cNvSpPr txBox="1"/>
+          <p:nvPr/>
+        </p:nvSpPr>
+        <p:spPr>
+          <a:xfrm>
+            <a:off x="548640" y="6446520"/>
+            <a:ext cx="8229600" cy="274320"/>
+          </a:xfrm>
+          <a:prstGeom prst="rect">
+            <a:avLst/>
+          </a:prstGeom>
+          <a:noFill/>
+        </p:spPr>
+        <p:txBody>
+          <a:bodyPr wrap="square" anchor="t" lIns="0" rIns="0" tIns="0" bIns="0"/>
+          <a:lstStyle/>
+          <a:p>
+            <a:pPr algn="l"/>
+            <a:r>
+              <a:rPr sz="1000" b="0" i="0">
+                <a:solidFill>
+                  <a:srgbClr val="54595D"/>
+                </a:solidFill>
+                <a:latin typeface="Calibri"/>
+              </a:rPr>
+              <a:t>Design and Development for Engineering and Manufacturing T Level  ·  Control Systems, Sensors and Actuators</a:t>
+            </a:r>
+          </a:p>
+        </p:txBody>
+      </p:sp>
+      <p:sp>
+        <p:nvSpPr>
+          <p:cNvPr id="5" name="TextBox 4"/>
+          <p:cNvSpPr txBox="1"/>
+          <p:nvPr/>
+        </p:nvSpPr>
+        <p:spPr>
+          <a:xfrm>
+            <a:off x="10728655" y="6446520"/>
+            <a:ext cx="914400" cy="274320"/>
+          </a:xfrm>
+          <a:prstGeom prst="rect">
+            <a:avLst/>
+          </a:prstGeom>
+          <a:noFill/>
+        </p:spPr>
+        <p:txBody>
+          <a:bodyPr wrap="square" anchor="t" lIns="0" rIns="0" tIns="0" bIns="0"/>
+          <a:lstStyle/>
+          <a:p>
+            <a:pPr algn="r"/>
+            <a:r>
+              <a:rPr sz="1000" b="0" i="0">
+                <a:solidFill>
+                  <a:srgbClr val="54595D"/>
+                </a:solidFill>
+                <a:latin typeface="Calibri"/>
+              </a:rPr>
+              <a:t>12</a:t>
+            </a:r>
+          </a:p>
+        </p:txBody>
+      </p:sp>
+      <p:sp>
+        <p:nvSpPr>
+          <p:cNvPr id="6" name="Oval 5"/>
+          <p:cNvSpPr/>
+          <p:nvPr/>
+        </p:nvSpPr>
+        <p:spPr>
+          <a:xfrm>
+            <a:off x="548640" y="1691640"/>
+            <a:ext cx="502920" cy="502920"/>
+          </a:xfrm>
+          <a:prstGeom prst="ellipse">
+            <a:avLst/>
+          </a:prstGeom>
+          <a:solidFill>
+            <a:srgbClr val="F2B705"/>
+          </a:solidFill>
+          <a:ln>
+            <a:noFill/>
+          </a:ln>
+          <a:effectLst/>
+        </p:spPr>
+        <p:style>
+          <a:lnRef idx="1">
+            <a:schemeClr val="accent1"/>
+          </a:lnRef>
+          <a:fillRef idx="3">
+            <a:schemeClr val="accent1"/>
+          </a:fillRef>
+          <a:effectRef idx="2">
+            <a:schemeClr val="accent1"/>
+          </a:effectRef>
+          <a:fontRef idx="minor">
+            <a:schemeClr val="lt1"/>
+          </a:fontRef>
+        </p:style>
+        <p:txBody>
+          <a:bodyPr rtlCol="0" anchor="ctr" lIns="0" rIns="0" tIns="0" bIns="0"/>
+          <a:lstStyle/>
+          <a:p>
+            <a:pPr algn="ctr"/>
+            <a:r>
+              <a:rPr sz="1600" b="1">
+                <a:solidFill>
+                  <a:srgbClr val="202122"/>
+                </a:solidFill>
+                <a:latin typeface="Calibri"/>
+              </a:rPr>
+              <a:t>1</a:t>
+            </a:r>
+          </a:p>
+        </p:txBody>
+      </p:sp>
+      <p:sp>
+        <p:nvSpPr>
+          <p:cNvPr id="7" name="TextBox 6"/>
+          <p:cNvSpPr txBox="1"/>
+          <p:nvPr/>
+        </p:nvSpPr>
+        <p:spPr>
+          <a:xfrm>
+            <a:off x="1371600" y="1645920"/>
+            <a:ext cx="10271455" cy="1188720"/>
+          </a:xfrm>
+          <a:prstGeom prst="rect">
+            <a:avLst/>
+          </a:prstGeom>
+          <a:noFill/>
+        </p:spPr>
+        <p:txBody>
+          <a:bodyPr wrap="square" anchor="t" lIns="0" rIns="0" tIns="0" bIns="0"/>
+          <a:lstStyle/>
+          <a:p>
+            <a:pPr algn="l"/>
+            <a:r>
+              <a:rPr sz="2400" b="0" i="0">
+                <a:solidFill>
+                  <a:srgbClr val="202122"/>
+                </a:solidFill>
+                <a:latin typeface="Calibri"/>
+              </a:rPr>
+              <a:t>What is a proximity sensor?</a:t>
+            </a:r>
+          </a:p>
+        </p:txBody>
+      </p:sp>
+      <p:sp>
+        <p:nvSpPr>
+          <p:cNvPr id="8" name="Oval 7"/>
+          <p:cNvSpPr/>
+          <p:nvPr/>
+        </p:nvSpPr>
+        <p:spPr>
+          <a:xfrm>
+            <a:off x="548640" y="3108960"/>
+            <a:ext cx="502920" cy="502920"/>
+          </a:xfrm>
+          <a:prstGeom prst="ellipse">
+            <a:avLst/>
+          </a:prstGeom>
+          <a:solidFill>
+            <a:srgbClr val="F2B705"/>
+          </a:solidFill>
+          <a:ln>
+            <a:noFill/>
+          </a:ln>
+          <a:effectLst/>
+        </p:spPr>
+        <p:style>
+          <a:lnRef idx="1">
+            <a:schemeClr val="accent1"/>
+          </a:lnRef>
+          <a:fillRef idx="3">
+            <a:schemeClr val="accent1"/>
+          </a:fillRef>
+          <a:effectRef idx="2">
+            <a:schemeClr val="accent1"/>
+          </a:effectRef>
+          <a:fontRef idx="minor">
+            <a:schemeClr val="lt1"/>
+          </a:fontRef>
+        </p:style>
+        <p:txBody>
+          <a:bodyPr rtlCol="0" anchor="ctr" lIns="0" rIns="0" tIns="0" bIns="0"/>
+          <a:lstStyle/>
+          <a:p>
+            <a:pPr algn="ctr"/>
+            <a:r>
+              <a:rPr sz="1600" b="1">
+                <a:solidFill>
+                  <a:srgbClr val="202122"/>
+                </a:solidFill>
+                <a:latin typeface="Calibri"/>
+              </a:rPr>
+              <a:t>2</a:t>
+            </a:r>
+          </a:p>
+        </p:txBody>
+      </p:sp>
+      <p:sp>
+        <p:nvSpPr>
+          <p:cNvPr id="9" name="TextBox 8"/>
+          <p:cNvSpPr txBox="1"/>
+          <p:nvPr/>
+        </p:nvSpPr>
+        <p:spPr>
+          <a:xfrm>
+            <a:off x="1371600" y="3063240"/>
+            <a:ext cx="10271455" cy="1188720"/>
+          </a:xfrm>
+          <a:prstGeom prst="rect">
+            <a:avLst/>
+          </a:prstGeom>
+          <a:noFill/>
+        </p:spPr>
+        <p:txBody>
+          <a:bodyPr wrap="square" anchor="t" lIns="0" rIns="0" tIns="0" bIns="0"/>
+          <a:lstStyle/>
+          <a:p>
+            <a:pPr algn="l"/>
+            <a:r>
+              <a:rPr sz="2400" b="0" i="0">
+                <a:solidFill>
+                  <a:srgbClr val="202122"/>
+                </a:solidFill>
+                <a:latin typeface="Calibri"/>
+              </a:rPr>
+              <a:t>What is the difference between active and passive sensors?</a:t>
+            </a:r>
+          </a:p>
+        </p:txBody>
+      </p:sp>
+      <p:sp>
+        <p:nvSpPr>
+          <p:cNvPr id="10" name="Oval 9"/>
+          <p:cNvSpPr/>
+          <p:nvPr/>
+        </p:nvSpPr>
+        <p:spPr>
+          <a:xfrm>
+            <a:off x="548640" y="4526280"/>
+            <a:ext cx="502920" cy="502920"/>
+          </a:xfrm>
+          <a:prstGeom prst="ellipse">
+            <a:avLst/>
+          </a:prstGeom>
+          <a:solidFill>
+            <a:srgbClr val="F2B705"/>
+          </a:solidFill>
+          <a:ln>
+            <a:noFill/>
+          </a:ln>
+          <a:effectLst/>
+        </p:spPr>
+        <p:style>
+          <a:lnRef idx="1">
+            <a:schemeClr val="accent1"/>
+          </a:lnRef>
+          <a:fillRef idx="3">
+            <a:schemeClr val="accent1"/>
+          </a:fillRef>
+          <a:effectRef idx="2">
+            <a:schemeClr val="accent1"/>
+          </a:effectRef>
+          <a:fontRef idx="minor">
+            <a:schemeClr val="lt1"/>
+          </a:fontRef>
+        </p:style>
+        <p:txBody>
+          <a:bodyPr rtlCol="0" anchor="ctr" lIns="0" rIns="0" tIns="0" bIns="0"/>
+          <a:lstStyle/>
+          <a:p>
+            <a:pPr algn="ctr"/>
+            <a:r>
+              <a:rPr sz="1600" b="1">
+                <a:solidFill>
+                  <a:srgbClr val="202122"/>
+                </a:solidFill>
+                <a:latin typeface="Calibri"/>
+              </a:rPr>
+              <a:t>3</a:t>
+            </a:r>
+          </a:p>
+        </p:txBody>
+      </p:sp>
+      <p:sp>
+        <p:nvSpPr>
+          <p:cNvPr id="11" name="TextBox 10"/>
+          <p:cNvSpPr txBox="1"/>
+          <p:nvPr/>
+        </p:nvSpPr>
+        <p:spPr>
+          <a:xfrm>
+            <a:off x="1371600" y="4480560"/>
+            <a:ext cx="10271455" cy="1188720"/>
+          </a:xfrm>
+          <a:prstGeom prst="rect">
+            <a:avLst/>
+          </a:prstGeom>
+          <a:noFill/>
+        </p:spPr>
+        <p:txBody>
+          <a:bodyPr wrap="square" anchor="t" lIns="0" rIns="0" tIns="0" bIns="0"/>
+          <a:lstStyle/>
+          <a:p>
+            <a:pPr algn="l"/>
+            <a:r>
+              <a:rPr sz="2400" b="0" i="0">
+                <a:solidFill>
+                  <a:srgbClr val="202122"/>
+                </a:solidFill>
+                <a:latin typeface="Calibri"/>
+              </a:rPr>
+              <a:t>Give one use of a vision system.</a:t>
+            </a:r>
+          </a:p>
+        </p:txBody>
+      </p:sp>
+      <p:sp>
+        <p:nvSpPr>
+          <p:cNvPr id="12" name="TextBox 11"/>
+          <p:cNvSpPr txBox="1"/>
+          <p:nvPr/>
+        </p:nvSpPr>
+        <p:spPr>
+          <a:xfrm>
+            <a:off x="548640" y="5852160"/>
+            <a:ext cx="11094415" cy="365760"/>
+          </a:xfrm>
+          <a:prstGeom prst="rect">
+            <a:avLst/>
+          </a:prstGeom>
+          <a:noFill/>
+        </p:spPr>
+        <p:txBody>
+          <a:bodyPr wrap="square" anchor="t" lIns="0" rIns="0" tIns="0" bIns="0"/>
+          <a:lstStyle/>
+          <a:p>
+            <a:pPr algn="l"/>
+            <a:r>
+              <a:rPr sz="1300" b="0" i="1">
+                <a:solidFill>
+                  <a:srgbClr val="54595D"/>
+                </a:solidFill>
+                <a:latin typeface="Calibri"/>
+              </a:rPr>
+              <a:t>Answer on mini whiteboards or in your book. Answers are in the speaker notes.</a:t>
+            </a:r>
+          </a:p>
+        </p:txBody>
+      </p:sp>
+    </p:spTree>
+  </p:cSld>
+  <p:clrMapOvr>
+    <a:masterClrMapping/>
+  </p:clrMapOvr>
+</p:sld>
+</file>
+
+<file path=ppt/slides/slide13.xml><?xml version="1.0" encoding="utf-8"?>
+<p:sld xmlns:a="http://schemas.openxmlformats.org/drawingml/2006/main" xmlns:p="http://schemas.openxmlformats.org/presentationml/2006/main" xmlns:r="http://schemas.openxmlformats.org/officeDocument/2006/relationships">
+  <p:cSld>
+    <p:bg>
+      <p:bgPr>
+        <a:solidFill>
+          <a:srgbClr val="FFFFFF"/>
+        </a:solidFill>
+        <a:effectLst/>
+      </p:bgPr>
+    </p:bg>
+    <p:spTree>
+      <p:nvGrpSpPr>
+        <p:cNvPr id="1" name=""/>
+        <p:cNvGrpSpPr/>
+        <p:nvPr/>
+      </p:nvGrpSpPr>
+      <p:grpSpPr/>
+      <p:sp>
+        <p:nvSpPr>
+          <p:cNvPr id="2" name="TextBox 1"/>
+          <p:cNvSpPr txBox="1"/>
+          <p:nvPr/>
+        </p:nvSpPr>
+        <p:spPr>
+          <a:xfrm>
+            <a:off x="548640" y="320040"/>
+            <a:ext cx="11094415" cy="274320"/>
+          </a:xfrm>
+          <a:prstGeom prst="rect">
+            <a:avLst/>
+          </a:prstGeom>
+          <a:noFill/>
+        </p:spPr>
+        <p:txBody>
+          <a:bodyPr wrap="square" anchor="t" lIns="0" rIns="0" tIns="0" bIns="0"/>
+          <a:lstStyle/>
+          <a:p>
+            <a:pPr algn="l"/>
+            <a:r>
+              <a:rPr sz="1100" b="1" i="0">
+                <a:solidFill>
+                  <a:srgbClr val="54595D"/>
+                </a:solidFill>
+                <a:latin typeface="Calibri"/>
+              </a:rPr>
+              <a:t>ENGINEERING CORE  ·  Core topic 10</a:t>
+            </a:r>
+          </a:p>
+        </p:txBody>
+      </p:sp>
+      <p:sp>
+        <p:nvSpPr>
+          <p:cNvPr id="3" name="TextBox 2"/>
+          <p:cNvSpPr txBox="1"/>
+          <p:nvPr/>
+        </p:nvSpPr>
+        <p:spPr>
+          <a:xfrm>
+            <a:off x="548640" y="566928"/>
+            <a:ext cx="11094415" cy="822960"/>
+          </a:xfrm>
+          <a:prstGeom prst="rect">
+            <a:avLst/>
+          </a:prstGeom>
+          <a:noFill/>
+        </p:spPr>
+        <p:txBody>
+          <a:bodyPr wrap="square" anchor="ctr" lIns="0" rIns="0" tIns="0" bIns="0"/>
+          <a:lstStyle/>
+          <a:p>
+            <a:pPr algn="l"/>
+            <a:r>
+              <a:rPr sz="3200" b="1" i="0">
+                <a:solidFill>
+                  <a:srgbClr val="03306E"/>
+                </a:solidFill>
+                <a:latin typeface="Cambria"/>
+              </a:rPr>
+              <a:t>Check your understanding</a:t>
+            </a:r>
+          </a:p>
+        </p:txBody>
+      </p:sp>
+      <p:sp>
+        <p:nvSpPr>
+          <p:cNvPr id="4" name="TextBox 3"/>
+          <p:cNvSpPr txBox="1"/>
+          <p:nvPr/>
+        </p:nvSpPr>
+        <p:spPr>
+          <a:xfrm>
+            <a:off x="548640" y="6446520"/>
+            <a:ext cx="8229600" cy="274320"/>
+          </a:xfrm>
+          <a:prstGeom prst="rect">
+            <a:avLst/>
+          </a:prstGeom>
+          <a:noFill/>
+        </p:spPr>
+        <p:txBody>
+          <a:bodyPr wrap="square" anchor="t" lIns="0" rIns="0" tIns="0" bIns="0"/>
+          <a:lstStyle/>
+          <a:p>
+            <a:pPr algn="l"/>
+            <a:r>
+              <a:rPr sz="1000" b="0" i="0">
+                <a:solidFill>
+                  <a:srgbClr val="54595D"/>
+                </a:solidFill>
+                <a:latin typeface="Calibri"/>
+              </a:rPr>
+              <a:t>Design and Development for Engineering and Manufacturing T Level  ·  Control Systems, Sensors and Actuators</a:t>
+            </a:r>
+          </a:p>
+        </p:txBody>
+      </p:sp>
+      <p:sp>
+        <p:nvSpPr>
+          <p:cNvPr id="5" name="TextBox 4"/>
+          <p:cNvSpPr txBox="1"/>
+          <p:nvPr/>
+        </p:nvSpPr>
+        <p:spPr>
+          <a:xfrm>
+            <a:off x="10728655" y="6446520"/>
+            <a:ext cx="914400" cy="274320"/>
+          </a:xfrm>
+          <a:prstGeom prst="rect">
+            <a:avLst/>
+          </a:prstGeom>
+          <a:noFill/>
+        </p:spPr>
+        <p:txBody>
+          <a:bodyPr wrap="square" anchor="t" lIns="0" rIns="0" tIns="0" bIns="0"/>
+          <a:lstStyle/>
+          <a:p>
+            <a:pPr algn="r"/>
+            <a:r>
+              <a:rPr sz="1000" b="0" i="0">
+                <a:solidFill>
+                  <a:srgbClr val="54595D"/>
+                </a:solidFill>
+                <a:latin typeface="Calibri"/>
+              </a:rPr>
+              <a:t>13</a:t>
+            </a:r>
+          </a:p>
+        </p:txBody>
+      </p:sp>
+      <p:sp>
+        <p:nvSpPr>
+          <p:cNvPr id="6" name="Oval 5"/>
+          <p:cNvSpPr/>
+          <p:nvPr/>
+        </p:nvSpPr>
+        <p:spPr>
+          <a:xfrm>
+            <a:off x="548640" y="1618488"/>
+            <a:ext cx="411480" cy="411480"/>
+          </a:xfrm>
+          <a:prstGeom prst="ellipse">
+            <a:avLst/>
+          </a:prstGeom>
+          <a:solidFill>
+            <a:srgbClr val="F2B705"/>
+          </a:solidFill>
+          <a:ln>
+            <a:noFill/>
+          </a:ln>
+          <a:effectLst/>
+        </p:spPr>
+        <p:style>
+          <a:lnRef idx="1">
+            <a:schemeClr val="accent1"/>
+          </a:lnRef>
+          <a:fillRef idx="3">
+            <a:schemeClr val="accent1"/>
+          </a:fillRef>
+          <a:effectRef idx="2">
+            <a:schemeClr val="accent1"/>
+          </a:effectRef>
+          <a:fontRef idx="minor">
+            <a:schemeClr val="lt1"/>
+          </a:fontRef>
+        </p:style>
+        <p:txBody>
+          <a:bodyPr rtlCol="0" anchor="ctr" lIns="0" rIns="0" tIns="0" bIns="0"/>
+          <a:lstStyle/>
+          <a:p>
+            <a:pPr algn="ctr"/>
+            <a:r>
+              <a:rPr sz="1400" b="1">
+                <a:solidFill>
+                  <a:srgbClr val="202122"/>
+                </a:solidFill>
+                <a:latin typeface="Calibri"/>
+              </a:rPr>
+              <a:t>1</a:t>
+            </a:r>
+          </a:p>
+        </p:txBody>
+      </p:sp>
+      <p:sp>
+        <p:nvSpPr>
+          <p:cNvPr id="7" name="TextBox 6"/>
+          <p:cNvSpPr txBox="1"/>
+          <p:nvPr/>
+        </p:nvSpPr>
+        <p:spPr>
+          <a:xfrm>
+            <a:off x="1234440" y="1600200"/>
+            <a:ext cx="10408615" cy="1030986"/>
+          </a:xfrm>
+          <a:prstGeom prst="rect">
+            <a:avLst/>
+          </a:prstGeom>
+          <a:noFill/>
+        </p:spPr>
+        <p:txBody>
+          <a:bodyPr wrap="square" anchor="t" lIns="0" rIns="0" tIns="0" bIns="0"/>
+          <a:lstStyle/>
+          <a:p>
+            <a:pPr algn="l"/>
+            <a:r>
+              <a:rPr sz="2200" b="0" i="0">
+                <a:solidFill>
+                  <a:srgbClr val="202122"/>
+                </a:solidFill>
+                <a:latin typeface="Calibri"/>
+              </a:rPr>
+              <a:t>What does a closed loop system have that an open loop one doesn't?</a:t>
+            </a:r>
+          </a:p>
+        </p:txBody>
+      </p:sp>
+      <p:sp>
+        <p:nvSpPr>
+          <p:cNvPr id="8" name="Oval 7"/>
+          <p:cNvSpPr/>
+          <p:nvPr/>
+        </p:nvSpPr>
+        <p:spPr>
+          <a:xfrm>
+            <a:off x="548640" y="2814066"/>
+            <a:ext cx="411480" cy="411480"/>
+          </a:xfrm>
+          <a:prstGeom prst="ellipse">
+            <a:avLst/>
+          </a:prstGeom>
+          <a:solidFill>
+            <a:srgbClr val="F2B705"/>
+          </a:solidFill>
+          <a:ln>
+            <a:noFill/>
+          </a:ln>
+          <a:effectLst/>
+        </p:spPr>
+        <p:style>
+          <a:lnRef idx="1">
+            <a:schemeClr val="accent1"/>
+          </a:lnRef>
+          <a:fillRef idx="3">
+            <a:schemeClr val="accent1"/>
+          </a:fillRef>
+          <a:effectRef idx="2">
+            <a:schemeClr val="accent1"/>
+          </a:effectRef>
+          <a:fontRef idx="minor">
+            <a:schemeClr val="lt1"/>
+          </a:fontRef>
+        </p:style>
+        <p:txBody>
+          <a:bodyPr rtlCol="0" anchor="ctr" lIns="0" rIns="0" tIns="0" bIns="0"/>
+          <a:lstStyle/>
+          <a:p>
+            <a:pPr algn="ctr"/>
+            <a:r>
+              <a:rPr sz="1400" b="1">
+                <a:solidFill>
+                  <a:srgbClr val="202122"/>
+                </a:solidFill>
+                <a:latin typeface="Calibri"/>
+              </a:rPr>
+              <a:t>2</a:t>
+            </a:r>
+          </a:p>
+        </p:txBody>
+      </p:sp>
+      <p:sp>
+        <p:nvSpPr>
+          <p:cNvPr id="9" name="TextBox 8"/>
+          <p:cNvSpPr txBox="1"/>
+          <p:nvPr/>
+        </p:nvSpPr>
+        <p:spPr>
+          <a:xfrm>
+            <a:off x="1234440" y="2795778"/>
+            <a:ext cx="10408615" cy="1030986"/>
+          </a:xfrm>
+          <a:prstGeom prst="rect">
+            <a:avLst/>
+          </a:prstGeom>
+          <a:noFill/>
+        </p:spPr>
+        <p:txBody>
+          <a:bodyPr wrap="square" anchor="t" lIns="0" rIns="0" tIns="0" bIns="0"/>
+          <a:lstStyle/>
+          <a:p>
+            <a:pPr algn="l"/>
+            <a:r>
+              <a:rPr sz="2200" b="0" i="0">
+                <a:solidFill>
+                  <a:srgbClr val="202122"/>
+                </a:solidFill>
+                <a:latin typeface="Calibri"/>
+              </a:rPr>
+              <a:t>Which logic gate outputs 1 only when both inputs are 1?</a:t>
+            </a:r>
+          </a:p>
+        </p:txBody>
+      </p:sp>
+      <p:sp>
+        <p:nvSpPr>
+          <p:cNvPr id="10" name="Oval 9"/>
+          <p:cNvSpPr/>
+          <p:nvPr/>
+        </p:nvSpPr>
+        <p:spPr>
+          <a:xfrm>
+            <a:off x="548640" y="4009644"/>
+            <a:ext cx="411480" cy="411480"/>
+          </a:xfrm>
+          <a:prstGeom prst="ellipse">
+            <a:avLst/>
+          </a:prstGeom>
+          <a:solidFill>
+            <a:srgbClr val="F2B705"/>
+          </a:solidFill>
+          <a:ln>
+            <a:noFill/>
+          </a:ln>
+          <a:effectLst/>
+        </p:spPr>
+        <p:style>
+          <a:lnRef idx="1">
+            <a:schemeClr val="accent1"/>
+          </a:lnRef>
+          <a:fillRef idx="3">
+            <a:schemeClr val="accent1"/>
+          </a:fillRef>
+          <a:effectRef idx="2">
+            <a:schemeClr val="accent1"/>
+          </a:effectRef>
+          <a:fontRef idx="minor">
+            <a:schemeClr val="lt1"/>
+          </a:fontRef>
+        </p:style>
+        <p:txBody>
+          <a:bodyPr rtlCol="0" anchor="ctr" lIns="0" rIns="0" tIns="0" bIns="0"/>
+          <a:lstStyle/>
+          <a:p>
+            <a:pPr algn="ctr"/>
+            <a:r>
+              <a:rPr sz="1400" b="1">
+                <a:solidFill>
+                  <a:srgbClr val="202122"/>
+                </a:solidFill>
+                <a:latin typeface="Calibri"/>
+              </a:rPr>
+              <a:t>3</a:t>
+            </a:r>
+          </a:p>
+        </p:txBody>
+      </p:sp>
+      <p:sp>
+        <p:nvSpPr>
+          <p:cNvPr id="11" name="TextBox 10"/>
+          <p:cNvSpPr txBox="1"/>
+          <p:nvPr/>
+        </p:nvSpPr>
+        <p:spPr>
+          <a:xfrm>
+            <a:off x="1234440" y="3991356"/>
+            <a:ext cx="10408615" cy="1030986"/>
+          </a:xfrm>
+          <a:prstGeom prst="rect">
+            <a:avLst/>
+          </a:prstGeom>
+          <a:noFill/>
+        </p:spPr>
+        <p:txBody>
+          <a:bodyPr wrap="square" anchor="t" lIns="0" rIns="0" tIns="0" bIns="0"/>
+          <a:lstStyle/>
+          <a:p>
+            <a:pPr algn="l"/>
+            <a:r>
+              <a:rPr sz="2200" b="0" i="0">
+                <a:solidFill>
+                  <a:srgbClr val="202122"/>
+                </a:solidFill>
+                <a:latin typeface="Calibri"/>
+              </a:rPr>
+              <a:t>What is steady-state error?</a:t>
+            </a:r>
+          </a:p>
+        </p:txBody>
+      </p:sp>
+      <p:sp>
+        <p:nvSpPr>
+          <p:cNvPr id="12" name="Oval 11"/>
+          <p:cNvSpPr/>
+          <p:nvPr/>
+        </p:nvSpPr>
+        <p:spPr>
+          <a:xfrm>
+            <a:off x="548640" y="5205221"/>
+            <a:ext cx="411480" cy="411480"/>
+          </a:xfrm>
+          <a:prstGeom prst="ellipse">
+            <a:avLst/>
+          </a:prstGeom>
+          <a:solidFill>
+            <a:srgbClr val="F2B705"/>
+          </a:solidFill>
+          <a:ln>
+            <a:noFill/>
+          </a:ln>
+          <a:effectLst/>
+        </p:spPr>
+        <p:style>
+          <a:lnRef idx="1">
+            <a:schemeClr val="accent1"/>
+          </a:lnRef>
+          <a:fillRef idx="3">
+            <a:schemeClr val="accent1"/>
+          </a:fillRef>
+          <a:effectRef idx="2">
+            <a:schemeClr val="accent1"/>
+          </a:effectRef>
+          <a:fontRef idx="minor">
+            <a:schemeClr val="lt1"/>
+          </a:fontRef>
+        </p:style>
+        <p:txBody>
+          <a:bodyPr rtlCol="0" anchor="ctr" lIns="0" rIns="0" tIns="0" bIns="0"/>
+          <a:lstStyle/>
+          <a:p>
+            <a:pPr algn="ctr"/>
+            <a:r>
+              <a:rPr sz="1400" b="1">
+                <a:solidFill>
+                  <a:srgbClr val="202122"/>
+                </a:solidFill>
+                <a:latin typeface="Calibri"/>
+              </a:rPr>
+              <a:t>4</a:t>
+            </a:r>
+          </a:p>
+        </p:txBody>
+      </p:sp>
+      <p:sp>
+        <p:nvSpPr>
+          <p:cNvPr id="13" name="TextBox 12"/>
+          <p:cNvSpPr txBox="1"/>
+          <p:nvPr/>
+        </p:nvSpPr>
+        <p:spPr>
+          <a:xfrm>
+            <a:off x="1234440" y="5186933"/>
+            <a:ext cx="10408615" cy="1030986"/>
+          </a:xfrm>
+          <a:prstGeom prst="rect">
+            <a:avLst/>
+          </a:prstGeom>
+          <a:noFill/>
+        </p:spPr>
+        <p:txBody>
+          <a:bodyPr wrap="square" anchor="t" lIns="0" rIns="0" tIns="0" bIns="0"/>
+          <a:lstStyle/>
+          <a:p>
+            <a:pPr algn="l"/>
+            <a:r>
+              <a:rPr sz="2200" b="0" i="0">
+                <a:solidFill>
+                  <a:srgbClr val="202122"/>
+                </a:solidFill>
+                <a:latin typeface="Calibri"/>
+              </a:rPr>
+              <a:t>How does PWM control motor speed?</a:t>
+            </a:r>
+          </a:p>
+        </p:txBody>
+      </p:sp>
+    </p:spTree>
+  </p:cSld>
+  <p:clrMapOvr>
+    <a:masterClrMapping/>
+  </p:clrMapOvr>
+</p:sld>
+</file>
+
+<file path=ppt/slides/slide14.xml><?xml version="1.0" encoding="utf-8"?>
+<p:sld xmlns:a="http://schemas.openxmlformats.org/drawingml/2006/main" xmlns:p="http://schemas.openxmlformats.org/presentationml/2006/main" xmlns:r="http://schemas.openxmlformats.org/officeDocument/2006/relationships">
+  <p:cSld>
+    <p:bg>
+      <p:bgPr>
+        <a:solidFill>
+          <a:srgbClr val="FFFFFF"/>
+        </a:solidFill>
+        <a:effectLst/>
+      </p:bgPr>
+    </p:bg>
+    <p:spTree>
+      <p:nvGrpSpPr>
+        <p:cNvPr id="1" name=""/>
+        <p:cNvGrpSpPr/>
+        <p:nvPr/>
+      </p:nvGrpSpPr>
+      <p:grpSpPr/>
+      <p:sp>
+        <p:nvSpPr>
+          <p:cNvPr id="2" name="TextBox 1"/>
+          <p:cNvSpPr txBox="1"/>
+          <p:nvPr/>
+        </p:nvSpPr>
+        <p:spPr>
+          <a:xfrm>
+            <a:off x="548640" y="320040"/>
+            <a:ext cx="11094415" cy="274320"/>
+          </a:xfrm>
+          <a:prstGeom prst="rect">
+            <a:avLst/>
+          </a:prstGeom>
+          <a:noFill/>
+        </p:spPr>
+        <p:txBody>
+          <a:bodyPr wrap="square" anchor="t" lIns="0" rIns="0" tIns="0" bIns="0"/>
+          <a:lstStyle/>
+          <a:p>
+            <a:pPr algn="l"/>
+            <a:r>
+              <a:rPr sz="1100" b="1" i="0">
+                <a:solidFill>
+                  <a:srgbClr val="54595D"/>
+                </a:solidFill>
+                <a:latin typeface="Calibri"/>
+              </a:rPr>
+              <a:t>ENGINEERING CORE  ·  Core topic 10</a:t>
+            </a:r>
+          </a:p>
+        </p:txBody>
+      </p:sp>
+      <p:sp>
+        <p:nvSpPr>
+          <p:cNvPr id="3" name="TextBox 2"/>
+          <p:cNvSpPr txBox="1"/>
+          <p:nvPr/>
+        </p:nvSpPr>
+        <p:spPr>
+          <a:xfrm>
+            <a:off x="548640" y="566928"/>
+            <a:ext cx="11094415" cy="822960"/>
+          </a:xfrm>
+          <a:prstGeom prst="rect">
+            <a:avLst/>
+          </a:prstGeom>
+          <a:noFill/>
+        </p:spPr>
+        <p:txBody>
+          <a:bodyPr wrap="square" anchor="ctr" lIns="0" rIns="0" tIns="0" bIns="0"/>
+          <a:lstStyle/>
+          <a:p>
+            <a:pPr algn="l"/>
+            <a:r>
+              <a:rPr sz="3200" b="1" i="0">
+                <a:solidFill>
+                  <a:srgbClr val="03306E"/>
+                </a:solidFill>
+                <a:latin typeface="Cambria"/>
+              </a:rPr>
+              <a:t>Answers</a:t>
+            </a:r>
+          </a:p>
+        </p:txBody>
+      </p:sp>
+      <p:sp>
+        <p:nvSpPr>
+          <p:cNvPr id="4" name="TextBox 3"/>
+          <p:cNvSpPr txBox="1"/>
+          <p:nvPr/>
+        </p:nvSpPr>
+        <p:spPr>
+          <a:xfrm>
+            <a:off x="548640" y="6446520"/>
+            <a:ext cx="8229600" cy="274320"/>
+          </a:xfrm>
+          <a:prstGeom prst="rect">
+            <a:avLst/>
+          </a:prstGeom>
+          <a:noFill/>
+        </p:spPr>
+        <p:txBody>
+          <a:bodyPr wrap="square" anchor="t" lIns="0" rIns="0" tIns="0" bIns="0"/>
+          <a:lstStyle/>
+          <a:p>
+            <a:pPr algn="l"/>
+            <a:r>
+              <a:rPr sz="1000" b="0" i="0">
+                <a:solidFill>
+                  <a:srgbClr val="54595D"/>
+                </a:solidFill>
+                <a:latin typeface="Calibri"/>
+              </a:rPr>
+              <a:t>Design and Development for Engineering and Manufacturing T Level  ·  Control Systems, Sensors and Actuators</a:t>
+            </a:r>
+          </a:p>
+        </p:txBody>
+      </p:sp>
+      <p:sp>
+        <p:nvSpPr>
+          <p:cNvPr id="5" name="TextBox 4"/>
+          <p:cNvSpPr txBox="1"/>
+          <p:nvPr/>
+        </p:nvSpPr>
+        <p:spPr>
+          <a:xfrm>
+            <a:off x="10728655" y="6446520"/>
+            <a:ext cx="914400" cy="274320"/>
+          </a:xfrm>
+          <a:prstGeom prst="rect">
+            <a:avLst/>
+          </a:prstGeom>
+          <a:noFill/>
+        </p:spPr>
+        <p:txBody>
+          <a:bodyPr wrap="square" anchor="t" lIns="0" rIns="0" tIns="0" bIns="0"/>
+          <a:lstStyle/>
+          <a:p>
+            <a:pPr algn="r"/>
+            <a:r>
+              <a:rPr sz="1000" b="0" i="0">
+                <a:solidFill>
+                  <a:srgbClr val="54595D"/>
+                </a:solidFill>
+                <a:latin typeface="Calibri"/>
+              </a:rPr>
+              <a:t>14</a:t>
+            </a:r>
+          </a:p>
+        </p:txBody>
+      </p:sp>
+      <p:sp>
+        <p:nvSpPr>
+          <p:cNvPr id="6" name="Oval 5"/>
+          <p:cNvSpPr/>
+          <p:nvPr/>
+        </p:nvSpPr>
+        <p:spPr>
+          <a:xfrm>
+            <a:off x="548640" y="1618488"/>
+            <a:ext cx="411480" cy="411480"/>
+          </a:xfrm>
+          <a:prstGeom prst="ellipse">
+            <a:avLst/>
+          </a:prstGeom>
+          <a:solidFill>
+            <a:srgbClr val="F2B705"/>
+          </a:solidFill>
+          <a:ln>
+            <a:noFill/>
+          </a:ln>
+          <a:effectLst/>
+        </p:spPr>
+        <p:style>
+          <a:lnRef idx="1">
+            <a:schemeClr val="accent1"/>
+          </a:lnRef>
+          <a:fillRef idx="3">
+            <a:schemeClr val="accent1"/>
+          </a:fillRef>
+          <a:effectRef idx="2">
+            <a:schemeClr val="accent1"/>
+          </a:effectRef>
+          <a:fontRef idx="minor">
+            <a:schemeClr val="lt1"/>
+          </a:fontRef>
+        </p:style>
+        <p:txBody>
+          <a:bodyPr rtlCol="0" anchor="ctr" lIns="0" rIns="0" tIns="0" bIns="0"/>
+          <a:lstStyle/>
+          <a:p>
+            <a:pPr algn="ctr"/>
+            <a:r>
+              <a:rPr sz="1400" b="1">
+                <a:solidFill>
+                  <a:srgbClr val="202122"/>
+                </a:solidFill>
+                <a:latin typeface="Calibri"/>
+              </a:rPr>
+              <a:t>1</a:t>
+            </a:r>
+          </a:p>
+        </p:txBody>
+      </p:sp>
+      <p:sp>
+        <p:nvSpPr>
+          <p:cNvPr id="7" name="TextBox 6"/>
+          <p:cNvSpPr txBox="1"/>
+          <p:nvPr/>
+        </p:nvSpPr>
+        <p:spPr>
+          <a:xfrm>
+            <a:off x="1234440" y="1600200"/>
+            <a:ext cx="10408615" cy="1030986"/>
+          </a:xfrm>
+          <a:prstGeom prst="rect">
+            <a:avLst/>
+          </a:prstGeom>
+          <a:noFill/>
+        </p:spPr>
+        <p:txBody>
+          <a:bodyPr wrap="square" anchor="t" lIns="0" rIns="0" tIns="0" bIns="0"/>
+          <a:lstStyle/>
+          <a:p>
+            <a:pPr algn="l"/>
+            <a:r>
+              <a:rPr sz="1800" b="0" i="0">
+                <a:solidFill>
+                  <a:srgbClr val="54595D"/>
+                </a:solidFill>
+                <a:latin typeface="Calibri"/>
+              </a:rPr>
+              <a:t>What does a closed loop system have that an open loop one doesn't?</a:t>
+            </a:r>
+          </a:p>
+          <a:p>
+            <a:r>
+              <a:rPr sz="1800" b="1">
+                <a:solidFill>
+                  <a:srgbClr val="03306E"/>
+                </a:solidFill>
+                <a:latin typeface="Calibri"/>
+              </a:rPr>
+              <a:t>Feedback.</a:t>
+            </a:r>
+          </a:p>
+        </p:txBody>
+      </p:sp>
+      <p:sp>
+        <p:nvSpPr>
+          <p:cNvPr id="8" name="Oval 7"/>
+          <p:cNvSpPr/>
+          <p:nvPr/>
+        </p:nvSpPr>
+        <p:spPr>
+          <a:xfrm>
+            <a:off x="548640" y="2814066"/>
+            <a:ext cx="411480" cy="411480"/>
+          </a:xfrm>
+          <a:prstGeom prst="ellipse">
+            <a:avLst/>
+          </a:prstGeom>
+          <a:solidFill>
+            <a:srgbClr val="F2B705"/>
+          </a:solidFill>
+          <a:ln>
+            <a:noFill/>
+          </a:ln>
+          <a:effectLst/>
+        </p:spPr>
+        <p:style>
+          <a:lnRef idx="1">
+            <a:schemeClr val="accent1"/>
+          </a:lnRef>
+          <a:fillRef idx="3">
+            <a:schemeClr val="accent1"/>
+          </a:fillRef>
+          <a:effectRef idx="2">
+            <a:schemeClr val="accent1"/>
+          </a:effectRef>
+          <a:fontRef idx="minor">
+            <a:schemeClr val="lt1"/>
+          </a:fontRef>
+        </p:style>
+        <p:txBody>
+          <a:bodyPr rtlCol="0" anchor="ctr" lIns="0" rIns="0" tIns="0" bIns="0"/>
+          <a:lstStyle/>
+          <a:p>
+            <a:pPr algn="ctr"/>
+            <a:r>
+              <a:rPr sz="1400" b="1">
+                <a:solidFill>
+                  <a:srgbClr val="202122"/>
+                </a:solidFill>
+                <a:latin typeface="Calibri"/>
+              </a:rPr>
+              <a:t>2</a:t>
+            </a:r>
+          </a:p>
+        </p:txBody>
+      </p:sp>
+      <p:sp>
+        <p:nvSpPr>
+          <p:cNvPr id="9" name="TextBox 8"/>
+          <p:cNvSpPr txBox="1"/>
+          <p:nvPr/>
+        </p:nvSpPr>
+        <p:spPr>
+          <a:xfrm>
+            <a:off x="1234440" y="2795778"/>
+            <a:ext cx="10408615" cy="1030986"/>
+          </a:xfrm>
+          <a:prstGeom prst="rect">
+            <a:avLst/>
+          </a:prstGeom>
+          <a:noFill/>
+        </p:spPr>
+        <p:txBody>
+          <a:bodyPr wrap="square" anchor="t" lIns="0" rIns="0" tIns="0" bIns="0"/>
+          <a:lstStyle/>
+          <a:p>
+            <a:pPr algn="l"/>
+            <a:r>
+              <a:rPr sz="1800" b="0" i="0">
+                <a:solidFill>
+                  <a:srgbClr val="54595D"/>
+                </a:solidFill>
+                <a:latin typeface="Calibri"/>
+              </a:rPr>
+              <a:t>Which logic gate outputs 1 only when both inputs are 1?</a:t>
+            </a:r>
+          </a:p>
+          <a:p>
+            <a:r>
+              <a:rPr sz="1800" b="1">
+                <a:solidFill>
+                  <a:srgbClr val="03306E"/>
+                </a:solidFill>
+                <a:latin typeface="Calibri"/>
+              </a:rPr>
+              <a:t>AND.</a:t>
+            </a:r>
+          </a:p>
+        </p:txBody>
+      </p:sp>
+      <p:sp>
+        <p:nvSpPr>
+          <p:cNvPr id="10" name="Oval 9"/>
+          <p:cNvSpPr/>
+          <p:nvPr/>
+        </p:nvSpPr>
+        <p:spPr>
+          <a:xfrm>
+            <a:off x="548640" y="4009644"/>
+            <a:ext cx="411480" cy="411480"/>
+          </a:xfrm>
+          <a:prstGeom prst="ellipse">
+            <a:avLst/>
+          </a:prstGeom>
+          <a:solidFill>
+            <a:srgbClr val="F2B705"/>
+          </a:solidFill>
+          <a:ln>
+            <a:noFill/>
+          </a:ln>
+          <a:effectLst/>
+        </p:spPr>
+        <p:style>
+          <a:lnRef idx="1">
+            <a:schemeClr val="accent1"/>
+          </a:lnRef>
+          <a:fillRef idx="3">
+            <a:schemeClr val="accent1"/>
+          </a:fillRef>
+          <a:effectRef idx="2">
+            <a:schemeClr val="accent1"/>
+          </a:effectRef>
+          <a:fontRef idx="minor">
+            <a:schemeClr val="lt1"/>
+          </a:fontRef>
+        </p:style>
+        <p:txBody>
+          <a:bodyPr rtlCol="0" anchor="ctr" lIns="0" rIns="0" tIns="0" bIns="0"/>
+          <a:lstStyle/>
+          <a:p>
+            <a:pPr algn="ctr"/>
+            <a:r>
+              <a:rPr sz="1400" b="1">
+                <a:solidFill>
+                  <a:srgbClr val="202122"/>
+                </a:solidFill>
+                <a:latin typeface="Calibri"/>
+              </a:rPr>
+              <a:t>3</a:t>
+            </a:r>
+          </a:p>
+        </p:txBody>
+      </p:sp>
+      <p:sp>
+        <p:nvSpPr>
+          <p:cNvPr id="11" name="TextBox 10"/>
+          <p:cNvSpPr txBox="1"/>
+          <p:nvPr/>
+        </p:nvSpPr>
+        <p:spPr>
+          <a:xfrm>
+            <a:off x="1234440" y="3991356"/>
+            <a:ext cx="10408615" cy="1030986"/>
+          </a:xfrm>
+          <a:prstGeom prst="rect">
+            <a:avLst/>
+          </a:prstGeom>
+          <a:noFill/>
+        </p:spPr>
+        <p:txBody>
+          <a:bodyPr wrap="square" anchor="t" lIns="0" rIns="0" tIns="0" bIns="0"/>
+          <a:lstStyle/>
+          <a:p>
+            <a:pPr algn="l"/>
+            <a:r>
+              <a:rPr sz="1800" b="0" i="0">
+                <a:solidFill>
+                  <a:srgbClr val="54595D"/>
+                </a:solidFill>
+                <a:latin typeface="Calibri"/>
+              </a:rPr>
+              <a:t>What is steady-state error?</a:t>
+            </a:r>
+          </a:p>
+          <a:p>
+            <a:r>
+              <a:rPr sz="1800" b="1">
+                <a:solidFill>
+                  <a:srgbClr val="03306E"/>
+                </a:solidFill>
+                <a:latin typeface="Calibri"/>
+              </a:rPr>
+              <a:t>The difference left between the set point and the output once settled.</a:t>
+            </a:r>
+          </a:p>
+        </p:txBody>
+      </p:sp>
+      <p:sp>
+        <p:nvSpPr>
+          <p:cNvPr id="12" name="Oval 11"/>
+          <p:cNvSpPr/>
+          <p:nvPr/>
+        </p:nvSpPr>
+        <p:spPr>
+          <a:xfrm>
+            <a:off x="548640" y="5205221"/>
+            <a:ext cx="411480" cy="411480"/>
+          </a:xfrm>
+          <a:prstGeom prst="ellipse">
+            <a:avLst/>
+          </a:prstGeom>
+          <a:solidFill>
+            <a:srgbClr val="F2B705"/>
+          </a:solidFill>
+          <a:ln>
+            <a:noFill/>
+          </a:ln>
+          <a:effectLst/>
+        </p:spPr>
+        <p:style>
+          <a:lnRef idx="1">
+            <a:schemeClr val="accent1"/>
+          </a:lnRef>
+          <a:fillRef idx="3">
+            <a:schemeClr val="accent1"/>
+          </a:fillRef>
+          <a:effectRef idx="2">
+            <a:schemeClr val="accent1"/>
+          </a:effectRef>
+          <a:fontRef idx="minor">
+            <a:schemeClr val="lt1"/>
+          </a:fontRef>
+        </p:style>
+        <p:txBody>
+          <a:bodyPr rtlCol="0" anchor="ctr" lIns="0" rIns="0" tIns="0" bIns="0"/>
+          <a:lstStyle/>
+          <a:p>
+            <a:pPr algn="ctr"/>
+            <a:r>
+              <a:rPr sz="1400" b="1">
+                <a:solidFill>
+                  <a:srgbClr val="202122"/>
+                </a:solidFill>
+                <a:latin typeface="Calibri"/>
+              </a:rPr>
+              <a:t>4</a:t>
+            </a:r>
+          </a:p>
+        </p:txBody>
+      </p:sp>
+      <p:sp>
+        <p:nvSpPr>
+          <p:cNvPr id="13" name="TextBox 12"/>
+          <p:cNvSpPr txBox="1"/>
+          <p:nvPr/>
+        </p:nvSpPr>
+        <p:spPr>
+          <a:xfrm>
+            <a:off x="1234440" y="5186933"/>
+            <a:ext cx="10408615" cy="1030986"/>
+          </a:xfrm>
+          <a:prstGeom prst="rect">
+            <a:avLst/>
+          </a:prstGeom>
+          <a:noFill/>
+        </p:spPr>
+        <p:txBody>
+          <a:bodyPr wrap="square" anchor="t" lIns="0" rIns="0" tIns="0" bIns="0"/>
+          <a:lstStyle/>
+          <a:p>
+            <a:pPr algn="l"/>
+            <a:r>
+              <a:rPr sz="1800" b="0" i="0">
+                <a:solidFill>
+                  <a:srgbClr val="54595D"/>
+                </a:solidFill>
+                <a:latin typeface="Calibri"/>
+              </a:rPr>
+              <a:t>How does PWM control motor speed?</a:t>
+            </a:r>
+          </a:p>
+          <a:p>
+            <a:r>
+              <a:rPr sz="1800" b="1">
+                <a:solidFill>
+                  <a:srgbClr val="03306E"/>
+                </a:solidFill>
+                <a:latin typeface="Calibri"/>
+              </a:rPr>
+              <a:t>By varying how long the power is on in each pulse.</a:t>
+            </a:r>
+          </a:p>
+        </p:txBody>
+      </p:sp>
+    </p:spTree>
+  </p:cSld>
+  <p:clrMapOvr>
+    <a:masterClrMapping/>
+  </p:clrMapOvr>
+</p:sld>
+</file>
+
+<file path=ppt/slides/slide15.xml><?xml version="1.0" encoding="utf-8"?>
+<p:sld xmlns:a="http://schemas.openxmlformats.org/drawingml/2006/main" xmlns:p="http://schemas.openxmlformats.org/presentationml/2006/main" xmlns:r="http://schemas.openxmlformats.org/officeDocument/2006/relationships">
+  <p:cSld>
+    <p:bg>
+      <p:bgPr>
+        <a:solidFill>
+          <a:srgbClr val="FFFFFF"/>
+        </a:solidFill>
+        <a:effectLst/>
+      </p:bgPr>
+    </p:bg>
+    <p:spTree>
+      <p:nvGrpSpPr>
+        <p:cNvPr id="1" name=""/>
+        <p:cNvGrpSpPr/>
+        <p:nvPr/>
+      </p:nvGrpSpPr>
+      <p:grpSpPr/>
+      <p:sp>
+        <p:nvSpPr>
+          <p:cNvPr id="2" name="TextBox 1"/>
+          <p:cNvSpPr txBox="1"/>
+          <p:nvPr/>
+        </p:nvSpPr>
+        <p:spPr>
+          <a:xfrm>
+            <a:off x="548640" y="320040"/>
+            <a:ext cx="11094415" cy="274320"/>
+          </a:xfrm>
+          <a:prstGeom prst="rect">
+            <a:avLst/>
+          </a:prstGeom>
+          <a:noFill/>
+        </p:spPr>
+        <p:txBody>
+          <a:bodyPr wrap="square" anchor="t" lIns="0" rIns="0" tIns="0" bIns="0"/>
+          <a:lstStyle/>
+          <a:p>
+            <a:pPr algn="l"/>
+            <a:r>
+              <a:rPr sz="1100" b="1" i="0">
+                <a:solidFill>
+                  <a:srgbClr val="54595D"/>
+                </a:solidFill>
+                <a:latin typeface="Calibri"/>
+              </a:rPr>
+              <a:t>ENGINEERING CORE  ·  Core topic 10</a:t>
+            </a:r>
+          </a:p>
+        </p:txBody>
+      </p:sp>
+      <p:sp>
+        <p:nvSpPr>
+          <p:cNvPr id="3" name="TextBox 2"/>
+          <p:cNvSpPr txBox="1"/>
+          <p:nvPr/>
+        </p:nvSpPr>
+        <p:spPr>
+          <a:xfrm>
+            <a:off x="548640" y="566928"/>
+            <a:ext cx="11094415" cy="822960"/>
+          </a:xfrm>
+          <a:prstGeom prst="rect">
+            <a:avLst/>
+          </a:prstGeom>
+          <a:noFill/>
+        </p:spPr>
+        <p:txBody>
+          <a:bodyPr wrap="square" anchor="ctr" lIns="0" rIns="0" tIns="0" bIns="0"/>
+          <a:lstStyle/>
+          <a:p>
+            <a:pPr algn="l"/>
+            <a:r>
+              <a:rPr sz="3200" b="1" i="0">
+                <a:solidFill>
+                  <a:srgbClr val="03306E"/>
+                </a:solidFill>
+                <a:latin typeface="Cambria"/>
+              </a:rPr>
+              <a:t>Activity: System diagram</a:t>
+            </a:r>
+          </a:p>
+        </p:txBody>
+      </p:sp>
+      <p:sp>
+        <p:nvSpPr>
+          <p:cNvPr id="4" name="TextBox 3"/>
+          <p:cNvSpPr txBox="1"/>
+          <p:nvPr/>
+        </p:nvSpPr>
+        <p:spPr>
+          <a:xfrm>
+            <a:off x="548640" y="6446520"/>
+            <a:ext cx="8229600" cy="274320"/>
+          </a:xfrm>
+          <a:prstGeom prst="rect">
+            <a:avLst/>
+          </a:prstGeom>
+          <a:noFill/>
+        </p:spPr>
+        <p:txBody>
+          <a:bodyPr wrap="square" anchor="t" lIns="0" rIns="0" tIns="0" bIns="0"/>
+          <a:lstStyle/>
+          <a:p>
+            <a:pPr algn="l"/>
+            <a:r>
+              <a:rPr sz="1000" b="0" i="0">
+                <a:solidFill>
+                  <a:srgbClr val="54595D"/>
+                </a:solidFill>
+                <a:latin typeface="Calibri"/>
+              </a:rPr>
+              <a:t>Design and Development for Engineering and Manufacturing T Level  ·  Control Systems, Sensors and Actuators</a:t>
+            </a:r>
+          </a:p>
+        </p:txBody>
+      </p:sp>
+      <p:sp>
+        <p:nvSpPr>
+          <p:cNvPr id="5" name="TextBox 4"/>
+          <p:cNvSpPr txBox="1"/>
+          <p:nvPr/>
+        </p:nvSpPr>
+        <p:spPr>
+          <a:xfrm>
+            <a:off x="10728655" y="6446520"/>
+            <a:ext cx="914400" cy="274320"/>
+          </a:xfrm>
+          <a:prstGeom prst="rect">
+            <a:avLst/>
+          </a:prstGeom>
+          <a:noFill/>
+        </p:spPr>
+        <p:txBody>
+          <a:bodyPr wrap="square" anchor="t" lIns="0" rIns="0" tIns="0" bIns="0"/>
+          <a:lstStyle/>
+          <a:p>
+            <a:pPr algn="r"/>
+            <a:r>
+              <a:rPr sz="1000" b="0" i="0">
+                <a:solidFill>
+                  <a:srgbClr val="54595D"/>
+                </a:solidFill>
+                <a:latin typeface="Calibri"/>
+              </a:rPr>
+              <a:t>15</a:t>
+            </a:r>
+          </a:p>
+        </p:txBody>
+      </p:sp>
+      <p:sp>
+        <p:nvSpPr>
+          <p:cNvPr id="6" name="Rounded Rectangle 5"/>
+          <p:cNvSpPr/>
+          <p:nvPr/>
+        </p:nvSpPr>
+        <p:spPr>
+          <a:xfrm>
+            <a:off x="548640" y="1508760"/>
+            <a:ext cx="2011680" cy="457200"/>
+          </a:xfrm>
+          <a:prstGeom prst="roundRect">
+            <a:avLst>
+              <a:gd name="adj" fmla="val 50000"/>
+            </a:avLst>
+          </a:prstGeom>
+          <a:solidFill>
+            <a:srgbClr val="F2B705"/>
+          </a:solidFill>
+          <a:ln>
+            <a:noFill/>
+          </a:ln>
+          <a:effectLst/>
+        </p:spPr>
+        <p:style>
+          <a:lnRef idx="1">
+            <a:schemeClr val="accent1"/>
+          </a:lnRef>
+          <a:fillRef idx="3">
+            <a:schemeClr val="accent1"/>
+          </a:fillRef>
+          <a:effectRef idx="2">
+            <a:schemeClr val="accent1"/>
+          </a:effectRef>
+          <a:fontRef idx="minor">
+            <a:schemeClr val="lt1"/>
+          </a:fontRef>
+        </p:style>
+        <p:txBody>
+          <a:bodyPr rtlCol="0" anchor="ctr"/>
+          <a:lstStyle/>
+          <a:p/>
+        </p:txBody>
+      </p:sp>
+      <p:sp>
+        <p:nvSpPr>
+          <p:cNvPr id="7" name="TextBox 6"/>
+          <p:cNvSpPr txBox="1"/>
+          <p:nvPr/>
+        </p:nvSpPr>
+        <p:spPr>
+          <a:xfrm>
+            <a:off x="548640" y="1508760"/>
+            <a:ext cx="2011680" cy="457200"/>
+          </a:xfrm>
+          <a:prstGeom prst="rect">
+            <a:avLst/>
+          </a:prstGeom>
+          <a:noFill/>
+        </p:spPr>
+        <p:txBody>
+          <a:bodyPr wrap="square" anchor="ctr" lIns="0" rIns="0" tIns="0" bIns="0"/>
+          <a:lstStyle/>
+          <a:p>
+            <a:pPr algn="ctr"/>
+            <a:r>
+              <a:rPr sz="1400" b="1" i="0">
+                <a:solidFill>
+                  <a:srgbClr val="202122"/>
+                </a:solidFill>
+                <a:latin typeface="Calibri"/>
+              </a:rPr>
+              <a:t>25 minutes</a:t>
+            </a:r>
+          </a:p>
+        </p:txBody>
+      </p:sp>
+      <p:sp>
+        <p:nvSpPr>
+          <p:cNvPr id="8" name="TextBox 7"/>
+          <p:cNvSpPr txBox="1"/>
+          <p:nvPr/>
+        </p:nvSpPr>
+        <p:spPr>
+          <a:xfrm>
+            <a:off x="2743200" y="1508760"/>
+            <a:ext cx="4754880" cy="457200"/>
+          </a:xfrm>
+          <a:prstGeom prst="rect">
+            <a:avLst/>
+          </a:prstGeom>
+          <a:noFill/>
+        </p:spPr>
+        <p:txBody>
+          <a:bodyPr wrap="square" anchor="ctr" lIns="0" rIns="0" tIns="0" bIns="0"/>
+          <a:lstStyle/>
+          <a:p>
+            <a:pPr algn="l"/>
+            <a:r>
+              <a:rPr sz="1400" b="0" i="1">
+                <a:solidFill>
+                  <a:srgbClr val="54595D"/>
+                </a:solidFill>
+                <a:latin typeface="Calibri"/>
+              </a:rPr>
+              <a:t>Pairs</a:t>
+            </a:r>
+          </a:p>
+        </p:txBody>
+      </p:sp>
+      <p:sp>
+        <p:nvSpPr>
+          <p:cNvPr id="9" name="Oval 8"/>
+          <p:cNvSpPr/>
+          <p:nvPr/>
+        </p:nvSpPr>
+        <p:spPr>
+          <a:xfrm>
+            <a:off x="548640" y="2482596"/>
+            <a:ext cx="384048" cy="384048"/>
+          </a:xfrm>
+          <a:prstGeom prst="ellipse">
+            <a:avLst/>
+          </a:prstGeom>
+          <a:solidFill>
+            <a:srgbClr val="0645AD"/>
+          </a:solidFill>
+          <a:ln>
+            <a:noFill/>
+          </a:ln>
+          <a:effectLst/>
+        </p:spPr>
+        <p:style>
+          <a:lnRef idx="1">
+            <a:schemeClr val="accent1"/>
+          </a:lnRef>
+          <a:fillRef idx="3">
+            <a:schemeClr val="accent1"/>
+          </a:fillRef>
+          <a:effectRef idx="2">
+            <a:schemeClr val="accent1"/>
+          </a:effectRef>
+          <a:fontRef idx="minor">
+            <a:schemeClr val="lt1"/>
+          </a:fontRef>
+        </p:style>
+        <p:txBody>
+          <a:bodyPr rtlCol="0" anchor="ctr" lIns="0" rIns="0" tIns="0" bIns="0"/>
+          <a:lstStyle/>
+          <a:p>
+            <a:pPr algn="ctr"/>
+            <a:r>
+              <a:rPr sz="1300" b="1">
+                <a:solidFill>
+                  <a:srgbClr val="FFFFFF"/>
+                </a:solidFill>
+                <a:latin typeface="Calibri"/>
+              </a:rPr>
+              <a:t>1</a:t>
+            </a:r>
+          </a:p>
+        </p:txBody>
+      </p:sp>
+      <p:sp>
+        <p:nvSpPr>
+          <p:cNvPr id="10" name="TextBox 9"/>
+          <p:cNvSpPr txBox="1"/>
+          <p:nvPr/>
+        </p:nvSpPr>
+        <p:spPr>
+          <a:xfrm>
+            <a:off x="1143000" y="2240280"/>
+            <a:ext cx="5943600" cy="868680"/>
+          </a:xfrm>
+          <a:prstGeom prst="rect">
+            <a:avLst/>
+          </a:prstGeom>
+          <a:noFill/>
+        </p:spPr>
+        <p:txBody>
+          <a:bodyPr wrap="square" anchor="ctr" lIns="0" rIns="0" tIns="0" bIns="0"/>
+          <a:lstStyle/>
+          <a:p>
+            <a:pPr algn="l"/>
+            <a:r>
+              <a:rPr sz="1700" b="0" i="0">
+                <a:solidFill>
+                  <a:srgbClr val="202122"/>
+                </a:solidFill>
+                <a:latin typeface="Calibri"/>
+              </a:rPr>
+              <a:t>Draw a closed loop system diagram for a greenhouse that controls temperature and watering.</a:t>
+            </a:r>
+          </a:p>
+        </p:txBody>
+      </p:sp>
+      <p:sp>
+        <p:nvSpPr>
+          <p:cNvPr id="11" name="Oval 10"/>
+          <p:cNvSpPr/>
+          <p:nvPr/>
+        </p:nvSpPr>
+        <p:spPr>
+          <a:xfrm>
+            <a:off x="548640" y="3461004"/>
+            <a:ext cx="384048" cy="384048"/>
+          </a:xfrm>
+          <a:prstGeom prst="ellipse">
+            <a:avLst/>
+          </a:prstGeom>
+          <a:solidFill>
+            <a:srgbClr val="0645AD"/>
+          </a:solidFill>
+          <a:ln>
+            <a:noFill/>
+          </a:ln>
+          <a:effectLst/>
+        </p:spPr>
+        <p:style>
+          <a:lnRef idx="1">
+            <a:schemeClr val="accent1"/>
+          </a:lnRef>
+          <a:fillRef idx="3">
+            <a:schemeClr val="accent1"/>
+          </a:fillRef>
+          <a:effectRef idx="2">
+            <a:schemeClr val="accent1"/>
+          </a:effectRef>
+          <a:fontRef idx="minor">
+            <a:schemeClr val="lt1"/>
+          </a:fontRef>
+        </p:style>
+        <p:txBody>
+          <a:bodyPr rtlCol="0" anchor="ctr" lIns="0" rIns="0" tIns="0" bIns="0"/>
+          <a:lstStyle/>
+          <a:p>
+            <a:pPr algn="ctr"/>
+            <a:r>
+              <a:rPr sz="1300" b="1">
+                <a:solidFill>
+                  <a:srgbClr val="FFFFFF"/>
+                </a:solidFill>
+                <a:latin typeface="Calibri"/>
+              </a:rPr>
+              <a:t>2</a:t>
+            </a:r>
+          </a:p>
+        </p:txBody>
+      </p:sp>
+      <p:sp>
+        <p:nvSpPr>
+          <p:cNvPr id="12" name="TextBox 11"/>
+          <p:cNvSpPr txBox="1"/>
+          <p:nvPr/>
+        </p:nvSpPr>
+        <p:spPr>
+          <a:xfrm>
+            <a:off x="1143000" y="3218688"/>
+            <a:ext cx="5943600" cy="868680"/>
+          </a:xfrm>
+          <a:prstGeom prst="rect">
+            <a:avLst/>
+          </a:prstGeom>
+          <a:noFill/>
+        </p:spPr>
+        <p:txBody>
+          <a:bodyPr wrap="square" anchor="ctr" lIns="0" rIns="0" tIns="0" bIns="0"/>
+          <a:lstStyle/>
+          <a:p>
+            <a:pPr algn="l"/>
+            <a:r>
+              <a:rPr sz="1700" b="0" i="0">
+                <a:solidFill>
+                  <a:srgbClr val="202122"/>
+                </a:solidFill>
+                <a:latin typeface="Calibri"/>
+              </a:rPr>
+              <a:t>Show two inputs, two outputs, the controller and feedback paths.</a:t>
+            </a:r>
+          </a:p>
+        </p:txBody>
+      </p:sp>
+      <p:sp>
+        <p:nvSpPr>
+          <p:cNvPr id="13" name="Oval 12"/>
+          <p:cNvSpPr/>
+          <p:nvPr/>
+        </p:nvSpPr>
+        <p:spPr>
+          <a:xfrm>
+            <a:off x="548640" y="4439412"/>
+            <a:ext cx="384048" cy="384048"/>
+          </a:xfrm>
+          <a:prstGeom prst="ellipse">
+            <a:avLst/>
+          </a:prstGeom>
+          <a:solidFill>
+            <a:srgbClr val="0645AD"/>
+          </a:solidFill>
+          <a:ln>
+            <a:noFill/>
+          </a:ln>
+          <a:effectLst/>
+        </p:spPr>
+        <p:style>
+          <a:lnRef idx="1">
+            <a:schemeClr val="accent1"/>
+          </a:lnRef>
+          <a:fillRef idx="3">
+            <a:schemeClr val="accent1"/>
+          </a:fillRef>
+          <a:effectRef idx="2">
+            <a:schemeClr val="accent1"/>
+          </a:effectRef>
+          <a:fontRef idx="minor">
+            <a:schemeClr val="lt1"/>
+          </a:fontRef>
+        </p:style>
+        <p:txBody>
+          <a:bodyPr rtlCol="0" anchor="ctr" lIns="0" rIns="0" tIns="0" bIns="0"/>
+          <a:lstStyle/>
+          <a:p>
+            <a:pPr algn="ctr"/>
+            <a:r>
+              <a:rPr sz="1300" b="1">
+                <a:solidFill>
+                  <a:srgbClr val="FFFFFF"/>
+                </a:solidFill>
+                <a:latin typeface="Calibri"/>
+              </a:rPr>
+              <a:t>3</a:t>
+            </a:r>
+          </a:p>
+        </p:txBody>
+      </p:sp>
+      <p:sp>
+        <p:nvSpPr>
+          <p:cNvPr id="14" name="TextBox 13"/>
+          <p:cNvSpPr txBox="1"/>
+          <p:nvPr/>
+        </p:nvSpPr>
+        <p:spPr>
+          <a:xfrm>
+            <a:off x="1143000" y="4197096"/>
+            <a:ext cx="5943600" cy="868680"/>
+          </a:xfrm>
+          <a:prstGeom prst="rect">
+            <a:avLst/>
+          </a:prstGeom>
+          <a:noFill/>
+        </p:spPr>
+        <p:txBody>
+          <a:bodyPr wrap="square" anchor="ctr" lIns="0" rIns="0" tIns="0" bIns="0"/>
+          <a:lstStyle/>
+          <a:p>
+            <a:pPr algn="l"/>
+            <a:r>
+              <a:rPr sz="1700" b="0" i="0">
+                <a:solidFill>
+                  <a:srgbClr val="202122"/>
+                </a:solidFill>
+                <a:latin typeface="Calibri"/>
+              </a:rPr>
+              <a:t>Label the summing points and set points.</a:t>
+            </a:r>
+          </a:p>
+        </p:txBody>
+      </p:sp>
+      <p:sp>
+        <p:nvSpPr>
+          <p:cNvPr id="15" name="Oval 14"/>
+          <p:cNvSpPr/>
+          <p:nvPr/>
+        </p:nvSpPr>
+        <p:spPr>
+          <a:xfrm>
+            <a:off x="548640" y="5417820"/>
+            <a:ext cx="384048" cy="384048"/>
+          </a:xfrm>
+          <a:prstGeom prst="ellipse">
+            <a:avLst/>
+          </a:prstGeom>
+          <a:solidFill>
+            <a:srgbClr val="0645AD"/>
+          </a:solidFill>
+          <a:ln>
+            <a:noFill/>
+          </a:ln>
+          <a:effectLst/>
+        </p:spPr>
+        <p:style>
+          <a:lnRef idx="1">
+            <a:schemeClr val="accent1"/>
+          </a:lnRef>
+          <a:fillRef idx="3">
+            <a:schemeClr val="accent1"/>
+          </a:fillRef>
+          <a:effectRef idx="2">
+            <a:schemeClr val="accent1"/>
+          </a:effectRef>
+          <a:fontRef idx="minor">
+            <a:schemeClr val="lt1"/>
+          </a:fontRef>
+        </p:style>
+        <p:txBody>
+          <a:bodyPr rtlCol="0" anchor="ctr" lIns="0" rIns="0" tIns="0" bIns="0"/>
+          <a:lstStyle/>
+          <a:p>
+            <a:pPr algn="ctr"/>
+            <a:r>
+              <a:rPr sz="1300" b="1">
+                <a:solidFill>
+                  <a:srgbClr val="FFFFFF"/>
+                </a:solidFill>
+                <a:latin typeface="Calibri"/>
+              </a:rPr>
+              <a:t>4</a:t>
+            </a:r>
+          </a:p>
+        </p:txBody>
+      </p:sp>
+      <p:sp>
+        <p:nvSpPr>
+          <p:cNvPr id="16" name="TextBox 15"/>
+          <p:cNvSpPr txBox="1"/>
+          <p:nvPr/>
+        </p:nvSpPr>
+        <p:spPr>
+          <a:xfrm>
+            <a:off x="1143000" y="5175504"/>
+            <a:ext cx="5943600" cy="868680"/>
+          </a:xfrm>
+          <a:prstGeom prst="rect">
+            <a:avLst/>
+          </a:prstGeom>
+          <a:noFill/>
+        </p:spPr>
+        <p:txBody>
+          <a:bodyPr wrap="square" anchor="ctr" lIns="0" rIns="0" tIns="0" bIns="0"/>
+          <a:lstStyle/>
+          <a:p>
+            <a:pPr algn="l"/>
+            <a:r>
+              <a:rPr sz="1700" b="0" i="0">
+                <a:solidFill>
+                  <a:srgbClr val="202122"/>
+                </a:solidFill>
+                <a:latin typeface="Calibri"/>
+              </a:rPr>
+              <a:t>Explain what would happen if it were under-damped.</a:t>
+            </a:r>
+          </a:p>
+        </p:txBody>
+      </p:sp>
+      <p:sp>
+        <p:nvSpPr>
+          <p:cNvPr id="17" name="Rounded Rectangle 16"/>
+          <p:cNvSpPr/>
+          <p:nvPr/>
+        </p:nvSpPr>
+        <p:spPr>
+          <a:xfrm>
+            <a:off x="7772400" y="1508760"/>
+            <a:ext cx="3867912" cy="4572000"/>
+          </a:xfrm>
+          <a:prstGeom prst="roundRect">
+            <a:avLst>
+              <a:gd name="adj" fmla="val 8000"/>
+            </a:avLst>
+          </a:prstGeom>
+          <a:solidFill>
+            <a:srgbClr val="EAF3FF"/>
+          </a:solidFill>
+          <a:ln>
+            <a:noFill/>
+          </a:ln>
+          <a:effectLst/>
+        </p:spPr>
+        <p:style>
+          <a:lnRef idx="1">
+            <a:schemeClr val="accent1"/>
+          </a:lnRef>
+          <a:fillRef idx="3">
+            <a:schemeClr val="accent1"/>
+          </a:fillRef>
+          <a:effectRef idx="2">
+            <a:schemeClr val="accent1"/>
+          </a:effectRef>
+          <a:fontRef idx="minor">
+            <a:schemeClr val="lt1"/>
+          </a:fontRef>
+        </p:style>
+        <p:txBody>
+          <a:bodyPr rtlCol="0" anchor="ctr"/>
+          <a:lstStyle/>
+          <a:p/>
+        </p:txBody>
+      </p:sp>
+      <p:sp>
+        <p:nvSpPr>
+          <p:cNvPr id="18" name="TextBox 17"/>
+          <p:cNvSpPr txBox="1"/>
+          <p:nvPr/>
+        </p:nvSpPr>
+        <p:spPr>
+          <a:xfrm>
+            <a:off x="8046720" y="1737360"/>
+            <a:ext cx="3291840" cy="365760"/>
+          </a:xfrm>
+          <a:prstGeom prst="rect">
+            <a:avLst/>
+          </a:prstGeom>
+          <a:noFill/>
+        </p:spPr>
+        <p:txBody>
+          <a:bodyPr wrap="square" anchor="t" lIns="0" rIns="0" tIns="0" bIns="0"/>
+          <a:lstStyle/>
+          <a:p>
+            <a:pPr algn="l"/>
+            <a:r>
+              <a:rPr sz="1300" b="1" i="0">
+                <a:solidFill>
+                  <a:srgbClr val="0645AD"/>
+                </a:solidFill>
+                <a:latin typeface="Calibri"/>
+              </a:rPr>
+              <a:t>SUCCESS CRITERIA</a:t>
+            </a:r>
+          </a:p>
+        </p:txBody>
+      </p:sp>
+      <p:sp>
+        <p:nvSpPr>
+          <p:cNvPr id="19" name="TextBox 18"/>
+          <p:cNvSpPr txBox="1"/>
+          <p:nvPr/>
+        </p:nvSpPr>
+        <p:spPr>
+          <a:xfrm>
+            <a:off x="8046720" y="2240280"/>
+            <a:ext cx="3337560" cy="3657600"/>
+          </a:xfrm>
+          <a:prstGeom prst="rect">
+            <a:avLst/>
+          </a:prstGeom>
+          <a:noFill/>
+        </p:spPr>
+        <p:txBody>
+          <a:bodyPr wrap="square" lIns="0" rIns="0" tIns="0" bIns="0">
+            <a:spAutoFit/>
+          </a:bodyPr>
+          <a:lstStyle/>
+          <a:p>
+            <a:pPr marL="274320" indent="-274320">
+              <a:spcAft>
+                <a:spcPts val="810"/>
+              </a:spcAft>
+              <a:buClr>
+                <a:srgbClr val="0645AD"/>
+              </a:buClr>
+              <a:buFont typeface="Arial"/>
+              <a:buChar char="•"/>
+            </a:pPr>
+            <a:r>
+              <a:rPr sz="1800" b="0">
+                <a:solidFill>
+                  <a:srgbClr val="202122"/>
+                </a:solidFill>
+                <a:latin typeface="Calibri"/>
+              </a:rPr>
+              <a:t>Multiple inputs and outputs shown</a:t>
+            </a:r>
+          </a:p>
+          <a:p>
+            <a:pPr marL="274320" indent="-274320">
+              <a:spcAft>
+                <a:spcPts val="810"/>
+              </a:spcAft>
+              <a:buClr>
+                <a:srgbClr val="0645AD"/>
+              </a:buClr>
+              <a:buFont typeface="Arial"/>
+              <a:buChar char="•"/>
+            </a:pPr>
+            <a:r>
+              <a:rPr sz="1800" b="0">
+                <a:solidFill>
+                  <a:srgbClr val="202122"/>
+                </a:solidFill>
+                <a:latin typeface="Calibri"/>
+              </a:rPr>
+              <a:t>Feedback correctly drawn</a:t>
+            </a:r>
+          </a:p>
+          <a:p>
+            <a:pPr marL="274320" indent="-274320">
+              <a:spcAft>
+                <a:spcPts val="810"/>
+              </a:spcAft>
+              <a:buClr>
+                <a:srgbClr val="0645AD"/>
+              </a:buClr>
+              <a:buFont typeface="Arial"/>
+              <a:buChar char="•"/>
+            </a:pPr>
+            <a:r>
+              <a:rPr sz="1800" b="0">
+                <a:solidFill>
+                  <a:srgbClr val="202122"/>
+                </a:solidFill>
+                <a:latin typeface="Calibri"/>
+              </a:rPr>
+              <a:t>Damping explained</a:t>
+            </a:r>
+          </a:p>
+        </p:txBody>
+      </p:sp>
+    </p:spTree>
+  </p:cSld>
+  <p:clrMapOvr>
+    <a:masterClrMapping/>
+  </p:clrMapOvr>
+</p:sld>
+</file>
+
+<file path=ppt/slides/slide16.xml><?xml version="1.0" encoding="utf-8"?>
+<p:sld xmlns:a="http://schemas.openxmlformats.org/drawingml/2006/main" xmlns:p="http://schemas.openxmlformats.org/presentationml/2006/main" xmlns:r="http://schemas.openxmlformats.org/officeDocument/2006/relationships">
+  <p:cSld>
+    <p:bg>
+      <p:bgPr>
+        <a:solidFill>
           <a:srgbClr val="03306E"/>
         </a:solidFill>
         <a:effectLst/>
@@ -5369,22 +9120,93 @@
       </p:sp>
       <p:sp>
         <p:nvSpPr>
-          <p:cNvPr id="6" name="Rounded Rectangle 5"/>
+          <p:cNvPr id="6" name="TextBox 5"/>
+          <p:cNvSpPr txBox="1"/>
+          <p:nvPr/>
+        </p:nvSpPr>
+        <p:spPr>
+          <a:xfrm>
+            <a:off x="548640" y="1554480"/>
+            <a:ext cx="6720840" cy="4617720"/>
+          </a:xfrm>
+          <a:prstGeom prst="rect">
+            <a:avLst/>
+          </a:prstGeom>
+          <a:noFill/>
+        </p:spPr>
+        <p:txBody>
+          <a:bodyPr wrap="square" lIns="0" rIns="0" tIns="0" bIns="0">
+            <a:spAutoFit/>
+          </a:bodyPr>
+          <a:lstStyle/>
+          <a:p>
+            <a:pPr>
+              <a:spcAft>
+                <a:spcPts val="1320"/>
+              </a:spcAft>
+            </a:pPr>
+            <a:r>
+              <a:rPr sz="2200" b="0">
+                <a:solidFill>
+                  <a:srgbClr val="202122"/>
+                </a:solidFill>
+                <a:latin typeface="Calibri"/>
+              </a:rPr>
+              <a:t>Every control system has inputs, processes and outputs.</a:t>
+            </a:r>
+          </a:p>
+          <a:p>
+            <a:pPr>
+              <a:spcAft>
+                <a:spcPts val="1320"/>
+              </a:spcAft>
+            </a:pPr>
+            <a:r>
+              <a:rPr sz="2200" b="0">
+                <a:solidFill>
+                  <a:srgbClr val="202122"/>
+                </a:solidFill>
+                <a:latin typeface="Calibri"/>
+              </a:rPr>
+              <a:t>Inputs are sensors measuring pressure, flow, temperature, speed or position. Processes decide what to do, using logic gates (AND, OR, NOT), timers, comparators, counters and latches. Outputs act on the world: motors, valves, heaters and lamps.</a:t>
+            </a:r>
+          </a:p>
+          <a:p>
+            <a:pPr>
+              <a:spcAft>
+                <a:spcPts val="1320"/>
+              </a:spcAft>
+            </a:pPr>
+            <a:r>
+              <a:rPr sz="2200" b="0">
+                <a:solidFill>
+                  <a:srgbClr val="202122"/>
+                </a:solidFill>
+                <a:latin typeface="Calibri"/>
+              </a:rPr>
+              <a:t>Feedback sends information about the output back to the input, so the system can correct itself. A summing point compares the desired value (set point) with the actual value.</a:t>
+            </a:r>
+          </a:p>
+        </p:txBody>
+      </p:sp>
+      <p:sp>
+        <p:nvSpPr>
+          <p:cNvPr id="7" name="Rounded Rectangle 6"/>
           <p:cNvSpPr/>
           <p:nvPr/>
         </p:nvSpPr>
         <p:spPr>
           <a:xfrm>
-            <a:off x="548640" y="1600200"/>
-            <a:ext cx="5410047" cy="2148840"/>
+            <a:off x="7772400" y="1554480"/>
+            <a:ext cx="3867912" cy="4526280"/>
           </a:xfrm>
           <a:prstGeom prst="roundRect">
             <a:avLst>
-              <a:gd name="adj" fmla="val 6000"/>
+              <a:gd name="adj" fmla="val 8000"/>
             </a:avLst>
           </a:prstGeom>
           <a:solidFill>
-            <a:srgbClr val="EAF3FF"/>
+            <a:srgbClr val="03306E"/>
           </a:solidFill>
           <a:ln>
             <a:noFill/>
@@ -5413,14 +9235,14 @@
       </p:sp>
       <p:sp>
         <p:nvSpPr>
-          <p:cNvPr id="7" name="Oval 6"/>
+          <p:cNvPr id="8" name="Oval 7"/>
           <p:cNvSpPr/>
           <p:nvPr/>
         </p:nvSpPr>
         <p:spPr>
           <a:xfrm>
-            <a:off x="777240" y="1828800"/>
-            <a:ext cx="457200" cy="457200"/>
+            <a:off x="8046720" y="1828800"/>
+            <a:ext cx="548640" cy="548640"/>
           </a:xfrm>
           <a:prstGeom prst="ellipse">
             <a:avLst/>
@@ -5453,60 +9275,60 @@
           <a:p>
             <a:pPr algn="ctr"/>
             <a:r>
-              <a:rPr sz="1500" b="1">
+              <a:rPr sz="1300" b="1">
                 <a:solidFill>
                   <a:srgbClr val="202122"/>
                 </a:solidFill>
                 <a:latin typeface="Calibri"/>
               </a:rPr>
-              <a:t>1</a:t>
-            </a:r>
-          </a:p>
-        </p:txBody>
-      </p:sp>
-      <p:sp>
-        <p:nvSpPr>
-          <p:cNvPr id="8" name="TextBox 7"/>
-          <p:cNvSpPr txBox="1"/>
-          <p:nvPr/>
-        </p:nvSpPr>
-        <p:spPr>
-          <a:xfrm>
-            <a:off x="1371600" y="1801368"/>
-            <a:ext cx="4404207" cy="512064"/>
-          </a:xfrm>
-          <a:prstGeom prst="rect">
-            <a:avLst/>
-          </a:prstGeom>
-          <a:noFill/>
-        </p:spPr>
-        <p:txBody>
-          <a:bodyPr wrap="square" anchor="ctr" lIns="0" rIns="0" tIns="0" bIns="0"/>
+              <a:t>e.g.</a:t>
+            </a:r>
+          </a:p>
+        </p:txBody>
+      </p:sp>
+      <p:sp>
+        <p:nvSpPr>
+          <p:cNvPr id="9" name="TextBox 8"/>
+          <p:cNvSpPr txBox="1"/>
+          <p:nvPr/>
+        </p:nvSpPr>
+        <p:spPr>
+          <a:xfrm>
+            <a:off x="8046720" y="2560320"/>
+            <a:ext cx="3291840" cy="365760"/>
+          </a:xfrm>
+          <a:prstGeom prst="rect">
+            <a:avLst/>
+          </a:prstGeom>
+          <a:noFill/>
+        </p:spPr>
+        <p:txBody>
+          <a:bodyPr wrap="square" anchor="t" lIns="0" rIns="0" tIns="0" bIns="0"/>
           <a:lstStyle/>
           <a:p>
             <a:pPr algn="l"/>
             <a:r>
-              <a:rPr sz="1900" b="1" i="0">
-                <a:solidFill>
-                  <a:srgbClr val="03306E"/>
-                </a:solidFill>
-                <a:latin typeface="Calibri"/>
-              </a:rPr>
-              <a:t>Input</a:t>
-            </a:r>
-          </a:p>
-        </p:txBody>
-      </p:sp>
-      <p:sp>
-        <p:nvSpPr>
-          <p:cNvPr id="9" name="TextBox 8"/>
-          <p:cNvSpPr txBox="1"/>
-          <p:nvPr/>
-        </p:nvSpPr>
-        <p:spPr>
-          <a:xfrm>
-            <a:off x="777240" y="2468880"/>
-            <a:ext cx="4952847" cy="1143000"/>
+              <a:rPr sz="1300" b="1" i="0">
+                <a:solidFill>
+                  <a:srgbClr val="A9C8F0"/>
+                </a:solidFill>
+                <a:latin typeface="Calibri"/>
+              </a:rPr>
+              <a:t>EXAMPLE</a:t>
+            </a:r>
+          </a:p>
+        </p:txBody>
+      </p:sp>
+      <p:sp>
+        <p:nvSpPr>
+          <p:cNvPr id="10" name="TextBox 9"/>
+          <p:cNvSpPr txBox="1"/>
+          <p:nvPr/>
+        </p:nvSpPr>
+        <p:spPr>
+          <a:xfrm>
+            <a:off x="8046720" y="2971800"/>
+            <a:ext cx="3291840" cy="2971800"/>
           </a:xfrm>
           <a:prstGeom prst="rect">
             <a:avLst/>
@@ -5519,502 +9341,13 @@
           <a:p>
             <a:pPr algn="l"/>
             <a:r>
-              <a:rPr sz="2000" b="0" i="0">
-                <a:solidFill>
-                  <a:srgbClr val="202122"/>
-                </a:solidFill>
-                <a:latin typeface="Calibri"/>
-              </a:rPr>
-              <a:t>Sensors measuring pressure, flow, temperature, speed or position.</a:t>
-            </a:r>
-          </a:p>
-        </p:txBody>
-      </p:sp>
-      <p:sp>
-        <p:nvSpPr>
-          <p:cNvPr id="10" name="Rounded Rectangle 9"/>
-          <p:cNvSpPr/>
-          <p:nvPr/>
-        </p:nvSpPr>
-        <p:spPr>
-          <a:xfrm>
-            <a:off x="6233007" y="1600200"/>
-            <a:ext cx="5410047" cy="2148840"/>
-          </a:xfrm>
-          <a:prstGeom prst="roundRect">
-            <a:avLst>
-              <a:gd name="adj" fmla="val 6000"/>
-            </a:avLst>
-          </a:prstGeom>
-          <a:solidFill>
-            <a:srgbClr val="EAF3FF"/>
-          </a:solidFill>
-          <a:ln>
-            <a:noFill/>
-          </a:ln>
-          <a:effectLst/>
-        </p:spPr>
-        <p:style>
-          <a:lnRef idx="1">
-            <a:schemeClr val="accent1"/>
-          </a:lnRef>
-          <a:fillRef idx="3">
-            <a:schemeClr val="accent1"/>
-          </a:fillRef>
-          <a:effectRef idx="2">
-            <a:schemeClr val="accent1"/>
-          </a:effectRef>
-          <a:fontRef idx="minor">
-            <a:schemeClr val="lt1"/>
-          </a:fontRef>
-        </p:style>
-        <p:txBody>
-          <a:bodyPr rtlCol="0" anchor="ctr"/>
-          <a:lstStyle/>
-          <a:p/>
-        </p:txBody>
-      </p:sp>
-      <p:sp>
-        <p:nvSpPr>
-          <p:cNvPr id="11" name="Oval 10"/>
-          <p:cNvSpPr/>
-          <p:nvPr/>
-        </p:nvSpPr>
-        <p:spPr>
-          <a:xfrm>
-            <a:off x="6461607" y="1828800"/>
-            <a:ext cx="457200" cy="457200"/>
-          </a:xfrm>
-          <a:prstGeom prst="ellipse">
-            <a:avLst/>
-          </a:prstGeom>
-          <a:solidFill>
-            <a:srgbClr val="F2B705"/>
-          </a:solidFill>
-          <a:ln>
-            <a:noFill/>
-          </a:ln>
-          <a:effectLst/>
-        </p:spPr>
-        <p:style>
-          <a:lnRef idx="1">
-            <a:schemeClr val="accent1"/>
-          </a:lnRef>
-          <a:fillRef idx="3">
-            <a:schemeClr val="accent1"/>
-          </a:fillRef>
-          <a:effectRef idx="2">
-            <a:schemeClr val="accent1"/>
-          </a:effectRef>
-          <a:fontRef idx="minor">
-            <a:schemeClr val="lt1"/>
-          </a:fontRef>
-        </p:style>
-        <p:txBody>
-          <a:bodyPr rtlCol="0" anchor="ctr" lIns="0" rIns="0" tIns="0" bIns="0"/>
-          <a:lstStyle/>
-          <a:p>
-            <a:pPr algn="ctr"/>
-            <a:r>
-              <a:rPr sz="1500" b="1">
-                <a:solidFill>
-                  <a:srgbClr val="202122"/>
-                </a:solidFill>
-                <a:latin typeface="Calibri"/>
-              </a:rPr>
-              <a:t>2</a:t>
-            </a:r>
-          </a:p>
-        </p:txBody>
-      </p:sp>
-      <p:sp>
-        <p:nvSpPr>
-          <p:cNvPr id="12" name="TextBox 11"/>
-          <p:cNvSpPr txBox="1"/>
-          <p:nvPr/>
-        </p:nvSpPr>
-        <p:spPr>
-          <a:xfrm>
-            <a:off x="7055967" y="1801368"/>
-            <a:ext cx="4404207" cy="512064"/>
-          </a:xfrm>
-          <a:prstGeom prst="rect">
-            <a:avLst/>
-          </a:prstGeom>
-          <a:noFill/>
-        </p:spPr>
-        <p:txBody>
-          <a:bodyPr wrap="square" anchor="ctr" lIns="0" rIns="0" tIns="0" bIns="0"/>
-          <a:lstStyle/>
-          <a:p>
-            <a:pPr algn="l"/>
-            <a:r>
-              <a:rPr sz="1900" b="1" i="0">
-                <a:solidFill>
-                  <a:srgbClr val="03306E"/>
-                </a:solidFill>
-                <a:latin typeface="Calibri"/>
-              </a:rPr>
-              <a:t>Process</a:t>
-            </a:r>
-          </a:p>
-        </p:txBody>
-      </p:sp>
-      <p:sp>
-        <p:nvSpPr>
-          <p:cNvPr id="13" name="TextBox 12"/>
-          <p:cNvSpPr txBox="1"/>
-          <p:nvPr/>
-        </p:nvSpPr>
-        <p:spPr>
-          <a:xfrm>
-            <a:off x="6461607" y="2468880"/>
-            <a:ext cx="4952847" cy="1143000"/>
-          </a:xfrm>
-          <a:prstGeom prst="rect">
-            <a:avLst/>
-          </a:prstGeom>
-          <a:noFill/>
-        </p:spPr>
-        <p:txBody>
-          <a:bodyPr wrap="square" anchor="t" lIns="0" rIns="0" tIns="0" bIns="0"/>
-          <a:lstStyle/>
-          <a:p>
-            <a:pPr algn="l"/>
-            <a:r>
-              <a:rPr sz="2000" b="0" i="0">
-                <a:solidFill>
-                  <a:srgbClr val="202122"/>
-                </a:solidFill>
-                <a:latin typeface="Calibri"/>
-              </a:rPr>
-              <a:t>Logic gates (AND, OR, NOT), timers, comparators, counters, latches.</a:t>
-            </a:r>
-          </a:p>
-        </p:txBody>
-      </p:sp>
-      <p:sp>
-        <p:nvSpPr>
-          <p:cNvPr id="14" name="Rounded Rectangle 13"/>
-          <p:cNvSpPr/>
-          <p:nvPr/>
-        </p:nvSpPr>
-        <p:spPr>
-          <a:xfrm>
-            <a:off x="548640" y="4023360"/>
-            <a:ext cx="5410047" cy="2148840"/>
-          </a:xfrm>
-          <a:prstGeom prst="roundRect">
-            <a:avLst>
-              <a:gd name="adj" fmla="val 6000"/>
-            </a:avLst>
-          </a:prstGeom>
-          <a:solidFill>
-            <a:srgbClr val="EAF3FF"/>
-          </a:solidFill>
-          <a:ln>
-            <a:noFill/>
-          </a:ln>
-          <a:effectLst/>
-        </p:spPr>
-        <p:style>
-          <a:lnRef idx="1">
-            <a:schemeClr val="accent1"/>
-          </a:lnRef>
-          <a:fillRef idx="3">
-            <a:schemeClr val="accent1"/>
-          </a:fillRef>
-          <a:effectRef idx="2">
-            <a:schemeClr val="accent1"/>
-          </a:effectRef>
-          <a:fontRef idx="minor">
-            <a:schemeClr val="lt1"/>
-          </a:fontRef>
-        </p:style>
-        <p:txBody>
-          <a:bodyPr rtlCol="0" anchor="ctr"/>
-          <a:lstStyle/>
-          <a:p/>
-        </p:txBody>
-      </p:sp>
-      <p:sp>
-        <p:nvSpPr>
-          <p:cNvPr id="15" name="Oval 14"/>
-          <p:cNvSpPr/>
-          <p:nvPr/>
-        </p:nvSpPr>
-        <p:spPr>
-          <a:xfrm>
-            <a:off x="777240" y="4251960"/>
-            <a:ext cx="457200" cy="457200"/>
-          </a:xfrm>
-          <a:prstGeom prst="ellipse">
-            <a:avLst/>
-          </a:prstGeom>
-          <a:solidFill>
-            <a:srgbClr val="F2B705"/>
-          </a:solidFill>
-          <a:ln>
-            <a:noFill/>
-          </a:ln>
-          <a:effectLst/>
-        </p:spPr>
-        <p:style>
-          <a:lnRef idx="1">
-            <a:schemeClr val="accent1"/>
-          </a:lnRef>
-          <a:fillRef idx="3">
-            <a:schemeClr val="accent1"/>
-          </a:fillRef>
-          <a:effectRef idx="2">
-            <a:schemeClr val="accent1"/>
-          </a:effectRef>
-          <a:fontRef idx="minor">
-            <a:schemeClr val="lt1"/>
-          </a:fontRef>
-        </p:style>
-        <p:txBody>
-          <a:bodyPr rtlCol="0" anchor="ctr" lIns="0" rIns="0" tIns="0" bIns="0"/>
-          <a:lstStyle/>
-          <a:p>
-            <a:pPr algn="ctr"/>
-            <a:r>
-              <a:rPr sz="1500" b="1">
-                <a:solidFill>
-                  <a:srgbClr val="202122"/>
-                </a:solidFill>
-                <a:latin typeface="Calibri"/>
-              </a:rPr>
-              <a:t>3</a:t>
-            </a:r>
-          </a:p>
-        </p:txBody>
-      </p:sp>
-      <p:sp>
-        <p:nvSpPr>
-          <p:cNvPr id="16" name="TextBox 15"/>
-          <p:cNvSpPr txBox="1"/>
-          <p:nvPr/>
-        </p:nvSpPr>
-        <p:spPr>
-          <a:xfrm>
-            <a:off x="1371600" y="4224528"/>
-            <a:ext cx="4404207" cy="512064"/>
-          </a:xfrm>
-          <a:prstGeom prst="rect">
-            <a:avLst/>
-          </a:prstGeom>
-          <a:noFill/>
-        </p:spPr>
-        <p:txBody>
-          <a:bodyPr wrap="square" anchor="ctr" lIns="0" rIns="0" tIns="0" bIns="0"/>
-          <a:lstStyle/>
-          <a:p>
-            <a:pPr algn="l"/>
-            <a:r>
-              <a:rPr sz="1900" b="1" i="0">
-                <a:solidFill>
-                  <a:srgbClr val="03306E"/>
-                </a:solidFill>
-                <a:latin typeface="Calibri"/>
-              </a:rPr>
-              <a:t>Output</a:t>
-            </a:r>
-          </a:p>
-        </p:txBody>
-      </p:sp>
-      <p:sp>
-        <p:nvSpPr>
-          <p:cNvPr id="17" name="TextBox 16"/>
-          <p:cNvSpPr txBox="1"/>
-          <p:nvPr/>
-        </p:nvSpPr>
-        <p:spPr>
-          <a:xfrm>
-            <a:off x="777240" y="4892040"/>
-            <a:ext cx="4952847" cy="1143000"/>
-          </a:xfrm>
-          <a:prstGeom prst="rect">
-            <a:avLst/>
-          </a:prstGeom>
-          <a:noFill/>
-        </p:spPr>
-        <p:txBody>
-          <a:bodyPr wrap="square" anchor="t" lIns="0" rIns="0" tIns="0" bIns="0"/>
-          <a:lstStyle/>
-          <a:p>
-            <a:pPr algn="l"/>
-            <a:r>
-              <a:rPr sz="2000" b="0" i="0">
-                <a:solidFill>
-                  <a:srgbClr val="202122"/>
-                </a:solidFill>
-                <a:latin typeface="Calibri"/>
-              </a:rPr>
-              <a:t>Motors, valves, heaters, lamps.</a:t>
-            </a:r>
-          </a:p>
-        </p:txBody>
-      </p:sp>
-      <p:sp>
-        <p:nvSpPr>
-          <p:cNvPr id="18" name="Rounded Rectangle 17"/>
-          <p:cNvSpPr/>
-          <p:nvPr/>
-        </p:nvSpPr>
-        <p:spPr>
-          <a:xfrm>
-            <a:off x="6233007" y="4023360"/>
-            <a:ext cx="5410047" cy="2148840"/>
-          </a:xfrm>
-          <a:prstGeom prst="roundRect">
-            <a:avLst>
-              <a:gd name="adj" fmla="val 6000"/>
-            </a:avLst>
-          </a:prstGeom>
-          <a:solidFill>
-            <a:srgbClr val="EAF3FF"/>
-          </a:solidFill>
-          <a:ln>
-            <a:noFill/>
-          </a:ln>
-          <a:effectLst/>
-        </p:spPr>
-        <p:style>
-          <a:lnRef idx="1">
-            <a:schemeClr val="accent1"/>
-          </a:lnRef>
-          <a:fillRef idx="3">
-            <a:schemeClr val="accent1"/>
-          </a:fillRef>
-          <a:effectRef idx="2">
-            <a:schemeClr val="accent1"/>
-          </a:effectRef>
-          <a:fontRef idx="minor">
-            <a:schemeClr val="lt1"/>
-          </a:fontRef>
-        </p:style>
-        <p:txBody>
-          <a:bodyPr rtlCol="0" anchor="ctr"/>
-          <a:lstStyle/>
-          <a:p/>
-        </p:txBody>
-      </p:sp>
-      <p:sp>
-        <p:nvSpPr>
-          <p:cNvPr id="19" name="Oval 18"/>
-          <p:cNvSpPr/>
-          <p:nvPr/>
-        </p:nvSpPr>
-        <p:spPr>
-          <a:xfrm>
-            <a:off x="6461607" y="4251960"/>
-            <a:ext cx="457200" cy="457200"/>
-          </a:xfrm>
-          <a:prstGeom prst="ellipse">
-            <a:avLst/>
-          </a:prstGeom>
-          <a:solidFill>
-            <a:srgbClr val="F2B705"/>
-          </a:solidFill>
-          <a:ln>
-            <a:noFill/>
-          </a:ln>
-          <a:effectLst/>
-        </p:spPr>
-        <p:style>
-          <a:lnRef idx="1">
-            <a:schemeClr val="accent1"/>
-          </a:lnRef>
-          <a:fillRef idx="3">
-            <a:schemeClr val="accent1"/>
-          </a:fillRef>
-          <a:effectRef idx="2">
-            <a:schemeClr val="accent1"/>
-          </a:effectRef>
-          <a:fontRef idx="minor">
-            <a:schemeClr val="lt1"/>
-          </a:fontRef>
-        </p:style>
-        <p:txBody>
-          <a:bodyPr rtlCol="0" anchor="ctr" lIns="0" rIns="0" tIns="0" bIns="0"/>
-          <a:lstStyle/>
-          <a:p>
-            <a:pPr algn="ctr"/>
-            <a:r>
-              <a:rPr sz="1500" b="1">
-                <a:solidFill>
-                  <a:srgbClr val="202122"/>
-                </a:solidFill>
-                <a:latin typeface="Calibri"/>
-              </a:rPr>
-              <a:t>4</a:t>
-            </a:r>
-          </a:p>
-        </p:txBody>
-      </p:sp>
-      <p:sp>
-        <p:nvSpPr>
-          <p:cNvPr id="20" name="TextBox 19"/>
-          <p:cNvSpPr txBox="1"/>
-          <p:nvPr/>
-        </p:nvSpPr>
-        <p:spPr>
-          <a:xfrm>
-            <a:off x="7055967" y="4224528"/>
-            <a:ext cx="4404207" cy="512064"/>
-          </a:xfrm>
-          <a:prstGeom prst="rect">
-            <a:avLst/>
-          </a:prstGeom>
-          <a:noFill/>
-        </p:spPr>
-        <p:txBody>
-          <a:bodyPr wrap="square" anchor="ctr" lIns="0" rIns="0" tIns="0" bIns="0"/>
-          <a:lstStyle/>
-          <a:p>
-            <a:pPr algn="l"/>
-            <a:r>
-              <a:rPr sz="1900" b="1" i="0">
-                <a:solidFill>
-                  <a:srgbClr val="03306E"/>
-                </a:solidFill>
-                <a:latin typeface="Calibri"/>
-              </a:rPr>
-              <a:t>Feedback</a:t>
-            </a:r>
-          </a:p>
-        </p:txBody>
-      </p:sp>
-      <p:sp>
-        <p:nvSpPr>
-          <p:cNvPr id="21" name="TextBox 20"/>
-          <p:cNvSpPr txBox="1"/>
-          <p:nvPr/>
-        </p:nvSpPr>
-        <p:spPr>
-          <a:xfrm>
-            <a:off x="6461607" y="4892040"/>
-            <a:ext cx="4952847" cy="1143000"/>
-          </a:xfrm>
-          <a:prstGeom prst="rect">
-            <a:avLst/>
-          </a:prstGeom>
-          <a:noFill/>
-        </p:spPr>
-        <p:txBody>
-          <a:bodyPr wrap="square" anchor="t" lIns="0" rIns="0" tIns="0" bIns="0"/>
-          <a:lstStyle/>
-          <a:p>
-            <a:pPr algn="l"/>
-            <a:r>
-              <a:rPr sz="2000" b="0" i="0">
-                <a:solidFill>
-                  <a:srgbClr val="202122"/>
-                </a:solidFill>
-                <a:latin typeface="Calibri"/>
-              </a:rPr>
-              <a:t>The output is measured and fed back to the input.</a:t>
+              <a:rPr sz="1900" b="0" i="0">
+                <a:solidFill>
+                  <a:srgbClr val="FFFFFF"/>
+                </a:solidFill>
+                <a:latin typeface="Cambria"/>
+              </a:rPr>
+              <a:t>A safety guard: the machine runs only if the guard sensor AND the start button are both on, an AND gate.</a:t>
             </a:r>
           </a:p>
         </p:txBody>
@@ -6106,7 +9439,7 @@
                 </a:solidFill>
                 <a:latin typeface="Cambria"/>
               </a:rPr>
-              <a:t>Open and closed loop</a:t>
+              <a:t>Parts of a control system</a:t>
             </a:r>
           </a:p>
         </p:txBody>
@@ -6186,88 +9519,11 @@
         <p:spPr>
           <a:xfrm>
             <a:off x="548640" y="1600200"/>
-            <a:ext cx="5364327" cy="640080"/>
+            <a:ext cx="5410047" cy="2148840"/>
           </a:xfrm>
           <a:prstGeom prst="roundRect">
             <a:avLst>
-              <a:gd name="adj" fmla="val 15000"/>
-            </a:avLst>
-          </a:prstGeom>
-          <a:solidFill>
-            <a:srgbClr val="03306E"/>
-          </a:solidFill>
-          <a:ln>
-            <a:noFill/>
-          </a:ln>
-          <a:effectLst/>
-        </p:spPr>
-        <p:style>
-          <a:lnRef idx="1">
-            <a:schemeClr val="accent1"/>
-          </a:lnRef>
-          <a:fillRef idx="3">
-            <a:schemeClr val="accent1"/>
-          </a:fillRef>
-          <a:effectRef idx="2">
-            <a:schemeClr val="accent1"/>
-          </a:effectRef>
-          <a:fontRef idx="minor">
-            <a:schemeClr val="lt1"/>
-          </a:fontRef>
-        </p:style>
-        <p:txBody>
-          <a:bodyPr rtlCol="0" anchor="ctr"/>
-          <a:lstStyle/>
-          <a:p/>
-        </p:txBody>
-      </p:sp>
-      <p:sp>
-        <p:nvSpPr>
-          <p:cNvPr id="7" name="TextBox 6"/>
-          <p:cNvSpPr txBox="1"/>
-          <p:nvPr/>
-        </p:nvSpPr>
-        <p:spPr>
-          <a:xfrm>
-            <a:off x="777240" y="1600200"/>
-            <a:ext cx="4907127" cy="640080"/>
-          </a:xfrm>
-          <a:prstGeom prst="rect">
-            <a:avLst/>
-          </a:prstGeom>
-          <a:noFill/>
-        </p:spPr>
-        <p:txBody>
-          <a:bodyPr wrap="square" anchor="ctr" lIns="0" rIns="0" tIns="0" bIns="0"/>
-          <a:lstStyle/>
-          <a:p>
-            <a:pPr algn="l"/>
-            <a:r>
-              <a:rPr sz="2000" b="1" i="0">
-                <a:solidFill>
-                  <a:srgbClr val="FFFFFF"/>
-                </a:solidFill>
-                <a:latin typeface="Calibri"/>
-              </a:rPr>
-              <a:t>Open loop</a:t>
-            </a:r>
-          </a:p>
-        </p:txBody>
-      </p:sp>
-      <p:sp>
-        <p:nvSpPr>
-          <p:cNvPr id="8" name="Rounded Rectangle 7"/>
-          <p:cNvSpPr/>
-          <p:nvPr/>
-        </p:nvSpPr>
-        <p:spPr>
-          <a:xfrm>
-            <a:off x="548640" y="2377440"/>
-            <a:ext cx="5364327" cy="3794760"/>
-          </a:xfrm>
-          <a:prstGeom prst="roundRect">
-            <a:avLst>
-              <a:gd name="adj" fmla="val 4000"/>
+              <a:gd name="adj" fmla="val 6000"/>
             </a:avLst>
           </a:prstGeom>
           <a:solidFill>
@@ -6300,129 +9556,20 @@
       </p:sp>
       <p:sp>
         <p:nvSpPr>
-          <p:cNvPr id="9" name="TextBox 8"/>
-          <p:cNvSpPr txBox="1"/>
-          <p:nvPr/>
-        </p:nvSpPr>
-        <p:spPr>
-          <a:xfrm>
-            <a:off x="822959" y="2606040"/>
-            <a:ext cx="4815687" cy="3337560"/>
-          </a:xfrm>
-          <a:prstGeom prst="rect">
-            <a:avLst/>
-          </a:prstGeom>
-          <a:noFill/>
-        </p:spPr>
-        <p:txBody>
-          <a:bodyPr wrap="square" lIns="0" rIns="0" tIns="0" bIns="0">
-            <a:spAutoFit/>
-          </a:bodyPr>
-          <a:lstStyle/>
-          <a:p>
-            <a:pPr marL="274320" indent="-274320">
-              <a:spcAft>
-                <a:spcPts val="990"/>
-              </a:spcAft>
-              <a:buClr>
-                <a:srgbClr val="0645AD"/>
-              </a:buClr>
-              <a:buFont typeface="Arial"/>
-              <a:buChar char="•"/>
-            </a:pPr>
-            <a:r>
-              <a:rPr sz="2200" b="0">
-                <a:solidFill>
-                  <a:srgbClr val="202122"/>
-                </a:solidFill>
-                <a:latin typeface="Calibri"/>
-              </a:rPr>
-              <a:t>No feedback</a:t>
-            </a:r>
-          </a:p>
-          <a:p>
-            <a:pPr marL="274320" indent="-274320">
-              <a:spcAft>
-                <a:spcPts val="990"/>
-              </a:spcAft>
-              <a:buClr>
-                <a:srgbClr val="0645AD"/>
-              </a:buClr>
-              <a:buFont typeface="Arial"/>
-              <a:buChar char="•"/>
-            </a:pPr>
-            <a:r>
-              <a:rPr sz="2200" b="0">
-                <a:solidFill>
-                  <a:srgbClr val="202122"/>
-                </a:solidFill>
-                <a:latin typeface="Calibri"/>
-              </a:rPr>
-              <a:t>Simple and cheap</a:t>
-            </a:r>
-          </a:p>
-          <a:p>
-            <a:pPr marL="274320" indent="-274320">
-              <a:spcAft>
-                <a:spcPts val="990"/>
-              </a:spcAft>
-              <a:buClr>
-                <a:srgbClr val="0645AD"/>
-              </a:buClr>
-              <a:buFont typeface="Arial"/>
-              <a:buChar char="•"/>
-            </a:pPr>
-            <a:r>
-              <a:rPr sz="2200" b="0">
-                <a:solidFill>
-                  <a:srgbClr val="202122"/>
-                </a:solidFill>
-                <a:latin typeface="Calibri"/>
-              </a:rPr>
-              <a:t>Cannot correct errors</a:t>
-            </a:r>
-          </a:p>
-          <a:p>
-            <a:pPr marL="274320" indent="-274320">
-              <a:spcAft>
-                <a:spcPts val="990"/>
-              </a:spcAft>
-              <a:buClr>
-                <a:srgbClr val="0645AD"/>
-              </a:buClr>
-              <a:buFont typeface="Arial"/>
-              <a:buChar char="•"/>
-            </a:pPr>
-            <a:r>
-              <a:rPr sz="2200" b="0">
-                <a:solidFill>
-                  <a:srgbClr val="202122"/>
-                </a:solidFill>
-                <a:latin typeface="Calibri"/>
-              </a:rPr>
-              <a:t>e.g. a toaster on a timer</a:t>
-            </a:r>
-          </a:p>
-        </p:txBody>
-      </p:sp>
-      <p:sp>
-        <p:nvSpPr>
-          <p:cNvPr id="10" name="Rounded Rectangle 9"/>
+          <p:cNvPr id="7" name="Oval 6"/>
           <p:cNvSpPr/>
           <p:nvPr/>
         </p:nvSpPr>
         <p:spPr>
           <a:xfrm>
-            <a:off x="6278727" y="1600200"/>
-            <a:ext cx="5364327" cy="640080"/>
-          </a:xfrm>
-          <a:prstGeom prst="roundRect">
-            <a:avLst>
-              <a:gd name="adj" fmla="val 15000"/>
-            </a:avLst>
+            <a:off x="777240" y="1828800"/>
+            <a:ext cx="457200" cy="457200"/>
+          </a:xfrm>
+          <a:prstGeom prst="ellipse">
+            <a:avLst/>
           </a:prstGeom>
           <a:solidFill>
-            <a:srgbClr val="0645AD"/>
+            <a:srgbClr val="F2B705"/>
           </a:solidFill>
           <a:ln>
             <a:noFill/>
@@ -6444,21 +9591,32 @@
           </a:fontRef>
         </p:style>
         <p:txBody>
-          <a:bodyPr rtlCol="0" anchor="ctr"/>
-          <a:lstStyle/>
-          <a:p/>
-        </p:txBody>
-      </p:sp>
-      <p:sp>
-        <p:nvSpPr>
-          <p:cNvPr id="11" name="TextBox 10"/>
-          <p:cNvSpPr txBox="1"/>
-          <p:nvPr/>
-        </p:nvSpPr>
-        <p:spPr>
-          <a:xfrm>
-            <a:off x="6507327" y="1600200"/>
-            <a:ext cx="4907127" cy="640080"/>
+          <a:bodyPr rtlCol="0" anchor="ctr" lIns="0" rIns="0" tIns="0" bIns="0"/>
+          <a:lstStyle/>
+          <a:p>
+            <a:pPr algn="ctr"/>
+            <a:r>
+              <a:rPr sz="1500" b="1">
+                <a:solidFill>
+                  <a:srgbClr val="202122"/>
+                </a:solidFill>
+                <a:latin typeface="Calibri"/>
+              </a:rPr>
+              <a:t>1</a:t>
+            </a:r>
+          </a:p>
+        </p:txBody>
+      </p:sp>
+      <p:sp>
+        <p:nvSpPr>
+          <p:cNvPr id="8" name="TextBox 7"/>
+          <p:cNvSpPr txBox="1"/>
+          <p:nvPr/>
+        </p:nvSpPr>
+        <p:spPr>
+          <a:xfrm>
+            <a:off x="1371600" y="1801368"/>
+            <a:ext cx="4404207" cy="512064"/>
           </a:xfrm>
           <a:prstGeom prst="rect">
             <a:avLst/>
@@ -6471,31 +9629,64 @@
           <a:p>
             <a:pPr algn="l"/>
             <a:r>
-              <a:rPr sz="2000" b="1" i="0">
-                <a:solidFill>
-                  <a:srgbClr val="FFFFFF"/>
-                </a:solidFill>
-                <a:latin typeface="Calibri"/>
-              </a:rPr>
-              <a:t>Closed loop</a:t>
-            </a:r>
-          </a:p>
-        </p:txBody>
-      </p:sp>
-      <p:sp>
-        <p:nvSpPr>
-          <p:cNvPr id="12" name="Rounded Rectangle 11"/>
+              <a:rPr sz="1900" b="1" i="0">
+                <a:solidFill>
+                  <a:srgbClr val="03306E"/>
+                </a:solidFill>
+                <a:latin typeface="Calibri"/>
+              </a:rPr>
+              <a:t>Input</a:t>
+            </a:r>
+          </a:p>
+        </p:txBody>
+      </p:sp>
+      <p:sp>
+        <p:nvSpPr>
+          <p:cNvPr id="9" name="TextBox 8"/>
+          <p:cNvSpPr txBox="1"/>
+          <p:nvPr/>
+        </p:nvSpPr>
+        <p:spPr>
+          <a:xfrm>
+            <a:off x="777240" y="2468880"/>
+            <a:ext cx="4952847" cy="1143000"/>
+          </a:xfrm>
+          <a:prstGeom prst="rect">
+            <a:avLst/>
+          </a:prstGeom>
+          <a:noFill/>
+        </p:spPr>
+        <p:txBody>
+          <a:bodyPr wrap="square" anchor="t" lIns="0" rIns="0" tIns="0" bIns="0"/>
+          <a:lstStyle/>
+          <a:p>
+            <a:pPr algn="l"/>
+            <a:r>
+              <a:rPr sz="2000" b="0" i="0">
+                <a:solidFill>
+                  <a:srgbClr val="202122"/>
+                </a:solidFill>
+                <a:latin typeface="Calibri"/>
+              </a:rPr>
+              <a:t>Sensors measuring pressure, flow, temperature, speed or position.</a:t>
+            </a:r>
+          </a:p>
+        </p:txBody>
+      </p:sp>
+      <p:sp>
+        <p:nvSpPr>
+          <p:cNvPr id="10" name="Rounded Rectangle 9"/>
           <p:cNvSpPr/>
           <p:nvPr/>
         </p:nvSpPr>
         <p:spPr>
           <a:xfrm>
-            <a:off x="6278727" y="2377440"/>
-            <a:ext cx="5364327" cy="3794760"/>
+            <a:off x="6233007" y="1600200"/>
+            <a:ext cx="5410047" cy="2148840"/>
           </a:xfrm>
           <a:prstGeom prst="roundRect">
             <a:avLst>
-              <a:gd name="adj" fmla="val 4000"/>
+              <a:gd name="adj" fmla="val 6000"/>
             </a:avLst>
           </a:prstGeom>
           <a:solidFill>
@@ -6528,107 +9719,445 @@
       </p:sp>
       <p:sp>
         <p:nvSpPr>
+          <p:cNvPr id="11" name="Oval 10"/>
+          <p:cNvSpPr/>
+          <p:nvPr/>
+        </p:nvSpPr>
+        <p:spPr>
+          <a:xfrm>
+            <a:off x="6461607" y="1828800"/>
+            <a:ext cx="457200" cy="457200"/>
+          </a:xfrm>
+          <a:prstGeom prst="ellipse">
+            <a:avLst/>
+          </a:prstGeom>
+          <a:solidFill>
+            <a:srgbClr val="F2B705"/>
+          </a:solidFill>
+          <a:ln>
+            <a:noFill/>
+          </a:ln>
+          <a:effectLst/>
+        </p:spPr>
+        <p:style>
+          <a:lnRef idx="1">
+            <a:schemeClr val="accent1"/>
+          </a:lnRef>
+          <a:fillRef idx="3">
+            <a:schemeClr val="accent1"/>
+          </a:fillRef>
+          <a:effectRef idx="2">
+            <a:schemeClr val="accent1"/>
+          </a:effectRef>
+          <a:fontRef idx="minor">
+            <a:schemeClr val="lt1"/>
+          </a:fontRef>
+        </p:style>
+        <p:txBody>
+          <a:bodyPr rtlCol="0" anchor="ctr" lIns="0" rIns="0" tIns="0" bIns="0"/>
+          <a:lstStyle/>
+          <a:p>
+            <a:pPr algn="ctr"/>
+            <a:r>
+              <a:rPr sz="1500" b="1">
+                <a:solidFill>
+                  <a:srgbClr val="202122"/>
+                </a:solidFill>
+                <a:latin typeface="Calibri"/>
+              </a:rPr>
+              <a:t>2</a:t>
+            </a:r>
+          </a:p>
+        </p:txBody>
+      </p:sp>
+      <p:sp>
+        <p:nvSpPr>
+          <p:cNvPr id="12" name="TextBox 11"/>
+          <p:cNvSpPr txBox="1"/>
+          <p:nvPr/>
+        </p:nvSpPr>
+        <p:spPr>
+          <a:xfrm>
+            <a:off x="7055967" y="1801368"/>
+            <a:ext cx="4404207" cy="512064"/>
+          </a:xfrm>
+          <a:prstGeom prst="rect">
+            <a:avLst/>
+          </a:prstGeom>
+          <a:noFill/>
+        </p:spPr>
+        <p:txBody>
+          <a:bodyPr wrap="square" anchor="ctr" lIns="0" rIns="0" tIns="0" bIns="0"/>
+          <a:lstStyle/>
+          <a:p>
+            <a:pPr algn="l"/>
+            <a:r>
+              <a:rPr sz="1900" b="1" i="0">
+                <a:solidFill>
+                  <a:srgbClr val="03306E"/>
+                </a:solidFill>
+                <a:latin typeface="Calibri"/>
+              </a:rPr>
+              <a:t>Process</a:t>
+            </a:r>
+          </a:p>
+        </p:txBody>
+      </p:sp>
+      <p:sp>
+        <p:nvSpPr>
           <p:cNvPr id="13" name="TextBox 12"/>
           <p:cNvSpPr txBox="1"/>
           <p:nvPr/>
         </p:nvSpPr>
         <p:spPr>
           <a:xfrm>
-            <a:off x="6553047" y="2606040"/>
-            <a:ext cx="4815687" cy="3337560"/>
-          </a:xfrm>
-          <a:prstGeom prst="rect">
-            <a:avLst/>
-          </a:prstGeom>
-          <a:noFill/>
-        </p:spPr>
-        <p:txBody>
-          <a:bodyPr wrap="square" lIns="0" rIns="0" tIns="0" bIns="0">
-            <a:spAutoFit/>
-          </a:bodyPr>
-          <a:lstStyle/>
-          <a:p>
-            <a:pPr marL="274320" indent="-274320">
-              <a:spcAft>
-                <a:spcPts val="990"/>
-              </a:spcAft>
-              <a:buClr>
-                <a:srgbClr val="0645AD"/>
-              </a:buClr>
-              <a:buFont typeface="Arial"/>
-              <a:buChar char="•"/>
-            </a:pPr>
-            <a:r>
-              <a:rPr sz="2200" b="0">
+            <a:off x="6461607" y="2468880"/>
+            <a:ext cx="4952847" cy="1143000"/>
+          </a:xfrm>
+          <a:prstGeom prst="rect">
+            <a:avLst/>
+          </a:prstGeom>
+          <a:noFill/>
+        </p:spPr>
+        <p:txBody>
+          <a:bodyPr wrap="square" anchor="t" lIns="0" rIns="0" tIns="0" bIns="0"/>
+          <a:lstStyle/>
+          <a:p>
+            <a:pPr algn="l"/>
+            <a:r>
+              <a:rPr sz="2000" b="0" i="0">
                 <a:solidFill>
                   <a:srgbClr val="202122"/>
                 </a:solidFill>
                 <a:latin typeface="Calibri"/>
               </a:rPr>
-              <a:t>Feedback via a summing point compares output to the set point</a:t>
-            </a:r>
-          </a:p>
-          <a:p>
-            <a:pPr marL="274320" indent="-274320">
-              <a:spcAft>
-                <a:spcPts val="990"/>
-              </a:spcAft>
-              <a:buClr>
-                <a:srgbClr val="0645AD"/>
-              </a:buClr>
-              <a:buFont typeface="Arial"/>
-              <a:buChar char="•"/>
-            </a:pPr>
-            <a:r>
-              <a:rPr sz="2200" b="0">
+              <a:t>Logic gates (AND, OR, NOT), timers, comparators, counters, latches.</a:t>
+            </a:r>
+          </a:p>
+        </p:txBody>
+      </p:sp>
+      <p:sp>
+        <p:nvSpPr>
+          <p:cNvPr id="14" name="Rounded Rectangle 13"/>
+          <p:cNvSpPr/>
+          <p:nvPr/>
+        </p:nvSpPr>
+        <p:spPr>
+          <a:xfrm>
+            <a:off x="548640" y="4023360"/>
+            <a:ext cx="5410047" cy="2148840"/>
+          </a:xfrm>
+          <a:prstGeom prst="roundRect">
+            <a:avLst>
+              <a:gd name="adj" fmla="val 6000"/>
+            </a:avLst>
+          </a:prstGeom>
+          <a:solidFill>
+            <a:srgbClr val="EAF3FF"/>
+          </a:solidFill>
+          <a:ln>
+            <a:noFill/>
+          </a:ln>
+          <a:effectLst/>
+        </p:spPr>
+        <p:style>
+          <a:lnRef idx="1">
+            <a:schemeClr val="accent1"/>
+          </a:lnRef>
+          <a:fillRef idx="3">
+            <a:schemeClr val="accent1"/>
+          </a:fillRef>
+          <a:effectRef idx="2">
+            <a:schemeClr val="accent1"/>
+          </a:effectRef>
+          <a:fontRef idx="minor">
+            <a:schemeClr val="lt1"/>
+          </a:fontRef>
+        </p:style>
+        <p:txBody>
+          <a:bodyPr rtlCol="0" anchor="ctr"/>
+          <a:lstStyle/>
+          <a:p/>
+        </p:txBody>
+      </p:sp>
+      <p:sp>
+        <p:nvSpPr>
+          <p:cNvPr id="15" name="Oval 14"/>
+          <p:cNvSpPr/>
+          <p:nvPr/>
+        </p:nvSpPr>
+        <p:spPr>
+          <a:xfrm>
+            <a:off x="777240" y="4251960"/>
+            <a:ext cx="457200" cy="457200"/>
+          </a:xfrm>
+          <a:prstGeom prst="ellipse">
+            <a:avLst/>
+          </a:prstGeom>
+          <a:solidFill>
+            <a:srgbClr val="F2B705"/>
+          </a:solidFill>
+          <a:ln>
+            <a:noFill/>
+          </a:ln>
+          <a:effectLst/>
+        </p:spPr>
+        <p:style>
+          <a:lnRef idx="1">
+            <a:schemeClr val="accent1"/>
+          </a:lnRef>
+          <a:fillRef idx="3">
+            <a:schemeClr val="accent1"/>
+          </a:fillRef>
+          <a:effectRef idx="2">
+            <a:schemeClr val="accent1"/>
+          </a:effectRef>
+          <a:fontRef idx="minor">
+            <a:schemeClr val="lt1"/>
+          </a:fontRef>
+        </p:style>
+        <p:txBody>
+          <a:bodyPr rtlCol="0" anchor="ctr" lIns="0" rIns="0" tIns="0" bIns="0"/>
+          <a:lstStyle/>
+          <a:p>
+            <a:pPr algn="ctr"/>
+            <a:r>
+              <a:rPr sz="1500" b="1">
                 <a:solidFill>
                   <a:srgbClr val="202122"/>
                 </a:solidFill>
                 <a:latin typeface="Calibri"/>
               </a:rPr>
-              <a:t>Corrects errors automatically</a:t>
-            </a:r>
-          </a:p>
-          <a:p>
-            <a:pPr marL="274320" indent="-274320">
-              <a:spcAft>
-                <a:spcPts val="990"/>
-              </a:spcAft>
-              <a:buClr>
-                <a:srgbClr val="0645AD"/>
-              </a:buClr>
-              <a:buFont typeface="Arial"/>
-              <a:buChar char="•"/>
-            </a:pPr>
-            <a:r>
-              <a:rPr sz="2200" b="0">
+              <a:t>3</a:t>
+            </a:r>
+          </a:p>
+        </p:txBody>
+      </p:sp>
+      <p:sp>
+        <p:nvSpPr>
+          <p:cNvPr id="16" name="TextBox 15"/>
+          <p:cNvSpPr txBox="1"/>
+          <p:nvPr/>
+        </p:nvSpPr>
+        <p:spPr>
+          <a:xfrm>
+            <a:off x="1371600" y="4224528"/>
+            <a:ext cx="4404207" cy="512064"/>
+          </a:xfrm>
+          <a:prstGeom prst="rect">
+            <a:avLst/>
+          </a:prstGeom>
+          <a:noFill/>
+        </p:spPr>
+        <p:txBody>
+          <a:bodyPr wrap="square" anchor="ctr" lIns="0" rIns="0" tIns="0" bIns="0"/>
+          <a:lstStyle/>
+          <a:p>
+            <a:pPr algn="l"/>
+            <a:r>
+              <a:rPr sz="1900" b="1" i="0">
+                <a:solidFill>
+                  <a:srgbClr val="03306E"/>
+                </a:solidFill>
+                <a:latin typeface="Calibri"/>
+              </a:rPr>
+              <a:t>Output</a:t>
+            </a:r>
+          </a:p>
+        </p:txBody>
+      </p:sp>
+      <p:sp>
+        <p:nvSpPr>
+          <p:cNvPr id="17" name="TextBox 16"/>
+          <p:cNvSpPr txBox="1"/>
+          <p:nvPr/>
+        </p:nvSpPr>
+        <p:spPr>
+          <a:xfrm>
+            <a:off x="777240" y="4892040"/>
+            <a:ext cx="4952847" cy="1143000"/>
+          </a:xfrm>
+          <a:prstGeom prst="rect">
+            <a:avLst/>
+          </a:prstGeom>
+          <a:noFill/>
+        </p:spPr>
+        <p:txBody>
+          <a:bodyPr wrap="square" anchor="t" lIns="0" rIns="0" tIns="0" bIns="0"/>
+          <a:lstStyle/>
+          <a:p>
+            <a:pPr algn="l"/>
+            <a:r>
+              <a:rPr sz="2000" b="0" i="0">
                 <a:solidFill>
                   <a:srgbClr val="202122"/>
                 </a:solidFill>
                 <a:latin typeface="Calibri"/>
               </a:rPr>
-              <a:t>Can overshoot (under-damped) or be slow (over-damped)</a:t>
-            </a:r>
-          </a:p>
-          <a:p>
-            <a:pPr marL="274320" indent="-274320">
-              <a:spcAft>
-                <a:spcPts val="990"/>
-              </a:spcAft>
-              <a:buClr>
-                <a:srgbClr val="0645AD"/>
-              </a:buClr>
-              <a:buFont typeface="Arial"/>
-              <a:buChar char="•"/>
-            </a:pPr>
-            <a:r>
-              <a:rPr sz="2200" b="0">
+              <a:t>Motors, valves, heaters, lamps.</a:t>
+            </a:r>
+          </a:p>
+        </p:txBody>
+      </p:sp>
+      <p:sp>
+        <p:nvSpPr>
+          <p:cNvPr id="18" name="Rounded Rectangle 17"/>
+          <p:cNvSpPr/>
+          <p:nvPr/>
+        </p:nvSpPr>
+        <p:spPr>
+          <a:xfrm>
+            <a:off x="6233007" y="4023360"/>
+            <a:ext cx="5410047" cy="2148840"/>
+          </a:xfrm>
+          <a:prstGeom prst="roundRect">
+            <a:avLst>
+              <a:gd name="adj" fmla="val 6000"/>
+            </a:avLst>
+          </a:prstGeom>
+          <a:solidFill>
+            <a:srgbClr val="EAF3FF"/>
+          </a:solidFill>
+          <a:ln>
+            <a:noFill/>
+          </a:ln>
+          <a:effectLst/>
+        </p:spPr>
+        <p:style>
+          <a:lnRef idx="1">
+            <a:schemeClr val="accent1"/>
+          </a:lnRef>
+          <a:fillRef idx="3">
+            <a:schemeClr val="accent1"/>
+          </a:fillRef>
+          <a:effectRef idx="2">
+            <a:schemeClr val="accent1"/>
+          </a:effectRef>
+          <a:fontRef idx="minor">
+            <a:schemeClr val="lt1"/>
+          </a:fontRef>
+        </p:style>
+        <p:txBody>
+          <a:bodyPr rtlCol="0" anchor="ctr"/>
+          <a:lstStyle/>
+          <a:p/>
+        </p:txBody>
+      </p:sp>
+      <p:sp>
+        <p:nvSpPr>
+          <p:cNvPr id="19" name="Oval 18"/>
+          <p:cNvSpPr/>
+          <p:nvPr/>
+        </p:nvSpPr>
+        <p:spPr>
+          <a:xfrm>
+            <a:off x="6461607" y="4251960"/>
+            <a:ext cx="457200" cy="457200"/>
+          </a:xfrm>
+          <a:prstGeom prst="ellipse">
+            <a:avLst/>
+          </a:prstGeom>
+          <a:solidFill>
+            <a:srgbClr val="F2B705"/>
+          </a:solidFill>
+          <a:ln>
+            <a:noFill/>
+          </a:ln>
+          <a:effectLst/>
+        </p:spPr>
+        <p:style>
+          <a:lnRef idx="1">
+            <a:schemeClr val="accent1"/>
+          </a:lnRef>
+          <a:fillRef idx="3">
+            <a:schemeClr val="accent1"/>
+          </a:fillRef>
+          <a:effectRef idx="2">
+            <a:schemeClr val="accent1"/>
+          </a:effectRef>
+          <a:fontRef idx="minor">
+            <a:schemeClr val="lt1"/>
+          </a:fontRef>
+        </p:style>
+        <p:txBody>
+          <a:bodyPr rtlCol="0" anchor="ctr" lIns="0" rIns="0" tIns="0" bIns="0"/>
+          <a:lstStyle/>
+          <a:p>
+            <a:pPr algn="ctr"/>
+            <a:r>
+              <a:rPr sz="1500" b="1">
                 <a:solidFill>
                   <a:srgbClr val="202122"/>
                 </a:solidFill>
                 <a:latin typeface="Calibri"/>
               </a:rPr>
-              <a:t>e.g. an oven thermostat, cruise control</a:t>
+              <a:t>4</a:t>
+            </a:r>
+          </a:p>
+        </p:txBody>
+      </p:sp>
+      <p:sp>
+        <p:nvSpPr>
+          <p:cNvPr id="20" name="TextBox 19"/>
+          <p:cNvSpPr txBox="1"/>
+          <p:nvPr/>
+        </p:nvSpPr>
+        <p:spPr>
+          <a:xfrm>
+            <a:off x="7055967" y="4224528"/>
+            <a:ext cx="4404207" cy="512064"/>
+          </a:xfrm>
+          <a:prstGeom prst="rect">
+            <a:avLst/>
+          </a:prstGeom>
+          <a:noFill/>
+        </p:spPr>
+        <p:txBody>
+          <a:bodyPr wrap="square" anchor="ctr" lIns="0" rIns="0" tIns="0" bIns="0"/>
+          <a:lstStyle/>
+          <a:p>
+            <a:pPr algn="l"/>
+            <a:r>
+              <a:rPr sz="1900" b="1" i="0">
+                <a:solidFill>
+                  <a:srgbClr val="03306E"/>
+                </a:solidFill>
+                <a:latin typeface="Calibri"/>
+              </a:rPr>
+              <a:t>Feedback</a:t>
+            </a:r>
+          </a:p>
+        </p:txBody>
+      </p:sp>
+      <p:sp>
+        <p:nvSpPr>
+          <p:cNvPr id="21" name="TextBox 20"/>
+          <p:cNvSpPr txBox="1"/>
+          <p:nvPr/>
+        </p:nvSpPr>
+        <p:spPr>
+          <a:xfrm>
+            <a:off x="6461607" y="4892040"/>
+            <a:ext cx="4952847" cy="1143000"/>
+          </a:xfrm>
+          <a:prstGeom prst="rect">
+            <a:avLst/>
+          </a:prstGeom>
+          <a:noFill/>
+        </p:spPr>
+        <p:txBody>
+          <a:bodyPr wrap="square" anchor="t" lIns="0" rIns="0" tIns="0" bIns="0"/>
+          <a:lstStyle/>
+          <a:p>
+            <a:pPr algn="l"/>
+            <a:r>
+              <a:rPr sz="2000" b="0" i="0">
+                <a:solidFill>
+                  <a:srgbClr val="202122"/>
+                </a:solidFill>
+                <a:latin typeface="Calibri"/>
+              </a:rPr>
+              <a:t>The output is measured and fed back to the input.</a:t>
             </a:r>
           </a:p>
         </p:txBody>
@@ -6720,7 +10249,7 @@
                 </a:solidFill>
                 <a:latin typeface="Cambria"/>
               </a:rPr>
-              <a:t>Signals and modulation</a:t>
+              <a:t>Quick check: Parts of a control system</a:t>
             </a:r>
           </a:p>
         </p:txBody>
@@ -6787,6 +10316,1910 @@
                 <a:latin typeface="Calibri"/>
               </a:rPr>
               <a:t>5</a:t>
+            </a:r>
+          </a:p>
+        </p:txBody>
+      </p:sp>
+      <p:sp>
+        <p:nvSpPr>
+          <p:cNvPr id="6" name="Oval 5"/>
+          <p:cNvSpPr/>
+          <p:nvPr/>
+        </p:nvSpPr>
+        <p:spPr>
+          <a:xfrm>
+            <a:off x="548640" y="1691640"/>
+            <a:ext cx="502920" cy="502920"/>
+          </a:xfrm>
+          <a:prstGeom prst="ellipse">
+            <a:avLst/>
+          </a:prstGeom>
+          <a:solidFill>
+            <a:srgbClr val="F2B705"/>
+          </a:solidFill>
+          <a:ln>
+            <a:noFill/>
+          </a:ln>
+          <a:effectLst/>
+        </p:spPr>
+        <p:style>
+          <a:lnRef idx="1">
+            <a:schemeClr val="accent1"/>
+          </a:lnRef>
+          <a:fillRef idx="3">
+            <a:schemeClr val="accent1"/>
+          </a:fillRef>
+          <a:effectRef idx="2">
+            <a:schemeClr val="accent1"/>
+          </a:effectRef>
+          <a:fontRef idx="minor">
+            <a:schemeClr val="lt1"/>
+          </a:fontRef>
+        </p:style>
+        <p:txBody>
+          <a:bodyPr rtlCol="0" anchor="ctr" lIns="0" rIns="0" tIns="0" bIns="0"/>
+          <a:lstStyle/>
+          <a:p>
+            <a:pPr algn="ctr"/>
+            <a:r>
+              <a:rPr sz="1600" b="1">
+                <a:solidFill>
+                  <a:srgbClr val="202122"/>
+                </a:solidFill>
+                <a:latin typeface="Calibri"/>
+              </a:rPr>
+              <a:t>1</a:t>
+            </a:r>
+          </a:p>
+        </p:txBody>
+      </p:sp>
+      <p:sp>
+        <p:nvSpPr>
+          <p:cNvPr id="7" name="TextBox 6"/>
+          <p:cNvSpPr txBox="1"/>
+          <p:nvPr/>
+        </p:nvSpPr>
+        <p:spPr>
+          <a:xfrm>
+            <a:off x="1371600" y="1645920"/>
+            <a:ext cx="10271455" cy="1188720"/>
+          </a:xfrm>
+          <a:prstGeom prst="rect">
+            <a:avLst/>
+          </a:prstGeom>
+          <a:noFill/>
+        </p:spPr>
+        <p:txBody>
+          <a:bodyPr wrap="square" anchor="t" lIns="0" rIns="0" tIns="0" bIns="0"/>
+          <a:lstStyle/>
+          <a:p>
+            <a:pPr algn="l"/>
+            <a:r>
+              <a:rPr sz="2400" b="0" i="0">
+                <a:solidFill>
+                  <a:srgbClr val="202122"/>
+                </a:solidFill>
+                <a:latin typeface="Calibri"/>
+              </a:rPr>
+              <a:t>Name three process blocks.</a:t>
+            </a:r>
+          </a:p>
+        </p:txBody>
+      </p:sp>
+      <p:sp>
+        <p:nvSpPr>
+          <p:cNvPr id="8" name="Oval 7"/>
+          <p:cNvSpPr/>
+          <p:nvPr/>
+        </p:nvSpPr>
+        <p:spPr>
+          <a:xfrm>
+            <a:off x="548640" y="3108960"/>
+            <a:ext cx="502920" cy="502920"/>
+          </a:xfrm>
+          <a:prstGeom prst="ellipse">
+            <a:avLst/>
+          </a:prstGeom>
+          <a:solidFill>
+            <a:srgbClr val="F2B705"/>
+          </a:solidFill>
+          <a:ln>
+            <a:noFill/>
+          </a:ln>
+          <a:effectLst/>
+        </p:spPr>
+        <p:style>
+          <a:lnRef idx="1">
+            <a:schemeClr val="accent1"/>
+          </a:lnRef>
+          <a:fillRef idx="3">
+            <a:schemeClr val="accent1"/>
+          </a:fillRef>
+          <a:effectRef idx="2">
+            <a:schemeClr val="accent1"/>
+          </a:effectRef>
+          <a:fontRef idx="minor">
+            <a:schemeClr val="lt1"/>
+          </a:fontRef>
+        </p:style>
+        <p:txBody>
+          <a:bodyPr rtlCol="0" anchor="ctr" lIns="0" rIns="0" tIns="0" bIns="0"/>
+          <a:lstStyle/>
+          <a:p>
+            <a:pPr algn="ctr"/>
+            <a:r>
+              <a:rPr sz="1600" b="1">
+                <a:solidFill>
+                  <a:srgbClr val="202122"/>
+                </a:solidFill>
+                <a:latin typeface="Calibri"/>
+              </a:rPr>
+              <a:t>2</a:t>
+            </a:r>
+          </a:p>
+        </p:txBody>
+      </p:sp>
+      <p:sp>
+        <p:nvSpPr>
+          <p:cNvPr id="9" name="TextBox 8"/>
+          <p:cNvSpPr txBox="1"/>
+          <p:nvPr/>
+        </p:nvSpPr>
+        <p:spPr>
+          <a:xfrm>
+            <a:off x="1371600" y="3063240"/>
+            <a:ext cx="10271455" cy="1188720"/>
+          </a:xfrm>
+          <a:prstGeom prst="rect">
+            <a:avLst/>
+          </a:prstGeom>
+          <a:noFill/>
+        </p:spPr>
+        <p:txBody>
+          <a:bodyPr wrap="square" anchor="t" lIns="0" rIns="0" tIns="0" bIns="0"/>
+          <a:lstStyle/>
+          <a:p>
+            <a:pPr algn="l"/>
+            <a:r>
+              <a:rPr sz="2400" b="0" i="0">
+                <a:solidFill>
+                  <a:srgbClr val="202122"/>
+                </a:solidFill>
+                <a:latin typeface="Calibri"/>
+              </a:rPr>
+              <a:t>What is feedback?</a:t>
+            </a:r>
+          </a:p>
+        </p:txBody>
+      </p:sp>
+      <p:sp>
+        <p:nvSpPr>
+          <p:cNvPr id="10" name="Oval 9"/>
+          <p:cNvSpPr/>
+          <p:nvPr/>
+        </p:nvSpPr>
+        <p:spPr>
+          <a:xfrm>
+            <a:off x="548640" y="4526280"/>
+            <a:ext cx="502920" cy="502920"/>
+          </a:xfrm>
+          <a:prstGeom prst="ellipse">
+            <a:avLst/>
+          </a:prstGeom>
+          <a:solidFill>
+            <a:srgbClr val="F2B705"/>
+          </a:solidFill>
+          <a:ln>
+            <a:noFill/>
+          </a:ln>
+          <a:effectLst/>
+        </p:spPr>
+        <p:style>
+          <a:lnRef idx="1">
+            <a:schemeClr val="accent1"/>
+          </a:lnRef>
+          <a:fillRef idx="3">
+            <a:schemeClr val="accent1"/>
+          </a:fillRef>
+          <a:effectRef idx="2">
+            <a:schemeClr val="accent1"/>
+          </a:effectRef>
+          <a:fontRef idx="minor">
+            <a:schemeClr val="lt1"/>
+          </a:fontRef>
+        </p:style>
+        <p:txBody>
+          <a:bodyPr rtlCol="0" anchor="ctr" lIns="0" rIns="0" tIns="0" bIns="0"/>
+          <a:lstStyle/>
+          <a:p>
+            <a:pPr algn="ctr"/>
+            <a:r>
+              <a:rPr sz="1600" b="1">
+                <a:solidFill>
+                  <a:srgbClr val="202122"/>
+                </a:solidFill>
+                <a:latin typeface="Calibri"/>
+              </a:rPr>
+              <a:t>3</a:t>
+            </a:r>
+          </a:p>
+        </p:txBody>
+      </p:sp>
+      <p:sp>
+        <p:nvSpPr>
+          <p:cNvPr id="11" name="TextBox 10"/>
+          <p:cNvSpPr txBox="1"/>
+          <p:nvPr/>
+        </p:nvSpPr>
+        <p:spPr>
+          <a:xfrm>
+            <a:off x="1371600" y="4480560"/>
+            <a:ext cx="10271455" cy="1188720"/>
+          </a:xfrm>
+          <a:prstGeom prst="rect">
+            <a:avLst/>
+          </a:prstGeom>
+          <a:noFill/>
+        </p:spPr>
+        <p:txBody>
+          <a:bodyPr wrap="square" anchor="t" lIns="0" rIns="0" tIns="0" bIns="0"/>
+          <a:lstStyle/>
+          <a:p>
+            <a:pPr algn="l"/>
+            <a:r>
+              <a:rPr sz="2400" b="0" i="0">
+                <a:solidFill>
+                  <a:srgbClr val="202122"/>
+                </a:solidFill>
+                <a:latin typeface="Calibri"/>
+              </a:rPr>
+              <a:t>What does an AND gate need to output 1?</a:t>
+            </a:r>
+          </a:p>
+        </p:txBody>
+      </p:sp>
+      <p:sp>
+        <p:nvSpPr>
+          <p:cNvPr id="12" name="TextBox 11"/>
+          <p:cNvSpPr txBox="1"/>
+          <p:nvPr/>
+        </p:nvSpPr>
+        <p:spPr>
+          <a:xfrm>
+            <a:off x="548640" y="5852160"/>
+            <a:ext cx="11094415" cy="365760"/>
+          </a:xfrm>
+          <a:prstGeom prst="rect">
+            <a:avLst/>
+          </a:prstGeom>
+          <a:noFill/>
+        </p:spPr>
+        <p:txBody>
+          <a:bodyPr wrap="square" anchor="t" lIns="0" rIns="0" tIns="0" bIns="0"/>
+          <a:lstStyle/>
+          <a:p>
+            <a:pPr algn="l"/>
+            <a:r>
+              <a:rPr sz="1300" b="0" i="1">
+                <a:solidFill>
+                  <a:srgbClr val="54595D"/>
+                </a:solidFill>
+                <a:latin typeface="Calibri"/>
+              </a:rPr>
+              <a:t>Answer on mini whiteboards or in your book. Answers are in the speaker notes.</a:t>
+            </a:r>
+          </a:p>
+        </p:txBody>
+      </p:sp>
+    </p:spTree>
+  </p:cSld>
+  <p:clrMapOvr>
+    <a:masterClrMapping/>
+  </p:clrMapOvr>
+</p:sld>
+</file>
+
+<file path=ppt/slides/slide6.xml><?xml version="1.0" encoding="utf-8"?>
+<p:sld xmlns:a="http://schemas.openxmlformats.org/drawingml/2006/main" xmlns:p="http://schemas.openxmlformats.org/presentationml/2006/main" xmlns:r="http://schemas.openxmlformats.org/officeDocument/2006/relationships">
+  <p:cSld>
+    <p:bg>
+      <p:bgPr>
+        <a:solidFill>
+          <a:srgbClr val="FFFFFF"/>
+        </a:solidFill>
+        <a:effectLst/>
+      </p:bgPr>
+    </p:bg>
+    <p:spTree>
+      <p:nvGrpSpPr>
+        <p:cNvPr id="1" name=""/>
+        <p:cNvGrpSpPr/>
+        <p:nvPr/>
+      </p:nvGrpSpPr>
+      <p:grpSpPr/>
+      <p:sp>
+        <p:nvSpPr>
+          <p:cNvPr id="2" name="TextBox 1"/>
+          <p:cNvSpPr txBox="1"/>
+          <p:nvPr/>
+        </p:nvSpPr>
+        <p:spPr>
+          <a:xfrm>
+            <a:off x="548640" y="320040"/>
+            <a:ext cx="11094415" cy="274320"/>
+          </a:xfrm>
+          <a:prstGeom prst="rect">
+            <a:avLst/>
+          </a:prstGeom>
+          <a:noFill/>
+        </p:spPr>
+        <p:txBody>
+          <a:bodyPr wrap="square" anchor="t" lIns="0" rIns="0" tIns="0" bIns="0"/>
+          <a:lstStyle/>
+          <a:p>
+            <a:pPr algn="l"/>
+            <a:r>
+              <a:rPr sz="1100" b="1" i="0">
+                <a:solidFill>
+                  <a:srgbClr val="54595D"/>
+                </a:solidFill>
+                <a:latin typeface="Calibri"/>
+              </a:rPr>
+              <a:t>ENGINEERING CORE  ·  Core topic 10</a:t>
+            </a:r>
+          </a:p>
+        </p:txBody>
+      </p:sp>
+      <p:sp>
+        <p:nvSpPr>
+          <p:cNvPr id="3" name="TextBox 2"/>
+          <p:cNvSpPr txBox="1"/>
+          <p:nvPr/>
+        </p:nvSpPr>
+        <p:spPr>
+          <a:xfrm>
+            <a:off x="548640" y="566928"/>
+            <a:ext cx="11094415" cy="822960"/>
+          </a:xfrm>
+          <a:prstGeom prst="rect">
+            <a:avLst/>
+          </a:prstGeom>
+          <a:noFill/>
+        </p:spPr>
+        <p:txBody>
+          <a:bodyPr wrap="square" anchor="ctr" lIns="0" rIns="0" tIns="0" bIns="0"/>
+          <a:lstStyle/>
+          <a:p>
+            <a:pPr algn="l"/>
+            <a:r>
+              <a:rPr sz="3200" b="1" i="0">
+                <a:solidFill>
+                  <a:srgbClr val="03306E"/>
+                </a:solidFill>
+                <a:latin typeface="Cambria"/>
+              </a:rPr>
+              <a:t>Open and closed loop</a:t>
+            </a:r>
+          </a:p>
+        </p:txBody>
+      </p:sp>
+      <p:sp>
+        <p:nvSpPr>
+          <p:cNvPr id="4" name="TextBox 3"/>
+          <p:cNvSpPr txBox="1"/>
+          <p:nvPr/>
+        </p:nvSpPr>
+        <p:spPr>
+          <a:xfrm>
+            <a:off x="548640" y="6446520"/>
+            <a:ext cx="8229600" cy="274320"/>
+          </a:xfrm>
+          <a:prstGeom prst="rect">
+            <a:avLst/>
+          </a:prstGeom>
+          <a:noFill/>
+        </p:spPr>
+        <p:txBody>
+          <a:bodyPr wrap="square" anchor="t" lIns="0" rIns="0" tIns="0" bIns="0"/>
+          <a:lstStyle/>
+          <a:p>
+            <a:pPr algn="l"/>
+            <a:r>
+              <a:rPr sz="1000" b="0" i="0">
+                <a:solidFill>
+                  <a:srgbClr val="54595D"/>
+                </a:solidFill>
+                <a:latin typeface="Calibri"/>
+              </a:rPr>
+              <a:t>Design and Development for Engineering and Manufacturing T Level  ·  Control Systems, Sensors and Actuators</a:t>
+            </a:r>
+          </a:p>
+        </p:txBody>
+      </p:sp>
+      <p:sp>
+        <p:nvSpPr>
+          <p:cNvPr id="5" name="TextBox 4"/>
+          <p:cNvSpPr txBox="1"/>
+          <p:nvPr/>
+        </p:nvSpPr>
+        <p:spPr>
+          <a:xfrm>
+            <a:off x="10728655" y="6446520"/>
+            <a:ext cx="914400" cy="274320"/>
+          </a:xfrm>
+          <a:prstGeom prst="rect">
+            <a:avLst/>
+          </a:prstGeom>
+          <a:noFill/>
+        </p:spPr>
+        <p:txBody>
+          <a:bodyPr wrap="square" anchor="t" lIns="0" rIns="0" tIns="0" bIns="0"/>
+          <a:lstStyle/>
+          <a:p>
+            <a:pPr algn="r"/>
+            <a:r>
+              <a:rPr sz="1000" b="0" i="0">
+                <a:solidFill>
+                  <a:srgbClr val="54595D"/>
+                </a:solidFill>
+                <a:latin typeface="Calibri"/>
+              </a:rPr>
+              <a:t>6</a:t>
+            </a:r>
+          </a:p>
+        </p:txBody>
+      </p:sp>
+      <p:sp>
+        <p:nvSpPr>
+          <p:cNvPr id="6" name="TextBox 5"/>
+          <p:cNvSpPr txBox="1"/>
+          <p:nvPr/>
+        </p:nvSpPr>
+        <p:spPr>
+          <a:xfrm>
+            <a:off x="548640" y="1554480"/>
+            <a:ext cx="6720840" cy="4617720"/>
+          </a:xfrm>
+          <a:prstGeom prst="rect">
+            <a:avLst/>
+          </a:prstGeom>
+          <a:noFill/>
+        </p:spPr>
+        <p:txBody>
+          <a:bodyPr wrap="square" lIns="0" rIns="0" tIns="0" bIns="0">
+            <a:spAutoFit/>
+          </a:bodyPr>
+          <a:lstStyle/>
+          <a:p>
+            <a:pPr>
+              <a:spcAft>
+                <a:spcPts val="1320"/>
+              </a:spcAft>
+            </a:pPr>
+            <a:r>
+              <a:rPr sz="2200" b="0">
+                <a:solidFill>
+                  <a:srgbClr val="202122"/>
+                </a:solidFill>
+                <a:latin typeface="Calibri"/>
+              </a:rPr>
+              <a:t>An open loop system has no feedback: it runs a set action regardless of the result. It's simple and cheap but can't correct errors, like a toaster on a timer.</a:t>
+            </a:r>
+          </a:p>
+          <a:p>
+            <a:pPr>
+              <a:spcAft>
+                <a:spcPts val="1320"/>
+              </a:spcAft>
+            </a:pPr>
+            <a:r>
+              <a:rPr sz="2200" b="0">
+                <a:solidFill>
+                  <a:srgbClr val="202122"/>
+                </a:solidFill>
+                <a:latin typeface="Calibri"/>
+              </a:rPr>
+              <a:t>A closed loop system measures its output and feeds it back to compare with the set point, correcting any difference automatically, like an oven thermostat or cruise control.</a:t>
+            </a:r>
+          </a:p>
+          <a:p>
+            <a:pPr>
+              <a:spcAft>
+                <a:spcPts val="1320"/>
+              </a:spcAft>
+            </a:pPr>
+            <a:r>
+              <a:rPr sz="2200" b="0">
+                <a:solidFill>
+                  <a:srgbClr val="202122"/>
+                </a:solidFill>
+                <a:latin typeface="Calibri"/>
+              </a:rPr>
+              <a:t>Closed loop systems can be under-damped (overshooting and oscillating) or over-damped (slow to reach the set point). Steady-state error is any difference that remains once the system settles.</a:t>
+            </a:r>
+          </a:p>
+        </p:txBody>
+      </p:sp>
+      <p:sp>
+        <p:nvSpPr>
+          <p:cNvPr id="7" name="Rounded Rectangle 6"/>
+          <p:cNvSpPr/>
+          <p:nvPr/>
+        </p:nvSpPr>
+        <p:spPr>
+          <a:xfrm>
+            <a:off x="7772400" y="1554480"/>
+            <a:ext cx="3867912" cy="4526280"/>
+          </a:xfrm>
+          <a:prstGeom prst="roundRect">
+            <a:avLst>
+              <a:gd name="adj" fmla="val 8000"/>
+            </a:avLst>
+          </a:prstGeom>
+          <a:solidFill>
+            <a:srgbClr val="03306E"/>
+          </a:solidFill>
+          <a:ln>
+            <a:noFill/>
+          </a:ln>
+          <a:effectLst/>
+        </p:spPr>
+        <p:style>
+          <a:lnRef idx="1">
+            <a:schemeClr val="accent1"/>
+          </a:lnRef>
+          <a:fillRef idx="3">
+            <a:schemeClr val="accent1"/>
+          </a:fillRef>
+          <a:effectRef idx="2">
+            <a:schemeClr val="accent1"/>
+          </a:effectRef>
+          <a:fontRef idx="minor">
+            <a:schemeClr val="lt1"/>
+          </a:fontRef>
+        </p:style>
+        <p:txBody>
+          <a:bodyPr rtlCol="0" anchor="ctr"/>
+          <a:lstStyle/>
+          <a:p/>
+        </p:txBody>
+      </p:sp>
+      <p:sp>
+        <p:nvSpPr>
+          <p:cNvPr id="8" name="Oval 7"/>
+          <p:cNvSpPr/>
+          <p:nvPr/>
+        </p:nvSpPr>
+        <p:spPr>
+          <a:xfrm>
+            <a:off x="8046720" y="1828800"/>
+            <a:ext cx="548640" cy="548640"/>
+          </a:xfrm>
+          <a:prstGeom prst="ellipse">
+            <a:avLst/>
+          </a:prstGeom>
+          <a:solidFill>
+            <a:srgbClr val="F2B705"/>
+          </a:solidFill>
+          <a:ln>
+            <a:noFill/>
+          </a:ln>
+          <a:effectLst/>
+        </p:spPr>
+        <p:style>
+          <a:lnRef idx="1">
+            <a:schemeClr val="accent1"/>
+          </a:lnRef>
+          <a:fillRef idx="3">
+            <a:schemeClr val="accent1"/>
+          </a:fillRef>
+          <a:effectRef idx="2">
+            <a:schemeClr val="accent1"/>
+          </a:effectRef>
+          <a:fontRef idx="minor">
+            <a:schemeClr val="lt1"/>
+          </a:fontRef>
+        </p:style>
+        <p:txBody>
+          <a:bodyPr rtlCol="0" anchor="ctr" lIns="0" rIns="0" tIns="0" bIns="0"/>
+          <a:lstStyle/>
+          <a:p>
+            <a:pPr algn="ctr"/>
+            <a:r>
+              <a:rPr sz="1300" b="1">
+                <a:solidFill>
+                  <a:srgbClr val="202122"/>
+                </a:solidFill>
+                <a:latin typeface="Calibri"/>
+              </a:rPr>
+              <a:t>e.g.</a:t>
+            </a:r>
+          </a:p>
+        </p:txBody>
+      </p:sp>
+      <p:sp>
+        <p:nvSpPr>
+          <p:cNvPr id="9" name="TextBox 8"/>
+          <p:cNvSpPr txBox="1"/>
+          <p:nvPr/>
+        </p:nvSpPr>
+        <p:spPr>
+          <a:xfrm>
+            <a:off x="8046720" y="2560320"/>
+            <a:ext cx="3291840" cy="365760"/>
+          </a:xfrm>
+          <a:prstGeom prst="rect">
+            <a:avLst/>
+          </a:prstGeom>
+          <a:noFill/>
+        </p:spPr>
+        <p:txBody>
+          <a:bodyPr wrap="square" anchor="t" lIns="0" rIns="0" tIns="0" bIns="0"/>
+          <a:lstStyle/>
+          <a:p>
+            <a:pPr algn="l"/>
+            <a:r>
+              <a:rPr sz="1300" b="1" i="0">
+                <a:solidFill>
+                  <a:srgbClr val="A9C8F0"/>
+                </a:solidFill>
+                <a:latin typeface="Calibri"/>
+              </a:rPr>
+              <a:t>EXAMPLE</a:t>
+            </a:r>
+          </a:p>
+        </p:txBody>
+      </p:sp>
+      <p:sp>
+        <p:nvSpPr>
+          <p:cNvPr id="10" name="TextBox 9"/>
+          <p:cNvSpPr txBox="1"/>
+          <p:nvPr/>
+        </p:nvSpPr>
+        <p:spPr>
+          <a:xfrm>
+            <a:off x="8046720" y="2971800"/>
+            <a:ext cx="3291840" cy="2971800"/>
+          </a:xfrm>
+          <a:prstGeom prst="rect">
+            <a:avLst/>
+          </a:prstGeom>
+          <a:noFill/>
+        </p:spPr>
+        <p:txBody>
+          <a:bodyPr wrap="square" anchor="t" lIns="0" rIns="0" tIns="0" bIns="0"/>
+          <a:lstStyle/>
+          <a:p>
+            <a:pPr algn="l"/>
+            <a:r>
+              <a:rPr sz="1900" b="0" i="0">
+                <a:solidFill>
+                  <a:srgbClr val="FFFFFF"/>
+                </a:solidFill>
+                <a:latin typeface="Cambria"/>
+              </a:rPr>
+              <a:t>Cruise control set to 70 mph: going uphill the car slows, the sensor detects it, and the controller adds power.</a:t>
+            </a:r>
+          </a:p>
+        </p:txBody>
+      </p:sp>
+    </p:spTree>
+  </p:cSld>
+  <p:clrMapOvr>
+    <a:masterClrMapping/>
+  </p:clrMapOvr>
+</p:sld>
+</file>
+
+<file path=ppt/slides/slide7.xml><?xml version="1.0" encoding="utf-8"?>
+<p:sld xmlns:a="http://schemas.openxmlformats.org/drawingml/2006/main" xmlns:p="http://schemas.openxmlformats.org/presentationml/2006/main" xmlns:r="http://schemas.openxmlformats.org/officeDocument/2006/relationships">
+  <p:cSld>
+    <p:bg>
+      <p:bgPr>
+        <a:solidFill>
+          <a:srgbClr val="FFFFFF"/>
+        </a:solidFill>
+        <a:effectLst/>
+      </p:bgPr>
+    </p:bg>
+    <p:spTree>
+      <p:nvGrpSpPr>
+        <p:cNvPr id="1" name=""/>
+        <p:cNvGrpSpPr/>
+        <p:nvPr/>
+      </p:nvGrpSpPr>
+      <p:grpSpPr/>
+      <p:sp>
+        <p:nvSpPr>
+          <p:cNvPr id="2" name="TextBox 1"/>
+          <p:cNvSpPr txBox="1"/>
+          <p:nvPr/>
+        </p:nvSpPr>
+        <p:spPr>
+          <a:xfrm>
+            <a:off x="548640" y="320040"/>
+            <a:ext cx="11094415" cy="274320"/>
+          </a:xfrm>
+          <a:prstGeom prst="rect">
+            <a:avLst/>
+          </a:prstGeom>
+          <a:noFill/>
+        </p:spPr>
+        <p:txBody>
+          <a:bodyPr wrap="square" anchor="t" lIns="0" rIns="0" tIns="0" bIns="0"/>
+          <a:lstStyle/>
+          <a:p>
+            <a:pPr algn="l"/>
+            <a:r>
+              <a:rPr sz="1100" b="1" i="0">
+                <a:solidFill>
+                  <a:srgbClr val="54595D"/>
+                </a:solidFill>
+                <a:latin typeface="Calibri"/>
+              </a:rPr>
+              <a:t>ENGINEERING CORE  ·  Core topic 10</a:t>
+            </a:r>
+          </a:p>
+        </p:txBody>
+      </p:sp>
+      <p:sp>
+        <p:nvSpPr>
+          <p:cNvPr id="3" name="TextBox 2"/>
+          <p:cNvSpPr txBox="1"/>
+          <p:nvPr/>
+        </p:nvSpPr>
+        <p:spPr>
+          <a:xfrm>
+            <a:off x="548640" y="566928"/>
+            <a:ext cx="11094415" cy="822960"/>
+          </a:xfrm>
+          <a:prstGeom prst="rect">
+            <a:avLst/>
+          </a:prstGeom>
+          <a:noFill/>
+        </p:spPr>
+        <p:txBody>
+          <a:bodyPr wrap="square" anchor="ctr" lIns="0" rIns="0" tIns="0" bIns="0"/>
+          <a:lstStyle/>
+          <a:p>
+            <a:pPr algn="l"/>
+            <a:r>
+              <a:rPr sz="3200" b="1" i="0">
+                <a:solidFill>
+                  <a:srgbClr val="03306E"/>
+                </a:solidFill>
+                <a:latin typeface="Cambria"/>
+              </a:rPr>
+              <a:t>Open and closed loop</a:t>
+            </a:r>
+          </a:p>
+        </p:txBody>
+      </p:sp>
+      <p:sp>
+        <p:nvSpPr>
+          <p:cNvPr id="4" name="TextBox 3"/>
+          <p:cNvSpPr txBox="1"/>
+          <p:nvPr/>
+        </p:nvSpPr>
+        <p:spPr>
+          <a:xfrm>
+            <a:off x="548640" y="6446520"/>
+            <a:ext cx="8229600" cy="274320"/>
+          </a:xfrm>
+          <a:prstGeom prst="rect">
+            <a:avLst/>
+          </a:prstGeom>
+          <a:noFill/>
+        </p:spPr>
+        <p:txBody>
+          <a:bodyPr wrap="square" anchor="t" lIns="0" rIns="0" tIns="0" bIns="0"/>
+          <a:lstStyle/>
+          <a:p>
+            <a:pPr algn="l"/>
+            <a:r>
+              <a:rPr sz="1000" b="0" i="0">
+                <a:solidFill>
+                  <a:srgbClr val="54595D"/>
+                </a:solidFill>
+                <a:latin typeface="Calibri"/>
+              </a:rPr>
+              <a:t>Design and Development for Engineering and Manufacturing T Level  ·  Control Systems, Sensors and Actuators</a:t>
+            </a:r>
+          </a:p>
+        </p:txBody>
+      </p:sp>
+      <p:sp>
+        <p:nvSpPr>
+          <p:cNvPr id="5" name="TextBox 4"/>
+          <p:cNvSpPr txBox="1"/>
+          <p:nvPr/>
+        </p:nvSpPr>
+        <p:spPr>
+          <a:xfrm>
+            <a:off x="10728655" y="6446520"/>
+            <a:ext cx="914400" cy="274320"/>
+          </a:xfrm>
+          <a:prstGeom prst="rect">
+            <a:avLst/>
+          </a:prstGeom>
+          <a:noFill/>
+        </p:spPr>
+        <p:txBody>
+          <a:bodyPr wrap="square" anchor="t" lIns="0" rIns="0" tIns="0" bIns="0"/>
+          <a:lstStyle/>
+          <a:p>
+            <a:pPr algn="r"/>
+            <a:r>
+              <a:rPr sz="1000" b="0" i="0">
+                <a:solidFill>
+                  <a:srgbClr val="54595D"/>
+                </a:solidFill>
+                <a:latin typeface="Calibri"/>
+              </a:rPr>
+              <a:t>7</a:t>
+            </a:r>
+          </a:p>
+        </p:txBody>
+      </p:sp>
+      <p:sp>
+        <p:nvSpPr>
+          <p:cNvPr id="6" name="Rounded Rectangle 5"/>
+          <p:cNvSpPr/>
+          <p:nvPr/>
+        </p:nvSpPr>
+        <p:spPr>
+          <a:xfrm>
+            <a:off x="548640" y="1600200"/>
+            <a:ext cx="5364327" cy="640080"/>
+          </a:xfrm>
+          <a:prstGeom prst="roundRect">
+            <a:avLst>
+              <a:gd name="adj" fmla="val 15000"/>
+            </a:avLst>
+          </a:prstGeom>
+          <a:solidFill>
+            <a:srgbClr val="03306E"/>
+          </a:solidFill>
+          <a:ln>
+            <a:noFill/>
+          </a:ln>
+          <a:effectLst/>
+        </p:spPr>
+        <p:style>
+          <a:lnRef idx="1">
+            <a:schemeClr val="accent1"/>
+          </a:lnRef>
+          <a:fillRef idx="3">
+            <a:schemeClr val="accent1"/>
+          </a:fillRef>
+          <a:effectRef idx="2">
+            <a:schemeClr val="accent1"/>
+          </a:effectRef>
+          <a:fontRef idx="minor">
+            <a:schemeClr val="lt1"/>
+          </a:fontRef>
+        </p:style>
+        <p:txBody>
+          <a:bodyPr rtlCol="0" anchor="ctr"/>
+          <a:lstStyle/>
+          <a:p/>
+        </p:txBody>
+      </p:sp>
+      <p:sp>
+        <p:nvSpPr>
+          <p:cNvPr id="7" name="TextBox 6"/>
+          <p:cNvSpPr txBox="1"/>
+          <p:nvPr/>
+        </p:nvSpPr>
+        <p:spPr>
+          <a:xfrm>
+            <a:off x="777240" y="1600200"/>
+            <a:ext cx="4907127" cy="640080"/>
+          </a:xfrm>
+          <a:prstGeom prst="rect">
+            <a:avLst/>
+          </a:prstGeom>
+          <a:noFill/>
+        </p:spPr>
+        <p:txBody>
+          <a:bodyPr wrap="square" anchor="ctr" lIns="0" rIns="0" tIns="0" bIns="0"/>
+          <a:lstStyle/>
+          <a:p>
+            <a:pPr algn="l"/>
+            <a:r>
+              <a:rPr sz="2000" b="1" i="0">
+                <a:solidFill>
+                  <a:srgbClr val="FFFFFF"/>
+                </a:solidFill>
+                <a:latin typeface="Calibri"/>
+              </a:rPr>
+              <a:t>Open loop</a:t>
+            </a:r>
+          </a:p>
+        </p:txBody>
+      </p:sp>
+      <p:sp>
+        <p:nvSpPr>
+          <p:cNvPr id="8" name="Rounded Rectangle 7"/>
+          <p:cNvSpPr/>
+          <p:nvPr/>
+        </p:nvSpPr>
+        <p:spPr>
+          <a:xfrm>
+            <a:off x="548640" y="2377440"/>
+            <a:ext cx="5364327" cy="3794760"/>
+          </a:xfrm>
+          <a:prstGeom prst="roundRect">
+            <a:avLst>
+              <a:gd name="adj" fmla="val 4000"/>
+            </a:avLst>
+          </a:prstGeom>
+          <a:solidFill>
+            <a:srgbClr val="EAF3FF"/>
+          </a:solidFill>
+          <a:ln>
+            <a:noFill/>
+          </a:ln>
+          <a:effectLst/>
+        </p:spPr>
+        <p:style>
+          <a:lnRef idx="1">
+            <a:schemeClr val="accent1"/>
+          </a:lnRef>
+          <a:fillRef idx="3">
+            <a:schemeClr val="accent1"/>
+          </a:fillRef>
+          <a:effectRef idx="2">
+            <a:schemeClr val="accent1"/>
+          </a:effectRef>
+          <a:fontRef idx="minor">
+            <a:schemeClr val="lt1"/>
+          </a:fontRef>
+        </p:style>
+        <p:txBody>
+          <a:bodyPr rtlCol="0" anchor="ctr"/>
+          <a:lstStyle/>
+          <a:p/>
+        </p:txBody>
+      </p:sp>
+      <p:sp>
+        <p:nvSpPr>
+          <p:cNvPr id="9" name="TextBox 8"/>
+          <p:cNvSpPr txBox="1"/>
+          <p:nvPr/>
+        </p:nvSpPr>
+        <p:spPr>
+          <a:xfrm>
+            <a:off x="822959" y="2606040"/>
+            <a:ext cx="4815687" cy="3337560"/>
+          </a:xfrm>
+          <a:prstGeom prst="rect">
+            <a:avLst/>
+          </a:prstGeom>
+          <a:noFill/>
+        </p:spPr>
+        <p:txBody>
+          <a:bodyPr wrap="square" lIns="0" rIns="0" tIns="0" bIns="0">
+            <a:spAutoFit/>
+          </a:bodyPr>
+          <a:lstStyle/>
+          <a:p>
+            <a:pPr marL="274320" indent="-274320">
+              <a:spcAft>
+                <a:spcPts val="990"/>
+              </a:spcAft>
+              <a:buClr>
+                <a:srgbClr val="0645AD"/>
+              </a:buClr>
+              <a:buFont typeface="Arial"/>
+              <a:buChar char="•"/>
+            </a:pPr>
+            <a:r>
+              <a:rPr sz="2200" b="0">
+                <a:solidFill>
+                  <a:srgbClr val="202122"/>
+                </a:solidFill>
+                <a:latin typeface="Calibri"/>
+              </a:rPr>
+              <a:t>No feedback</a:t>
+            </a:r>
+          </a:p>
+          <a:p>
+            <a:pPr marL="274320" indent="-274320">
+              <a:spcAft>
+                <a:spcPts val="990"/>
+              </a:spcAft>
+              <a:buClr>
+                <a:srgbClr val="0645AD"/>
+              </a:buClr>
+              <a:buFont typeface="Arial"/>
+              <a:buChar char="•"/>
+            </a:pPr>
+            <a:r>
+              <a:rPr sz="2200" b="0">
+                <a:solidFill>
+                  <a:srgbClr val="202122"/>
+                </a:solidFill>
+                <a:latin typeface="Calibri"/>
+              </a:rPr>
+              <a:t>Simple and cheap</a:t>
+            </a:r>
+          </a:p>
+          <a:p>
+            <a:pPr marL="274320" indent="-274320">
+              <a:spcAft>
+                <a:spcPts val="990"/>
+              </a:spcAft>
+              <a:buClr>
+                <a:srgbClr val="0645AD"/>
+              </a:buClr>
+              <a:buFont typeface="Arial"/>
+              <a:buChar char="•"/>
+            </a:pPr>
+            <a:r>
+              <a:rPr sz="2200" b="0">
+                <a:solidFill>
+                  <a:srgbClr val="202122"/>
+                </a:solidFill>
+                <a:latin typeface="Calibri"/>
+              </a:rPr>
+              <a:t>Cannot correct errors</a:t>
+            </a:r>
+          </a:p>
+          <a:p>
+            <a:pPr marL="274320" indent="-274320">
+              <a:spcAft>
+                <a:spcPts val="990"/>
+              </a:spcAft>
+              <a:buClr>
+                <a:srgbClr val="0645AD"/>
+              </a:buClr>
+              <a:buFont typeface="Arial"/>
+              <a:buChar char="•"/>
+            </a:pPr>
+            <a:r>
+              <a:rPr sz="2200" b="0">
+                <a:solidFill>
+                  <a:srgbClr val="202122"/>
+                </a:solidFill>
+                <a:latin typeface="Calibri"/>
+              </a:rPr>
+              <a:t>e.g. a toaster on a timer</a:t>
+            </a:r>
+          </a:p>
+        </p:txBody>
+      </p:sp>
+      <p:sp>
+        <p:nvSpPr>
+          <p:cNvPr id="10" name="Rounded Rectangle 9"/>
+          <p:cNvSpPr/>
+          <p:nvPr/>
+        </p:nvSpPr>
+        <p:spPr>
+          <a:xfrm>
+            <a:off x="6278727" y="1600200"/>
+            <a:ext cx="5364327" cy="640080"/>
+          </a:xfrm>
+          <a:prstGeom prst="roundRect">
+            <a:avLst>
+              <a:gd name="adj" fmla="val 15000"/>
+            </a:avLst>
+          </a:prstGeom>
+          <a:solidFill>
+            <a:srgbClr val="0645AD"/>
+          </a:solidFill>
+          <a:ln>
+            <a:noFill/>
+          </a:ln>
+          <a:effectLst/>
+        </p:spPr>
+        <p:style>
+          <a:lnRef idx="1">
+            <a:schemeClr val="accent1"/>
+          </a:lnRef>
+          <a:fillRef idx="3">
+            <a:schemeClr val="accent1"/>
+          </a:fillRef>
+          <a:effectRef idx="2">
+            <a:schemeClr val="accent1"/>
+          </a:effectRef>
+          <a:fontRef idx="minor">
+            <a:schemeClr val="lt1"/>
+          </a:fontRef>
+        </p:style>
+        <p:txBody>
+          <a:bodyPr rtlCol="0" anchor="ctr"/>
+          <a:lstStyle/>
+          <a:p/>
+        </p:txBody>
+      </p:sp>
+      <p:sp>
+        <p:nvSpPr>
+          <p:cNvPr id="11" name="TextBox 10"/>
+          <p:cNvSpPr txBox="1"/>
+          <p:nvPr/>
+        </p:nvSpPr>
+        <p:spPr>
+          <a:xfrm>
+            <a:off x="6507327" y="1600200"/>
+            <a:ext cx="4907127" cy="640080"/>
+          </a:xfrm>
+          <a:prstGeom prst="rect">
+            <a:avLst/>
+          </a:prstGeom>
+          <a:noFill/>
+        </p:spPr>
+        <p:txBody>
+          <a:bodyPr wrap="square" anchor="ctr" lIns="0" rIns="0" tIns="0" bIns="0"/>
+          <a:lstStyle/>
+          <a:p>
+            <a:pPr algn="l"/>
+            <a:r>
+              <a:rPr sz="2000" b="1" i="0">
+                <a:solidFill>
+                  <a:srgbClr val="FFFFFF"/>
+                </a:solidFill>
+                <a:latin typeface="Calibri"/>
+              </a:rPr>
+              <a:t>Closed loop</a:t>
+            </a:r>
+          </a:p>
+        </p:txBody>
+      </p:sp>
+      <p:sp>
+        <p:nvSpPr>
+          <p:cNvPr id="12" name="Rounded Rectangle 11"/>
+          <p:cNvSpPr/>
+          <p:nvPr/>
+        </p:nvSpPr>
+        <p:spPr>
+          <a:xfrm>
+            <a:off x="6278727" y="2377440"/>
+            <a:ext cx="5364327" cy="3794760"/>
+          </a:xfrm>
+          <a:prstGeom prst="roundRect">
+            <a:avLst>
+              <a:gd name="adj" fmla="val 4000"/>
+            </a:avLst>
+          </a:prstGeom>
+          <a:solidFill>
+            <a:srgbClr val="EAF3FF"/>
+          </a:solidFill>
+          <a:ln>
+            <a:noFill/>
+          </a:ln>
+          <a:effectLst/>
+        </p:spPr>
+        <p:style>
+          <a:lnRef idx="1">
+            <a:schemeClr val="accent1"/>
+          </a:lnRef>
+          <a:fillRef idx="3">
+            <a:schemeClr val="accent1"/>
+          </a:fillRef>
+          <a:effectRef idx="2">
+            <a:schemeClr val="accent1"/>
+          </a:effectRef>
+          <a:fontRef idx="minor">
+            <a:schemeClr val="lt1"/>
+          </a:fontRef>
+        </p:style>
+        <p:txBody>
+          <a:bodyPr rtlCol="0" anchor="ctr"/>
+          <a:lstStyle/>
+          <a:p/>
+        </p:txBody>
+      </p:sp>
+      <p:sp>
+        <p:nvSpPr>
+          <p:cNvPr id="13" name="TextBox 12"/>
+          <p:cNvSpPr txBox="1"/>
+          <p:nvPr/>
+        </p:nvSpPr>
+        <p:spPr>
+          <a:xfrm>
+            <a:off x="6553047" y="2606040"/>
+            <a:ext cx="4815687" cy="3337560"/>
+          </a:xfrm>
+          <a:prstGeom prst="rect">
+            <a:avLst/>
+          </a:prstGeom>
+          <a:noFill/>
+        </p:spPr>
+        <p:txBody>
+          <a:bodyPr wrap="square" lIns="0" rIns="0" tIns="0" bIns="0">
+            <a:spAutoFit/>
+          </a:bodyPr>
+          <a:lstStyle/>
+          <a:p>
+            <a:pPr marL="274320" indent="-274320">
+              <a:spcAft>
+                <a:spcPts val="990"/>
+              </a:spcAft>
+              <a:buClr>
+                <a:srgbClr val="0645AD"/>
+              </a:buClr>
+              <a:buFont typeface="Arial"/>
+              <a:buChar char="•"/>
+            </a:pPr>
+            <a:r>
+              <a:rPr sz="2200" b="0">
+                <a:solidFill>
+                  <a:srgbClr val="202122"/>
+                </a:solidFill>
+                <a:latin typeface="Calibri"/>
+              </a:rPr>
+              <a:t>Feedback via a summing point compares output to the set point</a:t>
+            </a:r>
+          </a:p>
+          <a:p>
+            <a:pPr marL="274320" indent="-274320">
+              <a:spcAft>
+                <a:spcPts val="990"/>
+              </a:spcAft>
+              <a:buClr>
+                <a:srgbClr val="0645AD"/>
+              </a:buClr>
+              <a:buFont typeface="Arial"/>
+              <a:buChar char="•"/>
+            </a:pPr>
+            <a:r>
+              <a:rPr sz="2200" b="0">
+                <a:solidFill>
+                  <a:srgbClr val="202122"/>
+                </a:solidFill>
+                <a:latin typeface="Calibri"/>
+              </a:rPr>
+              <a:t>Corrects errors automatically</a:t>
+            </a:r>
+          </a:p>
+          <a:p>
+            <a:pPr marL="274320" indent="-274320">
+              <a:spcAft>
+                <a:spcPts val="990"/>
+              </a:spcAft>
+              <a:buClr>
+                <a:srgbClr val="0645AD"/>
+              </a:buClr>
+              <a:buFont typeface="Arial"/>
+              <a:buChar char="•"/>
+            </a:pPr>
+            <a:r>
+              <a:rPr sz="2200" b="0">
+                <a:solidFill>
+                  <a:srgbClr val="202122"/>
+                </a:solidFill>
+                <a:latin typeface="Calibri"/>
+              </a:rPr>
+              <a:t>Can overshoot (under-damped) or be slow (over-damped)</a:t>
+            </a:r>
+          </a:p>
+          <a:p>
+            <a:pPr marL="274320" indent="-274320">
+              <a:spcAft>
+                <a:spcPts val="990"/>
+              </a:spcAft>
+              <a:buClr>
+                <a:srgbClr val="0645AD"/>
+              </a:buClr>
+              <a:buFont typeface="Arial"/>
+              <a:buChar char="•"/>
+            </a:pPr>
+            <a:r>
+              <a:rPr sz="2200" b="0">
+                <a:solidFill>
+                  <a:srgbClr val="202122"/>
+                </a:solidFill>
+                <a:latin typeface="Calibri"/>
+              </a:rPr>
+              <a:t>e.g. an oven thermostat, cruise control</a:t>
+            </a:r>
+          </a:p>
+        </p:txBody>
+      </p:sp>
+    </p:spTree>
+  </p:cSld>
+  <p:clrMapOvr>
+    <a:masterClrMapping/>
+  </p:clrMapOvr>
+</p:sld>
+</file>
+
+<file path=ppt/slides/slide8.xml><?xml version="1.0" encoding="utf-8"?>
+<p:sld xmlns:a="http://schemas.openxmlformats.org/drawingml/2006/main" xmlns:p="http://schemas.openxmlformats.org/presentationml/2006/main" xmlns:r="http://schemas.openxmlformats.org/officeDocument/2006/relationships">
+  <p:cSld>
+    <p:bg>
+      <p:bgPr>
+        <a:solidFill>
+          <a:srgbClr val="FFFFFF"/>
+        </a:solidFill>
+        <a:effectLst/>
+      </p:bgPr>
+    </p:bg>
+    <p:spTree>
+      <p:nvGrpSpPr>
+        <p:cNvPr id="1" name=""/>
+        <p:cNvGrpSpPr/>
+        <p:nvPr/>
+      </p:nvGrpSpPr>
+      <p:grpSpPr/>
+      <p:sp>
+        <p:nvSpPr>
+          <p:cNvPr id="2" name="TextBox 1"/>
+          <p:cNvSpPr txBox="1"/>
+          <p:nvPr/>
+        </p:nvSpPr>
+        <p:spPr>
+          <a:xfrm>
+            <a:off x="548640" y="320040"/>
+            <a:ext cx="11094415" cy="274320"/>
+          </a:xfrm>
+          <a:prstGeom prst="rect">
+            <a:avLst/>
+          </a:prstGeom>
+          <a:noFill/>
+        </p:spPr>
+        <p:txBody>
+          <a:bodyPr wrap="square" anchor="t" lIns="0" rIns="0" tIns="0" bIns="0"/>
+          <a:lstStyle/>
+          <a:p>
+            <a:pPr algn="l"/>
+            <a:r>
+              <a:rPr sz="1100" b="1" i="0">
+                <a:solidFill>
+                  <a:srgbClr val="54595D"/>
+                </a:solidFill>
+                <a:latin typeface="Calibri"/>
+              </a:rPr>
+              <a:t>ENGINEERING CORE  ·  Core topic 10</a:t>
+            </a:r>
+          </a:p>
+        </p:txBody>
+      </p:sp>
+      <p:sp>
+        <p:nvSpPr>
+          <p:cNvPr id="3" name="TextBox 2"/>
+          <p:cNvSpPr txBox="1"/>
+          <p:nvPr/>
+        </p:nvSpPr>
+        <p:spPr>
+          <a:xfrm>
+            <a:off x="548640" y="566928"/>
+            <a:ext cx="11094415" cy="822960"/>
+          </a:xfrm>
+          <a:prstGeom prst="rect">
+            <a:avLst/>
+          </a:prstGeom>
+          <a:noFill/>
+        </p:spPr>
+        <p:txBody>
+          <a:bodyPr wrap="square" anchor="ctr" lIns="0" rIns="0" tIns="0" bIns="0"/>
+          <a:lstStyle/>
+          <a:p>
+            <a:pPr algn="l"/>
+            <a:r>
+              <a:rPr sz="3200" b="1" i="0">
+                <a:solidFill>
+                  <a:srgbClr val="03306E"/>
+                </a:solidFill>
+                <a:latin typeface="Cambria"/>
+              </a:rPr>
+              <a:t>Quick check: Open and closed loop</a:t>
+            </a:r>
+          </a:p>
+        </p:txBody>
+      </p:sp>
+      <p:sp>
+        <p:nvSpPr>
+          <p:cNvPr id="4" name="TextBox 3"/>
+          <p:cNvSpPr txBox="1"/>
+          <p:nvPr/>
+        </p:nvSpPr>
+        <p:spPr>
+          <a:xfrm>
+            <a:off x="548640" y="6446520"/>
+            <a:ext cx="8229600" cy="274320"/>
+          </a:xfrm>
+          <a:prstGeom prst="rect">
+            <a:avLst/>
+          </a:prstGeom>
+          <a:noFill/>
+        </p:spPr>
+        <p:txBody>
+          <a:bodyPr wrap="square" anchor="t" lIns="0" rIns="0" tIns="0" bIns="0"/>
+          <a:lstStyle/>
+          <a:p>
+            <a:pPr algn="l"/>
+            <a:r>
+              <a:rPr sz="1000" b="0" i="0">
+                <a:solidFill>
+                  <a:srgbClr val="54595D"/>
+                </a:solidFill>
+                <a:latin typeface="Calibri"/>
+              </a:rPr>
+              <a:t>Design and Development for Engineering and Manufacturing T Level  ·  Control Systems, Sensors and Actuators</a:t>
+            </a:r>
+          </a:p>
+        </p:txBody>
+      </p:sp>
+      <p:sp>
+        <p:nvSpPr>
+          <p:cNvPr id="5" name="TextBox 4"/>
+          <p:cNvSpPr txBox="1"/>
+          <p:nvPr/>
+        </p:nvSpPr>
+        <p:spPr>
+          <a:xfrm>
+            <a:off x="10728655" y="6446520"/>
+            <a:ext cx="914400" cy="274320"/>
+          </a:xfrm>
+          <a:prstGeom prst="rect">
+            <a:avLst/>
+          </a:prstGeom>
+          <a:noFill/>
+        </p:spPr>
+        <p:txBody>
+          <a:bodyPr wrap="square" anchor="t" lIns="0" rIns="0" tIns="0" bIns="0"/>
+          <a:lstStyle/>
+          <a:p>
+            <a:pPr algn="r"/>
+            <a:r>
+              <a:rPr sz="1000" b="0" i="0">
+                <a:solidFill>
+                  <a:srgbClr val="54595D"/>
+                </a:solidFill>
+                <a:latin typeface="Calibri"/>
+              </a:rPr>
+              <a:t>8</a:t>
+            </a:r>
+          </a:p>
+        </p:txBody>
+      </p:sp>
+      <p:sp>
+        <p:nvSpPr>
+          <p:cNvPr id="6" name="Oval 5"/>
+          <p:cNvSpPr/>
+          <p:nvPr/>
+        </p:nvSpPr>
+        <p:spPr>
+          <a:xfrm>
+            <a:off x="548640" y="1691640"/>
+            <a:ext cx="502920" cy="502920"/>
+          </a:xfrm>
+          <a:prstGeom prst="ellipse">
+            <a:avLst/>
+          </a:prstGeom>
+          <a:solidFill>
+            <a:srgbClr val="F2B705"/>
+          </a:solidFill>
+          <a:ln>
+            <a:noFill/>
+          </a:ln>
+          <a:effectLst/>
+        </p:spPr>
+        <p:style>
+          <a:lnRef idx="1">
+            <a:schemeClr val="accent1"/>
+          </a:lnRef>
+          <a:fillRef idx="3">
+            <a:schemeClr val="accent1"/>
+          </a:fillRef>
+          <a:effectRef idx="2">
+            <a:schemeClr val="accent1"/>
+          </a:effectRef>
+          <a:fontRef idx="minor">
+            <a:schemeClr val="lt1"/>
+          </a:fontRef>
+        </p:style>
+        <p:txBody>
+          <a:bodyPr rtlCol="0" anchor="ctr" lIns="0" rIns="0" tIns="0" bIns="0"/>
+          <a:lstStyle/>
+          <a:p>
+            <a:pPr algn="ctr"/>
+            <a:r>
+              <a:rPr sz="1600" b="1">
+                <a:solidFill>
+                  <a:srgbClr val="202122"/>
+                </a:solidFill>
+                <a:latin typeface="Calibri"/>
+              </a:rPr>
+              <a:t>1</a:t>
+            </a:r>
+          </a:p>
+        </p:txBody>
+      </p:sp>
+      <p:sp>
+        <p:nvSpPr>
+          <p:cNvPr id="7" name="TextBox 6"/>
+          <p:cNvSpPr txBox="1"/>
+          <p:nvPr/>
+        </p:nvSpPr>
+        <p:spPr>
+          <a:xfrm>
+            <a:off x="1371600" y="1645920"/>
+            <a:ext cx="10271455" cy="1188720"/>
+          </a:xfrm>
+          <a:prstGeom prst="rect">
+            <a:avLst/>
+          </a:prstGeom>
+          <a:noFill/>
+        </p:spPr>
+        <p:txBody>
+          <a:bodyPr wrap="square" anchor="t" lIns="0" rIns="0" tIns="0" bIns="0"/>
+          <a:lstStyle/>
+          <a:p>
+            <a:pPr algn="l"/>
+            <a:r>
+              <a:rPr sz="2400" b="0" i="0">
+                <a:solidFill>
+                  <a:srgbClr val="202122"/>
+                </a:solidFill>
+                <a:latin typeface="Calibri"/>
+              </a:rPr>
+              <a:t>What does an open loop system lack?</a:t>
+            </a:r>
+          </a:p>
+        </p:txBody>
+      </p:sp>
+      <p:sp>
+        <p:nvSpPr>
+          <p:cNvPr id="8" name="Oval 7"/>
+          <p:cNvSpPr/>
+          <p:nvPr/>
+        </p:nvSpPr>
+        <p:spPr>
+          <a:xfrm>
+            <a:off x="548640" y="3108960"/>
+            <a:ext cx="502920" cy="502920"/>
+          </a:xfrm>
+          <a:prstGeom prst="ellipse">
+            <a:avLst/>
+          </a:prstGeom>
+          <a:solidFill>
+            <a:srgbClr val="F2B705"/>
+          </a:solidFill>
+          <a:ln>
+            <a:noFill/>
+          </a:ln>
+          <a:effectLst/>
+        </p:spPr>
+        <p:style>
+          <a:lnRef idx="1">
+            <a:schemeClr val="accent1"/>
+          </a:lnRef>
+          <a:fillRef idx="3">
+            <a:schemeClr val="accent1"/>
+          </a:fillRef>
+          <a:effectRef idx="2">
+            <a:schemeClr val="accent1"/>
+          </a:effectRef>
+          <a:fontRef idx="minor">
+            <a:schemeClr val="lt1"/>
+          </a:fontRef>
+        </p:style>
+        <p:txBody>
+          <a:bodyPr rtlCol="0" anchor="ctr" lIns="0" rIns="0" tIns="0" bIns="0"/>
+          <a:lstStyle/>
+          <a:p>
+            <a:pPr algn="ctr"/>
+            <a:r>
+              <a:rPr sz="1600" b="1">
+                <a:solidFill>
+                  <a:srgbClr val="202122"/>
+                </a:solidFill>
+                <a:latin typeface="Calibri"/>
+              </a:rPr>
+              <a:t>2</a:t>
+            </a:r>
+          </a:p>
+        </p:txBody>
+      </p:sp>
+      <p:sp>
+        <p:nvSpPr>
+          <p:cNvPr id="9" name="TextBox 8"/>
+          <p:cNvSpPr txBox="1"/>
+          <p:nvPr/>
+        </p:nvSpPr>
+        <p:spPr>
+          <a:xfrm>
+            <a:off x="1371600" y="3063240"/>
+            <a:ext cx="10271455" cy="1188720"/>
+          </a:xfrm>
+          <a:prstGeom prst="rect">
+            <a:avLst/>
+          </a:prstGeom>
+          <a:noFill/>
+        </p:spPr>
+        <p:txBody>
+          <a:bodyPr wrap="square" anchor="t" lIns="0" rIns="0" tIns="0" bIns="0"/>
+          <a:lstStyle/>
+          <a:p>
+            <a:pPr algn="l"/>
+            <a:r>
+              <a:rPr sz="2400" b="0" i="0">
+                <a:solidFill>
+                  <a:srgbClr val="202122"/>
+                </a:solidFill>
+                <a:latin typeface="Calibri"/>
+              </a:rPr>
+              <a:t>What is an under-damped system?</a:t>
+            </a:r>
+          </a:p>
+        </p:txBody>
+      </p:sp>
+      <p:sp>
+        <p:nvSpPr>
+          <p:cNvPr id="10" name="Oval 9"/>
+          <p:cNvSpPr/>
+          <p:nvPr/>
+        </p:nvSpPr>
+        <p:spPr>
+          <a:xfrm>
+            <a:off x="548640" y="4526280"/>
+            <a:ext cx="502920" cy="502920"/>
+          </a:xfrm>
+          <a:prstGeom prst="ellipse">
+            <a:avLst/>
+          </a:prstGeom>
+          <a:solidFill>
+            <a:srgbClr val="F2B705"/>
+          </a:solidFill>
+          <a:ln>
+            <a:noFill/>
+          </a:ln>
+          <a:effectLst/>
+        </p:spPr>
+        <p:style>
+          <a:lnRef idx="1">
+            <a:schemeClr val="accent1"/>
+          </a:lnRef>
+          <a:fillRef idx="3">
+            <a:schemeClr val="accent1"/>
+          </a:fillRef>
+          <a:effectRef idx="2">
+            <a:schemeClr val="accent1"/>
+          </a:effectRef>
+          <a:fontRef idx="minor">
+            <a:schemeClr val="lt1"/>
+          </a:fontRef>
+        </p:style>
+        <p:txBody>
+          <a:bodyPr rtlCol="0" anchor="ctr" lIns="0" rIns="0" tIns="0" bIns="0"/>
+          <a:lstStyle/>
+          <a:p>
+            <a:pPr algn="ctr"/>
+            <a:r>
+              <a:rPr sz="1600" b="1">
+                <a:solidFill>
+                  <a:srgbClr val="202122"/>
+                </a:solidFill>
+                <a:latin typeface="Calibri"/>
+              </a:rPr>
+              <a:t>3</a:t>
+            </a:r>
+          </a:p>
+        </p:txBody>
+      </p:sp>
+      <p:sp>
+        <p:nvSpPr>
+          <p:cNvPr id="11" name="TextBox 10"/>
+          <p:cNvSpPr txBox="1"/>
+          <p:nvPr/>
+        </p:nvSpPr>
+        <p:spPr>
+          <a:xfrm>
+            <a:off x="1371600" y="4480560"/>
+            <a:ext cx="10271455" cy="1188720"/>
+          </a:xfrm>
+          <a:prstGeom prst="rect">
+            <a:avLst/>
+          </a:prstGeom>
+          <a:noFill/>
+        </p:spPr>
+        <p:txBody>
+          <a:bodyPr wrap="square" anchor="t" lIns="0" rIns="0" tIns="0" bIns="0"/>
+          <a:lstStyle/>
+          <a:p>
+            <a:pPr algn="l"/>
+            <a:r>
+              <a:rPr sz="2400" b="0" i="0">
+                <a:solidFill>
+                  <a:srgbClr val="202122"/>
+                </a:solidFill>
+                <a:latin typeface="Calibri"/>
+              </a:rPr>
+              <a:t>What is steady-state error?</a:t>
+            </a:r>
+          </a:p>
+        </p:txBody>
+      </p:sp>
+      <p:sp>
+        <p:nvSpPr>
+          <p:cNvPr id="12" name="TextBox 11"/>
+          <p:cNvSpPr txBox="1"/>
+          <p:nvPr/>
+        </p:nvSpPr>
+        <p:spPr>
+          <a:xfrm>
+            <a:off x="548640" y="5852160"/>
+            <a:ext cx="11094415" cy="365760"/>
+          </a:xfrm>
+          <a:prstGeom prst="rect">
+            <a:avLst/>
+          </a:prstGeom>
+          <a:noFill/>
+        </p:spPr>
+        <p:txBody>
+          <a:bodyPr wrap="square" anchor="t" lIns="0" rIns="0" tIns="0" bIns="0"/>
+          <a:lstStyle/>
+          <a:p>
+            <a:pPr algn="l"/>
+            <a:r>
+              <a:rPr sz="1300" b="0" i="1">
+                <a:solidFill>
+                  <a:srgbClr val="54595D"/>
+                </a:solidFill>
+                <a:latin typeface="Calibri"/>
+              </a:rPr>
+              <a:t>Answer on mini whiteboards or in your book. Answers are in the speaker notes.</a:t>
+            </a:r>
+          </a:p>
+        </p:txBody>
+      </p:sp>
+    </p:spTree>
+  </p:cSld>
+  <p:clrMapOvr>
+    <a:masterClrMapping/>
+  </p:clrMapOvr>
+</p:sld>
+</file>
+
+<file path=ppt/slides/slide9.xml><?xml version="1.0" encoding="utf-8"?>
+<p:sld xmlns:a="http://schemas.openxmlformats.org/drawingml/2006/main" xmlns:p="http://schemas.openxmlformats.org/presentationml/2006/main" xmlns:r="http://schemas.openxmlformats.org/officeDocument/2006/relationships">
+  <p:cSld>
+    <p:bg>
+      <p:bgPr>
+        <a:solidFill>
+          <a:srgbClr val="FFFFFF"/>
+        </a:solidFill>
+        <a:effectLst/>
+      </p:bgPr>
+    </p:bg>
+    <p:spTree>
+      <p:nvGrpSpPr>
+        <p:cNvPr id="1" name=""/>
+        <p:cNvGrpSpPr/>
+        <p:nvPr/>
+      </p:nvGrpSpPr>
+      <p:grpSpPr/>
+      <p:sp>
+        <p:nvSpPr>
+          <p:cNvPr id="2" name="TextBox 1"/>
+          <p:cNvSpPr txBox="1"/>
+          <p:nvPr/>
+        </p:nvSpPr>
+        <p:spPr>
+          <a:xfrm>
+            <a:off x="548640" y="320040"/>
+            <a:ext cx="11094415" cy="274320"/>
+          </a:xfrm>
+          <a:prstGeom prst="rect">
+            <a:avLst/>
+          </a:prstGeom>
+          <a:noFill/>
+        </p:spPr>
+        <p:txBody>
+          <a:bodyPr wrap="square" anchor="t" lIns="0" rIns="0" tIns="0" bIns="0"/>
+          <a:lstStyle/>
+          <a:p>
+            <a:pPr algn="l"/>
+            <a:r>
+              <a:rPr sz="1100" b="1" i="0">
+                <a:solidFill>
+                  <a:srgbClr val="54595D"/>
+                </a:solidFill>
+                <a:latin typeface="Calibri"/>
+              </a:rPr>
+              <a:t>ENGINEERING CORE  ·  Core topic 10</a:t>
+            </a:r>
+          </a:p>
+        </p:txBody>
+      </p:sp>
+      <p:sp>
+        <p:nvSpPr>
+          <p:cNvPr id="3" name="TextBox 2"/>
+          <p:cNvSpPr txBox="1"/>
+          <p:nvPr/>
+        </p:nvSpPr>
+        <p:spPr>
+          <a:xfrm>
+            <a:off x="548640" y="566928"/>
+            <a:ext cx="11094415" cy="822960"/>
+          </a:xfrm>
+          <a:prstGeom prst="rect">
+            <a:avLst/>
+          </a:prstGeom>
+          <a:noFill/>
+        </p:spPr>
+        <p:txBody>
+          <a:bodyPr wrap="square" anchor="ctr" lIns="0" rIns="0" tIns="0" bIns="0"/>
+          <a:lstStyle/>
+          <a:p>
+            <a:pPr algn="l"/>
+            <a:r>
+              <a:rPr sz="3200" b="1" i="0">
+                <a:solidFill>
+                  <a:srgbClr val="03306E"/>
+                </a:solidFill>
+                <a:latin typeface="Cambria"/>
+              </a:rPr>
+              <a:t>Signals and modulation</a:t>
+            </a:r>
+          </a:p>
+        </p:txBody>
+      </p:sp>
+      <p:sp>
+        <p:nvSpPr>
+          <p:cNvPr id="4" name="TextBox 3"/>
+          <p:cNvSpPr txBox="1"/>
+          <p:nvPr/>
+        </p:nvSpPr>
+        <p:spPr>
+          <a:xfrm>
+            <a:off x="548640" y="6446520"/>
+            <a:ext cx="8229600" cy="274320"/>
+          </a:xfrm>
+          <a:prstGeom prst="rect">
+            <a:avLst/>
+          </a:prstGeom>
+          <a:noFill/>
+        </p:spPr>
+        <p:txBody>
+          <a:bodyPr wrap="square" anchor="t" lIns="0" rIns="0" tIns="0" bIns="0"/>
+          <a:lstStyle/>
+          <a:p>
+            <a:pPr algn="l"/>
+            <a:r>
+              <a:rPr sz="1000" b="0" i="0">
+                <a:solidFill>
+                  <a:srgbClr val="54595D"/>
+                </a:solidFill>
+                <a:latin typeface="Calibri"/>
+              </a:rPr>
+              <a:t>Design and Development for Engineering and Manufacturing T Level  ·  Control Systems, Sensors and Actuators</a:t>
+            </a:r>
+          </a:p>
+        </p:txBody>
+      </p:sp>
+      <p:sp>
+        <p:nvSpPr>
+          <p:cNvPr id="5" name="TextBox 4"/>
+          <p:cNvSpPr txBox="1"/>
+          <p:nvPr/>
+        </p:nvSpPr>
+        <p:spPr>
+          <a:xfrm>
+            <a:off x="10728655" y="6446520"/>
+            <a:ext cx="914400" cy="274320"/>
+          </a:xfrm>
+          <a:prstGeom prst="rect">
+            <a:avLst/>
+          </a:prstGeom>
+          <a:noFill/>
+        </p:spPr>
+        <p:txBody>
+          <a:bodyPr wrap="square" anchor="t" lIns="0" rIns="0" tIns="0" bIns="0"/>
+          <a:lstStyle/>
+          <a:p>
+            <a:pPr algn="r"/>
+            <a:r>
+              <a:rPr sz="1000" b="0" i="0">
+                <a:solidFill>
+                  <a:srgbClr val="54595D"/>
+                </a:solidFill>
+                <a:latin typeface="Calibri"/>
+              </a:rPr>
+              <a:t>9</a:t>
             </a:r>
           </a:p>
         </p:txBody>
@@ -7047,2639 +12480,6 @@
           </a:graphicData>
         </a:graphic>
       </p:graphicFrame>
-    </p:spTree>
-  </p:cSld>
-  <p:clrMapOvr>
-    <a:masterClrMapping/>
-  </p:clrMapOvr>
-</p:sld>
-</file>
-
-<file path=ppt/slides/slide6.xml><?xml version="1.0" encoding="utf-8"?>
-<p:sld xmlns:a="http://schemas.openxmlformats.org/drawingml/2006/main" xmlns:p="http://schemas.openxmlformats.org/presentationml/2006/main" xmlns:r="http://schemas.openxmlformats.org/officeDocument/2006/relationships">
-  <p:cSld>
-    <p:bg>
-      <p:bgPr>
-        <a:solidFill>
-          <a:srgbClr val="FFFFFF"/>
-        </a:solidFill>
-        <a:effectLst/>
-      </p:bgPr>
-    </p:bg>
-    <p:spTree>
-      <p:nvGrpSpPr>
-        <p:cNvPr id="1" name=""/>
-        <p:cNvGrpSpPr/>
-        <p:nvPr/>
-      </p:nvGrpSpPr>
-      <p:grpSpPr/>
-      <p:sp>
-        <p:nvSpPr>
-          <p:cNvPr id="2" name="TextBox 1"/>
-          <p:cNvSpPr txBox="1"/>
-          <p:nvPr/>
-        </p:nvSpPr>
-        <p:spPr>
-          <a:xfrm>
-            <a:off x="548640" y="320040"/>
-            <a:ext cx="11094415" cy="274320"/>
-          </a:xfrm>
-          <a:prstGeom prst="rect">
-            <a:avLst/>
-          </a:prstGeom>
-          <a:noFill/>
-        </p:spPr>
-        <p:txBody>
-          <a:bodyPr wrap="square" anchor="t" lIns="0" rIns="0" tIns="0" bIns="0"/>
-          <a:lstStyle/>
-          <a:p>
-            <a:pPr algn="l"/>
-            <a:r>
-              <a:rPr sz="1100" b="1" i="0">
-                <a:solidFill>
-                  <a:srgbClr val="54595D"/>
-                </a:solidFill>
-                <a:latin typeface="Calibri"/>
-              </a:rPr>
-              <a:t>ENGINEERING CORE  ·  Core topic 10</a:t>
-            </a:r>
-          </a:p>
-        </p:txBody>
-      </p:sp>
-      <p:sp>
-        <p:nvSpPr>
-          <p:cNvPr id="3" name="TextBox 2"/>
-          <p:cNvSpPr txBox="1"/>
-          <p:nvPr/>
-        </p:nvSpPr>
-        <p:spPr>
-          <a:xfrm>
-            <a:off x="548640" y="566928"/>
-            <a:ext cx="11094415" cy="822960"/>
-          </a:xfrm>
-          <a:prstGeom prst="rect">
-            <a:avLst/>
-          </a:prstGeom>
-          <a:noFill/>
-        </p:spPr>
-        <p:txBody>
-          <a:bodyPr wrap="square" anchor="ctr" lIns="0" rIns="0" tIns="0" bIns="0"/>
-          <a:lstStyle/>
-          <a:p>
-            <a:pPr algn="l"/>
-            <a:r>
-              <a:rPr sz="3200" b="1" i="0">
-                <a:solidFill>
-                  <a:srgbClr val="03306E"/>
-                </a:solidFill>
-                <a:latin typeface="Cambria"/>
-              </a:rPr>
-              <a:t>Sensors and actuators in automation</a:t>
-            </a:r>
-          </a:p>
-        </p:txBody>
-      </p:sp>
-      <p:sp>
-        <p:nvSpPr>
-          <p:cNvPr id="4" name="TextBox 3"/>
-          <p:cNvSpPr txBox="1"/>
-          <p:nvPr/>
-        </p:nvSpPr>
-        <p:spPr>
-          <a:xfrm>
-            <a:off x="548640" y="6446520"/>
-            <a:ext cx="8229600" cy="274320"/>
-          </a:xfrm>
-          <a:prstGeom prst="rect">
-            <a:avLst/>
-          </a:prstGeom>
-          <a:noFill/>
-        </p:spPr>
-        <p:txBody>
-          <a:bodyPr wrap="square" anchor="t" lIns="0" rIns="0" tIns="0" bIns="0"/>
-          <a:lstStyle/>
-          <a:p>
-            <a:pPr algn="l"/>
-            <a:r>
-              <a:rPr sz="1000" b="0" i="0">
-                <a:solidFill>
-                  <a:srgbClr val="54595D"/>
-                </a:solidFill>
-                <a:latin typeface="Calibri"/>
-              </a:rPr>
-              <a:t>Design and Development for Engineering and Manufacturing T Level  ·  Control Systems, Sensors and Actuators</a:t>
-            </a:r>
-          </a:p>
-        </p:txBody>
-      </p:sp>
-      <p:sp>
-        <p:nvSpPr>
-          <p:cNvPr id="5" name="TextBox 4"/>
-          <p:cNvSpPr txBox="1"/>
-          <p:nvPr/>
-        </p:nvSpPr>
-        <p:spPr>
-          <a:xfrm>
-            <a:off x="10728655" y="6446520"/>
-            <a:ext cx="914400" cy="274320"/>
-          </a:xfrm>
-          <a:prstGeom prst="rect">
-            <a:avLst/>
-          </a:prstGeom>
-          <a:noFill/>
-        </p:spPr>
-        <p:txBody>
-          <a:bodyPr wrap="square" anchor="t" lIns="0" rIns="0" tIns="0" bIns="0"/>
-          <a:lstStyle/>
-          <a:p>
-            <a:pPr algn="r"/>
-            <a:r>
-              <a:rPr sz="1000" b="0" i="0">
-                <a:solidFill>
-                  <a:srgbClr val="54595D"/>
-                </a:solidFill>
-                <a:latin typeface="Calibri"/>
-              </a:rPr>
-              <a:t>6</a:t>
-            </a:r>
-          </a:p>
-        </p:txBody>
-      </p:sp>
-      <p:sp>
-        <p:nvSpPr>
-          <p:cNvPr id="6" name="Rounded Rectangle 5"/>
-          <p:cNvSpPr/>
-          <p:nvPr/>
-        </p:nvSpPr>
-        <p:spPr>
-          <a:xfrm>
-            <a:off x="548640" y="1600200"/>
-            <a:ext cx="5410047" cy="2148840"/>
-          </a:xfrm>
-          <a:prstGeom prst="roundRect">
-            <a:avLst>
-              <a:gd name="adj" fmla="val 6000"/>
-            </a:avLst>
-          </a:prstGeom>
-          <a:solidFill>
-            <a:srgbClr val="EAF3FF"/>
-          </a:solidFill>
-          <a:ln>
-            <a:noFill/>
-          </a:ln>
-          <a:effectLst/>
-        </p:spPr>
-        <p:style>
-          <a:lnRef idx="1">
-            <a:schemeClr val="accent1"/>
-          </a:lnRef>
-          <a:fillRef idx="3">
-            <a:schemeClr val="accent1"/>
-          </a:fillRef>
-          <a:effectRef idx="2">
-            <a:schemeClr val="accent1"/>
-          </a:effectRef>
-          <a:fontRef idx="minor">
-            <a:schemeClr val="lt1"/>
-          </a:fontRef>
-        </p:style>
-        <p:txBody>
-          <a:bodyPr rtlCol="0" anchor="ctr"/>
-          <a:lstStyle/>
-          <a:p/>
-        </p:txBody>
-      </p:sp>
-      <p:sp>
-        <p:nvSpPr>
-          <p:cNvPr id="7" name="Oval 6"/>
-          <p:cNvSpPr/>
-          <p:nvPr/>
-        </p:nvSpPr>
-        <p:spPr>
-          <a:xfrm>
-            <a:off x="777240" y="1828800"/>
-            <a:ext cx="457200" cy="457200"/>
-          </a:xfrm>
-          <a:prstGeom prst="ellipse">
-            <a:avLst/>
-          </a:prstGeom>
-          <a:solidFill>
-            <a:srgbClr val="F2B705"/>
-          </a:solidFill>
-          <a:ln>
-            <a:noFill/>
-          </a:ln>
-          <a:effectLst/>
-        </p:spPr>
-        <p:style>
-          <a:lnRef idx="1">
-            <a:schemeClr val="accent1"/>
-          </a:lnRef>
-          <a:fillRef idx="3">
-            <a:schemeClr val="accent1"/>
-          </a:fillRef>
-          <a:effectRef idx="2">
-            <a:schemeClr val="accent1"/>
-          </a:effectRef>
-          <a:fontRef idx="minor">
-            <a:schemeClr val="lt1"/>
-          </a:fontRef>
-        </p:style>
-        <p:txBody>
-          <a:bodyPr rtlCol="0" anchor="ctr" lIns="0" rIns="0" tIns="0" bIns="0"/>
-          <a:lstStyle/>
-          <a:p>
-            <a:pPr algn="ctr"/>
-            <a:r>
-              <a:rPr sz="1500" b="1">
-                <a:solidFill>
-                  <a:srgbClr val="202122"/>
-                </a:solidFill>
-                <a:latin typeface="Calibri"/>
-              </a:rPr>
-              <a:t>1</a:t>
-            </a:r>
-          </a:p>
-        </p:txBody>
-      </p:sp>
-      <p:sp>
-        <p:nvSpPr>
-          <p:cNvPr id="8" name="TextBox 7"/>
-          <p:cNvSpPr txBox="1"/>
-          <p:nvPr/>
-        </p:nvSpPr>
-        <p:spPr>
-          <a:xfrm>
-            <a:off x="1371600" y="1801368"/>
-            <a:ext cx="4404207" cy="512064"/>
-          </a:xfrm>
-          <a:prstGeom prst="rect">
-            <a:avLst/>
-          </a:prstGeom>
-          <a:noFill/>
-        </p:spPr>
-        <p:txBody>
-          <a:bodyPr wrap="square" anchor="ctr" lIns="0" rIns="0" tIns="0" bIns="0"/>
-          <a:lstStyle/>
-          <a:p>
-            <a:pPr algn="l"/>
-            <a:r>
-              <a:rPr sz="1900" b="1" i="0">
-                <a:solidFill>
-                  <a:srgbClr val="03306E"/>
-                </a:solidFill>
-                <a:latin typeface="Calibri"/>
-              </a:rPr>
-              <a:t>Types</a:t>
-            </a:r>
-          </a:p>
-        </p:txBody>
-      </p:sp>
-      <p:sp>
-        <p:nvSpPr>
-          <p:cNvPr id="9" name="TextBox 8"/>
-          <p:cNvSpPr txBox="1"/>
-          <p:nvPr/>
-        </p:nvSpPr>
-        <p:spPr>
-          <a:xfrm>
-            <a:off x="777240" y="2468880"/>
-            <a:ext cx="4952847" cy="1143000"/>
-          </a:xfrm>
-          <a:prstGeom prst="rect">
-            <a:avLst/>
-          </a:prstGeom>
-          <a:noFill/>
-        </p:spPr>
-        <p:txBody>
-          <a:bodyPr wrap="square" anchor="t" lIns="0" rIns="0" tIns="0" bIns="0"/>
-          <a:lstStyle/>
-          <a:p>
-            <a:pPr algn="l"/>
-            <a:r>
-              <a:rPr sz="2000" b="0" i="0">
-                <a:solidFill>
-                  <a:srgbClr val="202122"/>
-                </a:solidFill>
-                <a:latin typeface="Calibri"/>
-              </a:rPr>
-              <a:t>Analogue or digital; active (needs power) or passive.</a:t>
-            </a:r>
-          </a:p>
-        </p:txBody>
-      </p:sp>
-      <p:sp>
-        <p:nvSpPr>
-          <p:cNvPr id="10" name="Rounded Rectangle 9"/>
-          <p:cNvSpPr/>
-          <p:nvPr/>
-        </p:nvSpPr>
-        <p:spPr>
-          <a:xfrm>
-            <a:off x="6233007" y="1600200"/>
-            <a:ext cx="5410047" cy="2148840"/>
-          </a:xfrm>
-          <a:prstGeom prst="roundRect">
-            <a:avLst>
-              <a:gd name="adj" fmla="val 6000"/>
-            </a:avLst>
-          </a:prstGeom>
-          <a:solidFill>
-            <a:srgbClr val="EAF3FF"/>
-          </a:solidFill>
-          <a:ln>
-            <a:noFill/>
-          </a:ln>
-          <a:effectLst/>
-        </p:spPr>
-        <p:style>
-          <a:lnRef idx="1">
-            <a:schemeClr val="accent1"/>
-          </a:lnRef>
-          <a:fillRef idx="3">
-            <a:schemeClr val="accent1"/>
-          </a:fillRef>
-          <a:effectRef idx="2">
-            <a:schemeClr val="accent1"/>
-          </a:effectRef>
-          <a:fontRef idx="minor">
-            <a:schemeClr val="lt1"/>
-          </a:fontRef>
-        </p:style>
-        <p:txBody>
-          <a:bodyPr rtlCol="0" anchor="ctr"/>
-          <a:lstStyle/>
-          <a:p/>
-        </p:txBody>
-      </p:sp>
-      <p:sp>
-        <p:nvSpPr>
-          <p:cNvPr id="11" name="Oval 10"/>
-          <p:cNvSpPr/>
-          <p:nvPr/>
-        </p:nvSpPr>
-        <p:spPr>
-          <a:xfrm>
-            <a:off x="6461607" y="1828800"/>
-            <a:ext cx="457200" cy="457200"/>
-          </a:xfrm>
-          <a:prstGeom prst="ellipse">
-            <a:avLst/>
-          </a:prstGeom>
-          <a:solidFill>
-            <a:srgbClr val="F2B705"/>
-          </a:solidFill>
-          <a:ln>
-            <a:noFill/>
-          </a:ln>
-          <a:effectLst/>
-        </p:spPr>
-        <p:style>
-          <a:lnRef idx="1">
-            <a:schemeClr val="accent1"/>
-          </a:lnRef>
-          <a:fillRef idx="3">
-            <a:schemeClr val="accent1"/>
-          </a:fillRef>
-          <a:effectRef idx="2">
-            <a:schemeClr val="accent1"/>
-          </a:effectRef>
-          <a:fontRef idx="minor">
-            <a:schemeClr val="lt1"/>
-          </a:fontRef>
-        </p:style>
-        <p:txBody>
-          <a:bodyPr rtlCol="0" anchor="ctr" lIns="0" rIns="0" tIns="0" bIns="0"/>
-          <a:lstStyle/>
-          <a:p>
-            <a:pPr algn="ctr"/>
-            <a:r>
-              <a:rPr sz="1500" b="1">
-                <a:solidFill>
-                  <a:srgbClr val="202122"/>
-                </a:solidFill>
-                <a:latin typeface="Calibri"/>
-              </a:rPr>
-              <a:t>2</a:t>
-            </a:r>
-          </a:p>
-        </p:txBody>
-      </p:sp>
-      <p:sp>
-        <p:nvSpPr>
-          <p:cNvPr id="12" name="TextBox 11"/>
-          <p:cNvSpPr txBox="1"/>
-          <p:nvPr/>
-        </p:nvSpPr>
-        <p:spPr>
-          <a:xfrm>
-            <a:off x="7055967" y="1801368"/>
-            <a:ext cx="4404207" cy="512064"/>
-          </a:xfrm>
-          <a:prstGeom prst="rect">
-            <a:avLst/>
-          </a:prstGeom>
-          <a:noFill/>
-        </p:spPr>
-        <p:txBody>
-          <a:bodyPr wrap="square" anchor="ctr" lIns="0" rIns="0" tIns="0" bIns="0"/>
-          <a:lstStyle/>
-          <a:p>
-            <a:pPr algn="l"/>
-            <a:r>
-              <a:rPr sz="1900" b="1" i="0">
-                <a:solidFill>
-                  <a:srgbClr val="03306E"/>
-                </a:solidFill>
-                <a:latin typeface="Calibri"/>
-              </a:rPr>
-              <a:t>Examples</a:t>
-            </a:r>
-          </a:p>
-        </p:txBody>
-      </p:sp>
-      <p:sp>
-        <p:nvSpPr>
-          <p:cNvPr id="13" name="TextBox 12"/>
-          <p:cNvSpPr txBox="1"/>
-          <p:nvPr/>
-        </p:nvSpPr>
-        <p:spPr>
-          <a:xfrm>
-            <a:off x="6461607" y="2468880"/>
-            <a:ext cx="4952847" cy="1143000"/>
-          </a:xfrm>
-          <a:prstGeom prst="rect">
-            <a:avLst/>
-          </a:prstGeom>
-          <a:noFill/>
-        </p:spPr>
-        <p:txBody>
-          <a:bodyPr wrap="square" anchor="t" lIns="0" rIns="0" tIns="0" bIns="0"/>
-          <a:lstStyle/>
-          <a:p>
-            <a:pPr algn="l"/>
-            <a:r>
-              <a:rPr sz="2000" b="0" i="0">
-                <a:solidFill>
-                  <a:srgbClr val="202122"/>
-                </a:solidFill>
-                <a:latin typeface="Calibri"/>
-              </a:rPr>
-              <a:t>Switches, proximity sensors, lasers, vision systems.</a:t>
-            </a:r>
-          </a:p>
-        </p:txBody>
-      </p:sp>
-      <p:sp>
-        <p:nvSpPr>
-          <p:cNvPr id="14" name="Rounded Rectangle 13"/>
-          <p:cNvSpPr/>
-          <p:nvPr/>
-        </p:nvSpPr>
-        <p:spPr>
-          <a:xfrm>
-            <a:off x="548640" y="4023360"/>
-            <a:ext cx="5410047" cy="2148840"/>
-          </a:xfrm>
-          <a:prstGeom prst="roundRect">
-            <a:avLst>
-              <a:gd name="adj" fmla="val 6000"/>
-            </a:avLst>
-          </a:prstGeom>
-          <a:solidFill>
-            <a:srgbClr val="EAF3FF"/>
-          </a:solidFill>
-          <a:ln>
-            <a:noFill/>
-          </a:ln>
-          <a:effectLst/>
-        </p:spPr>
-        <p:style>
-          <a:lnRef idx="1">
-            <a:schemeClr val="accent1"/>
-          </a:lnRef>
-          <a:fillRef idx="3">
-            <a:schemeClr val="accent1"/>
-          </a:fillRef>
-          <a:effectRef idx="2">
-            <a:schemeClr val="accent1"/>
-          </a:effectRef>
-          <a:fontRef idx="minor">
-            <a:schemeClr val="lt1"/>
-          </a:fontRef>
-        </p:style>
-        <p:txBody>
-          <a:bodyPr rtlCol="0" anchor="ctr"/>
-          <a:lstStyle/>
-          <a:p/>
-        </p:txBody>
-      </p:sp>
-      <p:sp>
-        <p:nvSpPr>
-          <p:cNvPr id="15" name="Oval 14"/>
-          <p:cNvSpPr/>
-          <p:nvPr/>
-        </p:nvSpPr>
-        <p:spPr>
-          <a:xfrm>
-            <a:off x="777240" y="4251960"/>
-            <a:ext cx="457200" cy="457200"/>
-          </a:xfrm>
-          <a:prstGeom prst="ellipse">
-            <a:avLst/>
-          </a:prstGeom>
-          <a:solidFill>
-            <a:srgbClr val="F2B705"/>
-          </a:solidFill>
-          <a:ln>
-            <a:noFill/>
-          </a:ln>
-          <a:effectLst/>
-        </p:spPr>
-        <p:style>
-          <a:lnRef idx="1">
-            <a:schemeClr val="accent1"/>
-          </a:lnRef>
-          <a:fillRef idx="3">
-            <a:schemeClr val="accent1"/>
-          </a:fillRef>
-          <a:effectRef idx="2">
-            <a:schemeClr val="accent1"/>
-          </a:effectRef>
-          <a:fontRef idx="minor">
-            <a:schemeClr val="lt1"/>
-          </a:fontRef>
-        </p:style>
-        <p:txBody>
-          <a:bodyPr rtlCol="0" anchor="ctr" lIns="0" rIns="0" tIns="0" bIns="0"/>
-          <a:lstStyle/>
-          <a:p>
-            <a:pPr algn="ctr"/>
-            <a:r>
-              <a:rPr sz="1500" b="1">
-                <a:solidFill>
-                  <a:srgbClr val="202122"/>
-                </a:solidFill>
-                <a:latin typeface="Calibri"/>
-              </a:rPr>
-              <a:t>3</a:t>
-            </a:r>
-          </a:p>
-        </p:txBody>
-      </p:sp>
-      <p:sp>
-        <p:nvSpPr>
-          <p:cNvPr id="16" name="TextBox 15"/>
-          <p:cNvSpPr txBox="1"/>
-          <p:nvPr/>
-        </p:nvSpPr>
-        <p:spPr>
-          <a:xfrm>
-            <a:off x="1371600" y="4224528"/>
-            <a:ext cx="4404207" cy="512064"/>
-          </a:xfrm>
-          <a:prstGeom prst="rect">
-            <a:avLst/>
-          </a:prstGeom>
-          <a:noFill/>
-        </p:spPr>
-        <p:txBody>
-          <a:bodyPr wrap="square" anchor="ctr" lIns="0" rIns="0" tIns="0" bIns="0"/>
-          <a:lstStyle/>
-          <a:p>
-            <a:pPr algn="l"/>
-            <a:r>
-              <a:rPr sz="1900" b="1" i="0">
-                <a:solidFill>
-                  <a:srgbClr val="03306E"/>
-                </a:solidFill>
-                <a:latin typeface="Calibri"/>
-              </a:rPr>
-              <a:t>Connections</a:t>
-            </a:r>
-          </a:p>
-        </p:txBody>
-      </p:sp>
-      <p:sp>
-        <p:nvSpPr>
-          <p:cNvPr id="17" name="TextBox 16"/>
-          <p:cNvSpPr txBox="1"/>
-          <p:nvPr/>
-        </p:nvSpPr>
-        <p:spPr>
-          <a:xfrm>
-            <a:off x="777240" y="4892040"/>
-            <a:ext cx="4952847" cy="1143000"/>
-          </a:xfrm>
-          <a:prstGeom prst="rect">
-            <a:avLst/>
-          </a:prstGeom>
-          <a:noFill/>
-        </p:spPr>
-        <p:txBody>
-          <a:bodyPr wrap="square" anchor="t" lIns="0" rIns="0" tIns="0" bIns="0"/>
-          <a:lstStyle/>
-          <a:p>
-            <a:pPr algn="l"/>
-            <a:r>
-              <a:rPr sz="2000" b="0" i="0">
-                <a:solidFill>
-                  <a:srgbClr val="202122"/>
-                </a:solidFill>
-                <a:latin typeface="Calibri"/>
-              </a:rPr>
-              <a:t>Hard-wired or wireless; suitable power sources.</a:t>
-            </a:r>
-          </a:p>
-        </p:txBody>
-      </p:sp>
-      <p:sp>
-        <p:nvSpPr>
-          <p:cNvPr id="18" name="Rounded Rectangle 17"/>
-          <p:cNvSpPr/>
-          <p:nvPr/>
-        </p:nvSpPr>
-        <p:spPr>
-          <a:xfrm>
-            <a:off x="6233007" y="4023360"/>
-            <a:ext cx="5410047" cy="2148840"/>
-          </a:xfrm>
-          <a:prstGeom prst="roundRect">
-            <a:avLst>
-              <a:gd name="adj" fmla="val 6000"/>
-            </a:avLst>
-          </a:prstGeom>
-          <a:solidFill>
-            <a:srgbClr val="EAF3FF"/>
-          </a:solidFill>
-          <a:ln>
-            <a:noFill/>
-          </a:ln>
-          <a:effectLst/>
-        </p:spPr>
-        <p:style>
-          <a:lnRef idx="1">
-            <a:schemeClr val="accent1"/>
-          </a:lnRef>
-          <a:fillRef idx="3">
-            <a:schemeClr val="accent1"/>
-          </a:fillRef>
-          <a:effectRef idx="2">
-            <a:schemeClr val="accent1"/>
-          </a:effectRef>
-          <a:fontRef idx="minor">
-            <a:schemeClr val="lt1"/>
-          </a:fontRef>
-        </p:style>
-        <p:txBody>
-          <a:bodyPr rtlCol="0" anchor="ctr"/>
-          <a:lstStyle/>
-          <a:p/>
-        </p:txBody>
-      </p:sp>
-      <p:sp>
-        <p:nvSpPr>
-          <p:cNvPr id="19" name="Oval 18"/>
-          <p:cNvSpPr/>
-          <p:nvPr/>
-        </p:nvSpPr>
-        <p:spPr>
-          <a:xfrm>
-            <a:off x="6461607" y="4251960"/>
-            <a:ext cx="457200" cy="457200"/>
-          </a:xfrm>
-          <a:prstGeom prst="ellipse">
-            <a:avLst/>
-          </a:prstGeom>
-          <a:solidFill>
-            <a:srgbClr val="F2B705"/>
-          </a:solidFill>
-          <a:ln>
-            <a:noFill/>
-          </a:ln>
-          <a:effectLst/>
-        </p:spPr>
-        <p:style>
-          <a:lnRef idx="1">
-            <a:schemeClr val="accent1"/>
-          </a:lnRef>
-          <a:fillRef idx="3">
-            <a:schemeClr val="accent1"/>
-          </a:fillRef>
-          <a:effectRef idx="2">
-            <a:schemeClr val="accent1"/>
-          </a:effectRef>
-          <a:fontRef idx="minor">
-            <a:schemeClr val="lt1"/>
-          </a:fontRef>
-        </p:style>
-        <p:txBody>
-          <a:bodyPr rtlCol="0" anchor="ctr" lIns="0" rIns="0" tIns="0" bIns="0"/>
-          <a:lstStyle/>
-          <a:p>
-            <a:pPr algn="ctr"/>
-            <a:r>
-              <a:rPr sz="1500" b="1">
-                <a:solidFill>
-                  <a:srgbClr val="202122"/>
-                </a:solidFill>
-                <a:latin typeface="Calibri"/>
-              </a:rPr>
-              <a:t>4</a:t>
-            </a:r>
-          </a:p>
-        </p:txBody>
-      </p:sp>
-      <p:sp>
-        <p:nvSpPr>
-          <p:cNvPr id="20" name="TextBox 19"/>
-          <p:cNvSpPr txBox="1"/>
-          <p:nvPr/>
-        </p:nvSpPr>
-        <p:spPr>
-          <a:xfrm>
-            <a:off x="7055967" y="4224528"/>
-            <a:ext cx="4404207" cy="512064"/>
-          </a:xfrm>
-          <a:prstGeom prst="rect">
-            <a:avLst/>
-          </a:prstGeom>
-          <a:noFill/>
-        </p:spPr>
-        <p:txBody>
-          <a:bodyPr wrap="square" anchor="ctr" lIns="0" rIns="0" tIns="0" bIns="0"/>
-          <a:lstStyle/>
-          <a:p>
-            <a:pPr algn="l"/>
-            <a:r>
-              <a:rPr sz="1900" b="1" i="0">
-                <a:solidFill>
-                  <a:srgbClr val="03306E"/>
-                </a:solidFill>
-                <a:latin typeface="Calibri"/>
-              </a:rPr>
-              <a:t>Uses</a:t>
-            </a:r>
-          </a:p>
-        </p:txBody>
-      </p:sp>
-      <p:sp>
-        <p:nvSpPr>
-          <p:cNvPr id="21" name="TextBox 20"/>
-          <p:cNvSpPr txBox="1"/>
-          <p:nvPr/>
-        </p:nvSpPr>
-        <p:spPr>
-          <a:xfrm>
-            <a:off x="6461607" y="4892040"/>
-            <a:ext cx="4952847" cy="1143000"/>
-          </a:xfrm>
-          <a:prstGeom prst="rect">
-            <a:avLst/>
-          </a:prstGeom>
-          <a:noFill/>
-        </p:spPr>
-        <p:txBody>
-          <a:bodyPr wrap="square" anchor="t" lIns="0" rIns="0" tIns="0" bIns="0"/>
-          <a:lstStyle/>
-          <a:p>
-            <a:pPr algn="l"/>
-            <a:r>
-              <a:rPr sz="2000" b="0" i="0">
-                <a:solidFill>
-                  <a:srgbClr val="202122"/>
-                </a:solidFill>
-                <a:latin typeface="Calibri"/>
-              </a:rPr>
-              <a:t>Positioning, measuring, lifting and moving objects.</a:t>
-            </a:r>
-          </a:p>
-        </p:txBody>
-      </p:sp>
-    </p:spTree>
-  </p:cSld>
-  <p:clrMapOvr>
-    <a:masterClrMapping/>
-  </p:clrMapOvr>
-</p:sld>
-</file>
-
-<file path=ppt/slides/slide7.xml><?xml version="1.0" encoding="utf-8"?>
-<p:sld xmlns:a="http://schemas.openxmlformats.org/drawingml/2006/main" xmlns:p="http://schemas.openxmlformats.org/presentationml/2006/main" xmlns:r="http://schemas.openxmlformats.org/officeDocument/2006/relationships">
-  <p:cSld>
-    <p:bg>
-      <p:bgPr>
-        <a:solidFill>
-          <a:srgbClr val="FFFFFF"/>
-        </a:solidFill>
-        <a:effectLst/>
-      </p:bgPr>
-    </p:bg>
-    <p:spTree>
-      <p:nvGrpSpPr>
-        <p:cNvPr id="1" name=""/>
-        <p:cNvGrpSpPr/>
-        <p:nvPr/>
-      </p:nvGrpSpPr>
-      <p:grpSpPr/>
-      <p:sp>
-        <p:nvSpPr>
-          <p:cNvPr id="2" name="TextBox 1"/>
-          <p:cNvSpPr txBox="1"/>
-          <p:nvPr/>
-        </p:nvSpPr>
-        <p:spPr>
-          <a:xfrm>
-            <a:off x="548640" y="320040"/>
-            <a:ext cx="11094415" cy="274320"/>
-          </a:xfrm>
-          <a:prstGeom prst="rect">
-            <a:avLst/>
-          </a:prstGeom>
-          <a:noFill/>
-        </p:spPr>
-        <p:txBody>
-          <a:bodyPr wrap="square" anchor="t" lIns="0" rIns="0" tIns="0" bIns="0"/>
-          <a:lstStyle/>
-          <a:p>
-            <a:pPr algn="l"/>
-            <a:r>
-              <a:rPr sz="1100" b="1" i="0">
-                <a:solidFill>
-                  <a:srgbClr val="54595D"/>
-                </a:solidFill>
-                <a:latin typeface="Calibri"/>
-              </a:rPr>
-              <a:t>ENGINEERING CORE  ·  Core topic 10</a:t>
-            </a:r>
-          </a:p>
-        </p:txBody>
-      </p:sp>
-      <p:sp>
-        <p:nvSpPr>
-          <p:cNvPr id="3" name="TextBox 2"/>
-          <p:cNvSpPr txBox="1"/>
-          <p:nvPr/>
-        </p:nvSpPr>
-        <p:spPr>
-          <a:xfrm>
-            <a:off x="548640" y="566928"/>
-            <a:ext cx="11094415" cy="822960"/>
-          </a:xfrm>
-          <a:prstGeom prst="rect">
-            <a:avLst/>
-          </a:prstGeom>
-          <a:noFill/>
-        </p:spPr>
-        <p:txBody>
-          <a:bodyPr wrap="square" anchor="ctr" lIns="0" rIns="0" tIns="0" bIns="0"/>
-          <a:lstStyle/>
-          <a:p>
-            <a:pPr algn="l"/>
-            <a:r>
-              <a:rPr sz="3200" b="1" i="0">
-                <a:solidFill>
-                  <a:srgbClr val="03306E"/>
-                </a:solidFill>
-                <a:latin typeface="Cambria"/>
-              </a:rPr>
-              <a:t>Check your understanding</a:t>
-            </a:r>
-          </a:p>
-        </p:txBody>
-      </p:sp>
-      <p:sp>
-        <p:nvSpPr>
-          <p:cNvPr id="4" name="TextBox 3"/>
-          <p:cNvSpPr txBox="1"/>
-          <p:nvPr/>
-        </p:nvSpPr>
-        <p:spPr>
-          <a:xfrm>
-            <a:off x="548640" y="6446520"/>
-            <a:ext cx="8229600" cy="274320"/>
-          </a:xfrm>
-          <a:prstGeom prst="rect">
-            <a:avLst/>
-          </a:prstGeom>
-          <a:noFill/>
-        </p:spPr>
-        <p:txBody>
-          <a:bodyPr wrap="square" anchor="t" lIns="0" rIns="0" tIns="0" bIns="0"/>
-          <a:lstStyle/>
-          <a:p>
-            <a:pPr algn="l"/>
-            <a:r>
-              <a:rPr sz="1000" b="0" i="0">
-                <a:solidFill>
-                  <a:srgbClr val="54595D"/>
-                </a:solidFill>
-                <a:latin typeface="Calibri"/>
-              </a:rPr>
-              <a:t>Design and Development for Engineering and Manufacturing T Level  ·  Control Systems, Sensors and Actuators</a:t>
-            </a:r>
-          </a:p>
-        </p:txBody>
-      </p:sp>
-      <p:sp>
-        <p:nvSpPr>
-          <p:cNvPr id="5" name="TextBox 4"/>
-          <p:cNvSpPr txBox="1"/>
-          <p:nvPr/>
-        </p:nvSpPr>
-        <p:spPr>
-          <a:xfrm>
-            <a:off x="10728655" y="6446520"/>
-            <a:ext cx="914400" cy="274320"/>
-          </a:xfrm>
-          <a:prstGeom prst="rect">
-            <a:avLst/>
-          </a:prstGeom>
-          <a:noFill/>
-        </p:spPr>
-        <p:txBody>
-          <a:bodyPr wrap="square" anchor="t" lIns="0" rIns="0" tIns="0" bIns="0"/>
-          <a:lstStyle/>
-          <a:p>
-            <a:pPr algn="r"/>
-            <a:r>
-              <a:rPr sz="1000" b="0" i="0">
-                <a:solidFill>
-                  <a:srgbClr val="54595D"/>
-                </a:solidFill>
-                <a:latin typeface="Calibri"/>
-              </a:rPr>
-              <a:t>7</a:t>
-            </a:r>
-          </a:p>
-        </p:txBody>
-      </p:sp>
-      <p:sp>
-        <p:nvSpPr>
-          <p:cNvPr id="6" name="Oval 5"/>
-          <p:cNvSpPr/>
-          <p:nvPr/>
-        </p:nvSpPr>
-        <p:spPr>
-          <a:xfrm>
-            <a:off x="548640" y="1618488"/>
-            <a:ext cx="411480" cy="411480"/>
-          </a:xfrm>
-          <a:prstGeom prst="ellipse">
-            <a:avLst/>
-          </a:prstGeom>
-          <a:solidFill>
-            <a:srgbClr val="F2B705"/>
-          </a:solidFill>
-          <a:ln>
-            <a:noFill/>
-          </a:ln>
-          <a:effectLst/>
-        </p:spPr>
-        <p:style>
-          <a:lnRef idx="1">
-            <a:schemeClr val="accent1"/>
-          </a:lnRef>
-          <a:fillRef idx="3">
-            <a:schemeClr val="accent1"/>
-          </a:fillRef>
-          <a:effectRef idx="2">
-            <a:schemeClr val="accent1"/>
-          </a:effectRef>
-          <a:fontRef idx="minor">
-            <a:schemeClr val="lt1"/>
-          </a:fontRef>
-        </p:style>
-        <p:txBody>
-          <a:bodyPr rtlCol="0" anchor="ctr" lIns="0" rIns="0" tIns="0" bIns="0"/>
-          <a:lstStyle/>
-          <a:p>
-            <a:pPr algn="ctr"/>
-            <a:r>
-              <a:rPr sz="1400" b="1">
-                <a:solidFill>
-                  <a:srgbClr val="202122"/>
-                </a:solidFill>
-                <a:latin typeface="Calibri"/>
-              </a:rPr>
-              <a:t>1</a:t>
-            </a:r>
-          </a:p>
-        </p:txBody>
-      </p:sp>
-      <p:sp>
-        <p:nvSpPr>
-          <p:cNvPr id="7" name="TextBox 6"/>
-          <p:cNvSpPr txBox="1"/>
-          <p:nvPr/>
-        </p:nvSpPr>
-        <p:spPr>
-          <a:xfrm>
-            <a:off x="1234440" y="1600200"/>
-            <a:ext cx="10408615" cy="1030986"/>
-          </a:xfrm>
-          <a:prstGeom prst="rect">
-            <a:avLst/>
-          </a:prstGeom>
-          <a:noFill/>
-        </p:spPr>
-        <p:txBody>
-          <a:bodyPr wrap="square" anchor="t" lIns="0" rIns="0" tIns="0" bIns="0"/>
-          <a:lstStyle/>
-          <a:p>
-            <a:pPr algn="l"/>
-            <a:r>
-              <a:rPr sz="2200" b="0" i="0">
-                <a:solidFill>
-                  <a:srgbClr val="202122"/>
-                </a:solidFill>
-                <a:latin typeface="Calibri"/>
-              </a:rPr>
-              <a:t>What does a closed loop system have that an open loop one doesn't?</a:t>
-            </a:r>
-          </a:p>
-        </p:txBody>
-      </p:sp>
-      <p:sp>
-        <p:nvSpPr>
-          <p:cNvPr id="8" name="Oval 7"/>
-          <p:cNvSpPr/>
-          <p:nvPr/>
-        </p:nvSpPr>
-        <p:spPr>
-          <a:xfrm>
-            <a:off x="548640" y="2814066"/>
-            <a:ext cx="411480" cy="411480"/>
-          </a:xfrm>
-          <a:prstGeom prst="ellipse">
-            <a:avLst/>
-          </a:prstGeom>
-          <a:solidFill>
-            <a:srgbClr val="F2B705"/>
-          </a:solidFill>
-          <a:ln>
-            <a:noFill/>
-          </a:ln>
-          <a:effectLst/>
-        </p:spPr>
-        <p:style>
-          <a:lnRef idx="1">
-            <a:schemeClr val="accent1"/>
-          </a:lnRef>
-          <a:fillRef idx="3">
-            <a:schemeClr val="accent1"/>
-          </a:fillRef>
-          <a:effectRef idx="2">
-            <a:schemeClr val="accent1"/>
-          </a:effectRef>
-          <a:fontRef idx="minor">
-            <a:schemeClr val="lt1"/>
-          </a:fontRef>
-        </p:style>
-        <p:txBody>
-          <a:bodyPr rtlCol="0" anchor="ctr" lIns="0" rIns="0" tIns="0" bIns="0"/>
-          <a:lstStyle/>
-          <a:p>
-            <a:pPr algn="ctr"/>
-            <a:r>
-              <a:rPr sz="1400" b="1">
-                <a:solidFill>
-                  <a:srgbClr val="202122"/>
-                </a:solidFill>
-                <a:latin typeface="Calibri"/>
-              </a:rPr>
-              <a:t>2</a:t>
-            </a:r>
-          </a:p>
-        </p:txBody>
-      </p:sp>
-      <p:sp>
-        <p:nvSpPr>
-          <p:cNvPr id="9" name="TextBox 8"/>
-          <p:cNvSpPr txBox="1"/>
-          <p:nvPr/>
-        </p:nvSpPr>
-        <p:spPr>
-          <a:xfrm>
-            <a:off x="1234440" y="2795778"/>
-            <a:ext cx="10408615" cy="1030986"/>
-          </a:xfrm>
-          <a:prstGeom prst="rect">
-            <a:avLst/>
-          </a:prstGeom>
-          <a:noFill/>
-        </p:spPr>
-        <p:txBody>
-          <a:bodyPr wrap="square" anchor="t" lIns="0" rIns="0" tIns="0" bIns="0"/>
-          <a:lstStyle/>
-          <a:p>
-            <a:pPr algn="l"/>
-            <a:r>
-              <a:rPr sz="2200" b="0" i="0">
-                <a:solidFill>
-                  <a:srgbClr val="202122"/>
-                </a:solidFill>
-                <a:latin typeface="Calibri"/>
-              </a:rPr>
-              <a:t>Which logic gate outputs 1 only when both inputs are 1?</a:t>
-            </a:r>
-          </a:p>
-        </p:txBody>
-      </p:sp>
-      <p:sp>
-        <p:nvSpPr>
-          <p:cNvPr id="10" name="Oval 9"/>
-          <p:cNvSpPr/>
-          <p:nvPr/>
-        </p:nvSpPr>
-        <p:spPr>
-          <a:xfrm>
-            <a:off x="548640" y="4009644"/>
-            <a:ext cx="411480" cy="411480"/>
-          </a:xfrm>
-          <a:prstGeom prst="ellipse">
-            <a:avLst/>
-          </a:prstGeom>
-          <a:solidFill>
-            <a:srgbClr val="F2B705"/>
-          </a:solidFill>
-          <a:ln>
-            <a:noFill/>
-          </a:ln>
-          <a:effectLst/>
-        </p:spPr>
-        <p:style>
-          <a:lnRef idx="1">
-            <a:schemeClr val="accent1"/>
-          </a:lnRef>
-          <a:fillRef idx="3">
-            <a:schemeClr val="accent1"/>
-          </a:fillRef>
-          <a:effectRef idx="2">
-            <a:schemeClr val="accent1"/>
-          </a:effectRef>
-          <a:fontRef idx="minor">
-            <a:schemeClr val="lt1"/>
-          </a:fontRef>
-        </p:style>
-        <p:txBody>
-          <a:bodyPr rtlCol="0" anchor="ctr" lIns="0" rIns="0" tIns="0" bIns="0"/>
-          <a:lstStyle/>
-          <a:p>
-            <a:pPr algn="ctr"/>
-            <a:r>
-              <a:rPr sz="1400" b="1">
-                <a:solidFill>
-                  <a:srgbClr val="202122"/>
-                </a:solidFill>
-                <a:latin typeface="Calibri"/>
-              </a:rPr>
-              <a:t>3</a:t>
-            </a:r>
-          </a:p>
-        </p:txBody>
-      </p:sp>
-      <p:sp>
-        <p:nvSpPr>
-          <p:cNvPr id="11" name="TextBox 10"/>
-          <p:cNvSpPr txBox="1"/>
-          <p:nvPr/>
-        </p:nvSpPr>
-        <p:spPr>
-          <a:xfrm>
-            <a:off x="1234440" y="3991356"/>
-            <a:ext cx="10408615" cy="1030986"/>
-          </a:xfrm>
-          <a:prstGeom prst="rect">
-            <a:avLst/>
-          </a:prstGeom>
-          <a:noFill/>
-        </p:spPr>
-        <p:txBody>
-          <a:bodyPr wrap="square" anchor="t" lIns="0" rIns="0" tIns="0" bIns="0"/>
-          <a:lstStyle/>
-          <a:p>
-            <a:pPr algn="l"/>
-            <a:r>
-              <a:rPr sz="2200" b="0" i="0">
-                <a:solidFill>
-                  <a:srgbClr val="202122"/>
-                </a:solidFill>
-                <a:latin typeface="Calibri"/>
-              </a:rPr>
-              <a:t>What is steady-state error?</a:t>
-            </a:r>
-          </a:p>
-        </p:txBody>
-      </p:sp>
-      <p:sp>
-        <p:nvSpPr>
-          <p:cNvPr id="12" name="Oval 11"/>
-          <p:cNvSpPr/>
-          <p:nvPr/>
-        </p:nvSpPr>
-        <p:spPr>
-          <a:xfrm>
-            <a:off x="548640" y="5205221"/>
-            <a:ext cx="411480" cy="411480"/>
-          </a:xfrm>
-          <a:prstGeom prst="ellipse">
-            <a:avLst/>
-          </a:prstGeom>
-          <a:solidFill>
-            <a:srgbClr val="F2B705"/>
-          </a:solidFill>
-          <a:ln>
-            <a:noFill/>
-          </a:ln>
-          <a:effectLst/>
-        </p:spPr>
-        <p:style>
-          <a:lnRef idx="1">
-            <a:schemeClr val="accent1"/>
-          </a:lnRef>
-          <a:fillRef idx="3">
-            <a:schemeClr val="accent1"/>
-          </a:fillRef>
-          <a:effectRef idx="2">
-            <a:schemeClr val="accent1"/>
-          </a:effectRef>
-          <a:fontRef idx="minor">
-            <a:schemeClr val="lt1"/>
-          </a:fontRef>
-        </p:style>
-        <p:txBody>
-          <a:bodyPr rtlCol="0" anchor="ctr" lIns="0" rIns="0" tIns="0" bIns="0"/>
-          <a:lstStyle/>
-          <a:p>
-            <a:pPr algn="ctr"/>
-            <a:r>
-              <a:rPr sz="1400" b="1">
-                <a:solidFill>
-                  <a:srgbClr val="202122"/>
-                </a:solidFill>
-                <a:latin typeface="Calibri"/>
-              </a:rPr>
-              <a:t>4</a:t>
-            </a:r>
-          </a:p>
-        </p:txBody>
-      </p:sp>
-      <p:sp>
-        <p:nvSpPr>
-          <p:cNvPr id="13" name="TextBox 12"/>
-          <p:cNvSpPr txBox="1"/>
-          <p:nvPr/>
-        </p:nvSpPr>
-        <p:spPr>
-          <a:xfrm>
-            <a:off x="1234440" y="5186933"/>
-            <a:ext cx="10408615" cy="1030986"/>
-          </a:xfrm>
-          <a:prstGeom prst="rect">
-            <a:avLst/>
-          </a:prstGeom>
-          <a:noFill/>
-        </p:spPr>
-        <p:txBody>
-          <a:bodyPr wrap="square" anchor="t" lIns="0" rIns="0" tIns="0" bIns="0"/>
-          <a:lstStyle/>
-          <a:p>
-            <a:pPr algn="l"/>
-            <a:r>
-              <a:rPr sz="2200" b="0" i="0">
-                <a:solidFill>
-                  <a:srgbClr val="202122"/>
-                </a:solidFill>
-                <a:latin typeface="Calibri"/>
-              </a:rPr>
-              <a:t>How does PWM control motor speed?</a:t>
-            </a:r>
-          </a:p>
-        </p:txBody>
-      </p:sp>
-    </p:spTree>
-  </p:cSld>
-  <p:clrMapOvr>
-    <a:masterClrMapping/>
-  </p:clrMapOvr>
-</p:sld>
-</file>
-
-<file path=ppt/slides/slide8.xml><?xml version="1.0" encoding="utf-8"?>
-<p:sld xmlns:a="http://schemas.openxmlformats.org/drawingml/2006/main" xmlns:p="http://schemas.openxmlformats.org/presentationml/2006/main" xmlns:r="http://schemas.openxmlformats.org/officeDocument/2006/relationships">
-  <p:cSld>
-    <p:bg>
-      <p:bgPr>
-        <a:solidFill>
-          <a:srgbClr val="FFFFFF"/>
-        </a:solidFill>
-        <a:effectLst/>
-      </p:bgPr>
-    </p:bg>
-    <p:spTree>
-      <p:nvGrpSpPr>
-        <p:cNvPr id="1" name=""/>
-        <p:cNvGrpSpPr/>
-        <p:nvPr/>
-      </p:nvGrpSpPr>
-      <p:grpSpPr/>
-      <p:sp>
-        <p:nvSpPr>
-          <p:cNvPr id="2" name="TextBox 1"/>
-          <p:cNvSpPr txBox="1"/>
-          <p:nvPr/>
-        </p:nvSpPr>
-        <p:spPr>
-          <a:xfrm>
-            <a:off x="548640" y="320040"/>
-            <a:ext cx="11094415" cy="274320"/>
-          </a:xfrm>
-          <a:prstGeom prst="rect">
-            <a:avLst/>
-          </a:prstGeom>
-          <a:noFill/>
-        </p:spPr>
-        <p:txBody>
-          <a:bodyPr wrap="square" anchor="t" lIns="0" rIns="0" tIns="0" bIns="0"/>
-          <a:lstStyle/>
-          <a:p>
-            <a:pPr algn="l"/>
-            <a:r>
-              <a:rPr sz="1100" b="1" i="0">
-                <a:solidFill>
-                  <a:srgbClr val="54595D"/>
-                </a:solidFill>
-                <a:latin typeface="Calibri"/>
-              </a:rPr>
-              <a:t>ENGINEERING CORE  ·  Core topic 10</a:t>
-            </a:r>
-          </a:p>
-        </p:txBody>
-      </p:sp>
-      <p:sp>
-        <p:nvSpPr>
-          <p:cNvPr id="3" name="TextBox 2"/>
-          <p:cNvSpPr txBox="1"/>
-          <p:nvPr/>
-        </p:nvSpPr>
-        <p:spPr>
-          <a:xfrm>
-            <a:off x="548640" y="566928"/>
-            <a:ext cx="11094415" cy="822960"/>
-          </a:xfrm>
-          <a:prstGeom prst="rect">
-            <a:avLst/>
-          </a:prstGeom>
-          <a:noFill/>
-        </p:spPr>
-        <p:txBody>
-          <a:bodyPr wrap="square" anchor="ctr" lIns="0" rIns="0" tIns="0" bIns="0"/>
-          <a:lstStyle/>
-          <a:p>
-            <a:pPr algn="l"/>
-            <a:r>
-              <a:rPr sz="3200" b="1" i="0">
-                <a:solidFill>
-                  <a:srgbClr val="03306E"/>
-                </a:solidFill>
-                <a:latin typeface="Cambria"/>
-              </a:rPr>
-              <a:t>Answers</a:t>
-            </a:r>
-          </a:p>
-        </p:txBody>
-      </p:sp>
-      <p:sp>
-        <p:nvSpPr>
-          <p:cNvPr id="4" name="TextBox 3"/>
-          <p:cNvSpPr txBox="1"/>
-          <p:nvPr/>
-        </p:nvSpPr>
-        <p:spPr>
-          <a:xfrm>
-            <a:off x="548640" y="6446520"/>
-            <a:ext cx="8229600" cy="274320"/>
-          </a:xfrm>
-          <a:prstGeom prst="rect">
-            <a:avLst/>
-          </a:prstGeom>
-          <a:noFill/>
-        </p:spPr>
-        <p:txBody>
-          <a:bodyPr wrap="square" anchor="t" lIns="0" rIns="0" tIns="0" bIns="0"/>
-          <a:lstStyle/>
-          <a:p>
-            <a:pPr algn="l"/>
-            <a:r>
-              <a:rPr sz="1000" b="0" i="0">
-                <a:solidFill>
-                  <a:srgbClr val="54595D"/>
-                </a:solidFill>
-                <a:latin typeface="Calibri"/>
-              </a:rPr>
-              <a:t>Design and Development for Engineering and Manufacturing T Level  ·  Control Systems, Sensors and Actuators</a:t>
-            </a:r>
-          </a:p>
-        </p:txBody>
-      </p:sp>
-      <p:sp>
-        <p:nvSpPr>
-          <p:cNvPr id="5" name="TextBox 4"/>
-          <p:cNvSpPr txBox="1"/>
-          <p:nvPr/>
-        </p:nvSpPr>
-        <p:spPr>
-          <a:xfrm>
-            <a:off x="10728655" y="6446520"/>
-            <a:ext cx="914400" cy="274320"/>
-          </a:xfrm>
-          <a:prstGeom prst="rect">
-            <a:avLst/>
-          </a:prstGeom>
-          <a:noFill/>
-        </p:spPr>
-        <p:txBody>
-          <a:bodyPr wrap="square" anchor="t" lIns="0" rIns="0" tIns="0" bIns="0"/>
-          <a:lstStyle/>
-          <a:p>
-            <a:pPr algn="r"/>
-            <a:r>
-              <a:rPr sz="1000" b="0" i="0">
-                <a:solidFill>
-                  <a:srgbClr val="54595D"/>
-                </a:solidFill>
-                <a:latin typeface="Calibri"/>
-              </a:rPr>
-              <a:t>8</a:t>
-            </a:r>
-          </a:p>
-        </p:txBody>
-      </p:sp>
-      <p:sp>
-        <p:nvSpPr>
-          <p:cNvPr id="6" name="Oval 5"/>
-          <p:cNvSpPr/>
-          <p:nvPr/>
-        </p:nvSpPr>
-        <p:spPr>
-          <a:xfrm>
-            <a:off x="548640" y="1618488"/>
-            <a:ext cx="411480" cy="411480"/>
-          </a:xfrm>
-          <a:prstGeom prst="ellipse">
-            <a:avLst/>
-          </a:prstGeom>
-          <a:solidFill>
-            <a:srgbClr val="F2B705"/>
-          </a:solidFill>
-          <a:ln>
-            <a:noFill/>
-          </a:ln>
-          <a:effectLst/>
-        </p:spPr>
-        <p:style>
-          <a:lnRef idx="1">
-            <a:schemeClr val="accent1"/>
-          </a:lnRef>
-          <a:fillRef idx="3">
-            <a:schemeClr val="accent1"/>
-          </a:fillRef>
-          <a:effectRef idx="2">
-            <a:schemeClr val="accent1"/>
-          </a:effectRef>
-          <a:fontRef idx="minor">
-            <a:schemeClr val="lt1"/>
-          </a:fontRef>
-        </p:style>
-        <p:txBody>
-          <a:bodyPr rtlCol="0" anchor="ctr" lIns="0" rIns="0" tIns="0" bIns="0"/>
-          <a:lstStyle/>
-          <a:p>
-            <a:pPr algn="ctr"/>
-            <a:r>
-              <a:rPr sz="1400" b="1">
-                <a:solidFill>
-                  <a:srgbClr val="202122"/>
-                </a:solidFill>
-                <a:latin typeface="Calibri"/>
-              </a:rPr>
-              <a:t>1</a:t>
-            </a:r>
-          </a:p>
-        </p:txBody>
-      </p:sp>
-      <p:sp>
-        <p:nvSpPr>
-          <p:cNvPr id="7" name="TextBox 6"/>
-          <p:cNvSpPr txBox="1"/>
-          <p:nvPr/>
-        </p:nvSpPr>
-        <p:spPr>
-          <a:xfrm>
-            <a:off x="1234440" y="1600200"/>
-            <a:ext cx="10408615" cy="1030986"/>
-          </a:xfrm>
-          <a:prstGeom prst="rect">
-            <a:avLst/>
-          </a:prstGeom>
-          <a:noFill/>
-        </p:spPr>
-        <p:txBody>
-          <a:bodyPr wrap="square" anchor="t" lIns="0" rIns="0" tIns="0" bIns="0"/>
-          <a:lstStyle/>
-          <a:p>
-            <a:pPr algn="l"/>
-            <a:r>
-              <a:rPr sz="1800" b="0" i="0">
-                <a:solidFill>
-                  <a:srgbClr val="54595D"/>
-                </a:solidFill>
-                <a:latin typeface="Calibri"/>
-              </a:rPr>
-              <a:t>What does a closed loop system have that an open loop one doesn't?</a:t>
-            </a:r>
-          </a:p>
-          <a:p>
-            <a:r>
-              <a:rPr sz="1800" b="1">
-                <a:solidFill>
-                  <a:srgbClr val="03306E"/>
-                </a:solidFill>
-                <a:latin typeface="Calibri"/>
-              </a:rPr>
-              <a:t>Feedback.</a:t>
-            </a:r>
-          </a:p>
-        </p:txBody>
-      </p:sp>
-      <p:sp>
-        <p:nvSpPr>
-          <p:cNvPr id="8" name="Oval 7"/>
-          <p:cNvSpPr/>
-          <p:nvPr/>
-        </p:nvSpPr>
-        <p:spPr>
-          <a:xfrm>
-            <a:off x="548640" y="2814066"/>
-            <a:ext cx="411480" cy="411480"/>
-          </a:xfrm>
-          <a:prstGeom prst="ellipse">
-            <a:avLst/>
-          </a:prstGeom>
-          <a:solidFill>
-            <a:srgbClr val="F2B705"/>
-          </a:solidFill>
-          <a:ln>
-            <a:noFill/>
-          </a:ln>
-          <a:effectLst/>
-        </p:spPr>
-        <p:style>
-          <a:lnRef idx="1">
-            <a:schemeClr val="accent1"/>
-          </a:lnRef>
-          <a:fillRef idx="3">
-            <a:schemeClr val="accent1"/>
-          </a:fillRef>
-          <a:effectRef idx="2">
-            <a:schemeClr val="accent1"/>
-          </a:effectRef>
-          <a:fontRef idx="minor">
-            <a:schemeClr val="lt1"/>
-          </a:fontRef>
-        </p:style>
-        <p:txBody>
-          <a:bodyPr rtlCol="0" anchor="ctr" lIns="0" rIns="0" tIns="0" bIns="0"/>
-          <a:lstStyle/>
-          <a:p>
-            <a:pPr algn="ctr"/>
-            <a:r>
-              <a:rPr sz="1400" b="1">
-                <a:solidFill>
-                  <a:srgbClr val="202122"/>
-                </a:solidFill>
-                <a:latin typeface="Calibri"/>
-              </a:rPr>
-              <a:t>2</a:t>
-            </a:r>
-          </a:p>
-        </p:txBody>
-      </p:sp>
-      <p:sp>
-        <p:nvSpPr>
-          <p:cNvPr id="9" name="TextBox 8"/>
-          <p:cNvSpPr txBox="1"/>
-          <p:nvPr/>
-        </p:nvSpPr>
-        <p:spPr>
-          <a:xfrm>
-            <a:off x="1234440" y="2795778"/>
-            <a:ext cx="10408615" cy="1030986"/>
-          </a:xfrm>
-          <a:prstGeom prst="rect">
-            <a:avLst/>
-          </a:prstGeom>
-          <a:noFill/>
-        </p:spPr>
-        <p:txBody>
-          <a:bodyPr wrap="square" anchor="t" lIns="0" rIns="0" tIns="0" bIns="0"/>
-          <a:lstStyle/>
-          <a:p>
-            <a:pPr algn="l"/>
-            <a:r>
-              <a:rPr sz="1800" b="0" i="0">
-                <a:solidFill>
-                  <a:srgbClr val="54595D"/>
-                </a:solidFill>
-                <a:latin typeface="Calibri"/>
-              </a:rPr>
-              <a:t>Which logic gate outputs 1 only when both inputs are 1?</a:t>
-            </a:r>
-          </a:p>
-          <a:p>
-            <a:r>
-              <a:rPr sz="1800" b="1">
-                <a:solidFill>
-                  <a:srgbClr val="03306E"/>
-                </a:solidFill>
-                <a:latin typeface="Calibri"/>
-              </a:rPr>
-              <a:t>AND.</a:t>
-            </a:r>
-          </a:p>
-        </p:txBody>
-      </p:sp>
-      <p:sp>
-        <p:nvSpPr>
-          <p:cNvPr id="10" name="Oval 9"/>
-          <p:cNvSpPr/>
-          <p:nvPr/>
-        </p:nvSpPr>
-        <p:spPr>
-          <a:xfrm>
-            <a:off x="548640" y="4009644"/>
-            <a:ext cx="411480" cy="411480"/>
-          </a:xfrm>
-          <a:prstGeom prst="ellipse">
-            <a:avLst/>
-          </a:prstGeom>
-          <a:solidFill>
-            <a:srgbClr val="F2B705"/>
-          </a:solidFill>
-          <a:ln>
-            <a:noFill/>
-          </a:ln>
-          <a:effectLst/>
-        </p:spPr>
-        <p:style>
-          <a:lnRef idx="1">
-            <a:schemeClr val="accent1"/>
-          </a:lnRef>
-          <a:fillRef idx="3">
-            <a:schemeClr val="accent1"/>
-          </a:fillRef>
-          <a:effectRef idx="2">
-            <a:schemeClr val="accent1"/>
-          </a:effectRef>
-          <a:fontRef idx="minor">
-            <a:schemeClr val="lt1"/>
-          </a:fontRef>
-        </p:style>
-        <p:txBody>
-          <a:bodyPr rtlCol="0" anchor="ctr" lIns="0" rIns="0" tIns="0" bIns="0"/>
-          <a:lstStyle/>
-          <a:p>
-            <a:pPr algn="ctr"/>
-            <a:r>
-              <a:rPr sz="1400" b="1">
-                <a:solidFill>
-                  <a:srgbClr val="202122"/>
-                </a:solidFill>
-                <a:latin typeface="Calibri"/>
-              </a:rPr>
-              <a:t>3</a:t>
-            </a:r>
-          </a:p>
-        </p:txBody>
-      </p:sp>
-      <p:sp>
-        <p:nvSpPr>
-          <p:cNvPr id="11" name="TextBox 10"/>
-          <p:cNvSpPr txBox="1"/>
-          <p:nvPr/>
-        </p:nvSpPr>
-        <p:spPr>
-          <a:xfrm>
-            <a:off x="1234440" y="3991356"/>
-            <a:ext cx="10408615" cy="1030986"/>
-          </a:xfrm>
-          <a:prstGeom prst="rect">
-            <a:avLst/>
-          </a:prstGeom>
-          <a:noFill/>
-        </p:spPr>
-        <p:txBody>
-          <a:bodyPr wrap="square" anchor="t" lIns="0" rIns="0" tIns="0" bIns="0"/>
-          <a:lstStyle/>
-          <a:p>
-            <a:pPr algn="l"/>
-            <a:r>
-              <a:rPr sz="1800" b="0" i="0">
-                <a:solidFill>
-                  <a:srgbClr val="54595D"/>
-                </a:solidFill>
-                <a:latin typeface="Calibri"/>
-              </a:rPr>
-              <a:t>What is steady-state error?</a:t>
-            </a:r>
-          </a:p>
-          <a:p>
-            <a:r>
-              <a:rPr sz="1800" b="1">
-                <a:solidFill>
-                  <a:srgbClr val="03306E"/>
-                </a:solidFill>
-                <a:latin typeface="Calibri"/>
-              </a:rPr>
-              <a:t>The difference left between the set point and the output once settled.</a:t>
-            </a:r>
-          </a:p>
-        </p:txBody>
-      </p:sp>
-      <p:sp>
-        <p:nvSpPr>
-          <p:cNvPr id="12" name="Oval 11"/>
-          <p:cNvSpPr/>
-          <p:nvPr/>
-        </p:nvSpPr>
-        <p:spPr>
-          <a:xfrm>
-            <a:off x="548640" y="5205221"/>
-            <a:ext cx="411480" cy="411480"/>
-          </a:xfrm>
-          <a:prstGeom prst="ellipse">
-            <a:avLst/>
-          </a:prstGeom>
-          <a:solidFill>
-            <a:srgbClr val="F2B705"/>
-          </a:solidFill>
-          <a:ln>
-            <a:noFill/>
-          </a:ln>
-          <a:effectLst/>
-        </p:spPr>
-        <p:style>
-          <a:lnRef idx="1">
-            <a:schemeClr val="accent1"/>
-          </a:lnRef>
-          <a:fillRef idx="3">
-            <a:schemeClr val="accent1"/>
-          </a:fillRef>
-          <a:effectRef idx="2">
-            <a:schemeClr val="accent1"/>
-          </a:effectRef>
-          <a:fontRef idx="minor">
-            <a:schemeClr val="lt1"/>
-          </a:fontRef>
-        </p:style>
-        <p:txBody>
-          <a:bodyPr rtlCol="0" anchor="ctr" lIns="0" rIns="0" tIns="0" bIns="0"/>
-          <a:lstStyle/>
-          <a:p>
-            <a:pPr algn="ctr"/>
-            <a:r>
-              <a:rPr sz="1400" b="1">
-                <a:solidFill>
-                  <a:srgbClr val="202122"/>
-                </a:solidFill>
-                <a:latin typeface="Calibri"/>
-              </a:rPr>
-              <a:t>4</a:t>
-            </a:r>
-          </a:p>
-        </p:txBody>
-      </p:sp>
-      <p:sp>
-        <p:nvSpPr>
-          <p:cNvPr id="13" name="TextBox 12"/>
-          <p:cNvSpPr txBox="1"/>
-          <p:nvPr/>
-        </p:nvSpPr>
-        <p:spPr>
-          <a:xfrm>
-            <a:off x="1234440" y="5186933"/>
-            <a:ext cx="10408615" cy="1030986"/>
-          </a:xfrm>
-          <a:prstGeom prst="rect">
-            <a:avLst/>
-          </a:prstGeom>
-          <a:noFill/>
-        </p:spPr>
-        <p:txBody>
-          <a:bodyPr wrap="square" anchor="t" lIns="0" rIns="0" tIns="0" bIns="0"/>
-          <a:lstStyle/>
-          <a:p>
-            <a:pPr algn="l"/>
-            <a:r>
-              <a:rPr sz="1800" b="0" i="0">
-                <a:solidFill>
-                  <a:srgbClr val="54595D"/>
-                </a:solidFill>
-                <a:latin typeface="Calibri"/>
-              </a:rPr>
-              <a:t>How does PWM control motor speed?</a:t>
-            </a:r>
-          </a:p>
-          <a:p>
-            <a:r>
-              <a:rPr sz="1800" b="1">
-                <a:solidFill>
-                  <a:srgbClr val="03306E"/>
-                </a:solidFill>
-                <a:latin typeface="Calibri"/>
-              </a:rPr>
-              <a:t>By varying how long the power is on in each pulse.</a:t>
-            </a:r>
-          </a:p>
-        </p:txBody>
-      </p:sp>
-    </p:spTree>
-  </p:cSld>
-  <p:clrMapOvr>
-    <a:masterClrMapping/>
-  </p:clrMapOvr>
-</p:sld>
-</file>
-
-<file path=ppt/slides/slide9.xml><?xml version="1.0" encoding="utf-8"?>
-<p:sld xmlns:a="http://schemas.openxmlformats.org/drawingml/2006/main" xmlns:p="http://schemas.openxmlformats.org/presentationml/2006/main" xmlns:r="http://schemas.openxmlformats.org/officeDocument/2006/relationships">
-  <p:cSld>
-    <p:bg>
-      <p:bgPr>
-        <a:solidFill>
-          <a:srgbClr val="FFFFFF"/>
-        </a:solidFill>
-        <a:effectLst/>
-      </p:bgPr>
-    </p:bg>
-    <p:spTree>
-      <p:nvGrpSpPr>
-        <p:cNvPr id="1" name=""/>
-        <p:cNvGrpSpPr/>
-        <p:nvPr/>
-      </p:nvGrpSpPr>
-      <p:grpSpPr/>
-      <p:sp>
-        <p:nvSpPr>
-          <p:cNvPr id="2" name="TextBox 1"/>
-          <p:cNvSpPr txBox="1"/>
-          <p:nvPr/>
-        </p:nvSpPr>
-        <p:spPr>
-          <a:xfrm>
-            <a:off x="548640" y="320040"/>
-            <a:ext cx="11094415" cy="274320"/>
-          </a:xfrm>
-          <a:prstGeom prst="rect">
-            <a:avLst/>
-          </a:prstGeom>
-          <a:noFill/>
-        </p:spPr>
-        <p:txBody>
-          <a:bodyPr wrap="square" anchor="t" lIns="0" rIns="0" tIns="0" bIns="0"/>
-          <a:lstStyle/>
-          <a:p>
-            <a:pPr algn="l"/>
-            <a:r>
-              <a:rPr sz="1100" b="1" i="0">
-                <a:solidFill>
-                  <a:srgbClr val="54595D"/>
-                </a:solidFill>
-                <a:latin typeface="Calibri"/>
-              </a:rPr>
-              <a:t>ENGINEERING CORE  ·  Core topic 10</a:t>
-            </a:r>
-          </a:p>
-        </p:txBody>
-      </p:sp>
-      <p:sp>
-        <p:nvSpPr>
-          <p:cNvPr id="3" name="TextBox 2"/>
-          <p:cNvSpPr txBox="1"/>
-          <p:nvPr/>
-        </p:nvSpPr>
-        <p:spPr>
-          <a:xfrm>
-            <a:off x="548640" y="566928"/>
-            <a:ext cx="11094415" cy="822960"/>
-          </a:xfrm>
-          <a:prstGeom prst="rect">
-            <a:avLst/>
-          </a:prstGeom>
-          <a:noFill/>
-        </p:spPr>
-        <p:txBody>
-          <a:bodyPr wrap="square" anchor="ctr" lIns="0" rIns="0" tIns="0" bIns="0"/>
-          <a:lstStyle/>
-          <a:p>
-            <a:pPr algn="l"/>
-            <a:r>
-              <a:rPr sz="3200" b="1" i="0">
-                <a:solidFill>
-                  <a:srgbClr val="03306E"/>
-                </a:solidFill>
-                <a:latin typeface="Cambria"/>
-              </a:rPr>
-              <a:t>Activity: System diagram</a:t>
-            </a:r>
-          </a:p>
-        </p:txBody>
-      </p:sp>
-      <p:sp>
-        <p:nvSpPr>
-          <p:cNvPr id="4" name="TextBox 3"/>
-          <p:cNvSpPr txBox="1"/>
-          <p:nvPr/>
-        </p:nvSpPr>
-        <p:spPr>
-          <a:xfrm>
-            <a:off x="548640" y="6446520"/>
-            <a:ext cx="8229600" cy="274320"/>
-          </a:xfrm>
-          <a:prstGeom prst="rect">
-            <a:avLst/>
-          </a:prstGeom>
-          <a:noFill/>
-        </p:spPr>
-        <p:txBody>
-          <a:bodyPr wrap="square" anchor="t" lIns="0" rIns="0" tIns="0" bIns="0"/>
-          <a:lstStyle/>
-          <a:p>
-            <a:pPr algn="l"/>
-            <a:r>
-              <a:rPr sz="1000" b="0" i="0">
-                <a:solidFill>
-                  <a:srgbClr val="54595D"/>
-                </a:solidFill>
-                <a:latin typeface="Calibri"/>
-              </a:rPr>
-              <a:t>Design and Development for Engineering and Manufacturing T Level  ·  Control Systems, Sensors and Actuators</a:t>
-            </a:r>
-          </a:p>
-        </p:txBody>
-      </p:sp>
-      <p:sp>
-        <p:nvSpPr>
-          <p:cNvPr id="5" name="TextBox 4"/>
-          <p:cNvSpPr txBox="1"/>
-          <p:nvPr/>
-        </p:nvSpPr>
-        <p:spPr>
-          <a:xfrm>
-            <a:off x="10728655" y="6446520"/>
-            <a:ext cx="914400" cy="274320"/>
-          </a:xfrm>
-          <a:prstGeom prst="rect">
-            <a:avLst/>
-          </a:prstGeom>
-          <a:noFill/>
-        </p:spPr>
-        <p:txBody>
-          <a:bodyPr wrap="square" anchor="t" lIns="0" rIns="0" tIns="0" bIns="0"/>
-          <a:lstStyle/>
-          <a:p>
-            <a:pPr algn="r"/>
-            <a:r>
-              <a:rPr sz="1000" b="0" i="0">
-                <a:solidFill>
-                  <a:srgbClr val="54595D"/>
-                </a:solidFill>
-                <a:latin typeface="Calibri"/>
-              </a:rPr>
-              <a:t>9</a:t>
-            </a:r>
-          </a:p>
-        </p:txBody>
-      </p:sp>
-      <p:sp>
-        <p:nvSpPr>
-          <p:cNvPr id="6" name="Rounded Rectangle 5"/>
-          <p:cNvSpPr/>
-          <p:nvPr/>
-        </p:nvSpPr>
-        <p:spPr>
-          <a:xfrm>
-            <a:off x="548640" y="1508760"/>
-            <a:ext cx="2011680" cy="457200"/>
-          </a:xfrm>
-          <a:prstGeom prst="roundRect">
-            <a:avLst>
-              <a:gd name="adj" fmla="val 50000"/>
-            </a:avLst>
-          </a:prstGeom>
-          <a:solidFill>
-            <a:srgbClr val="F2B705"/>
-          </a:solidFill>
-          <a:ln>
-            <a:noFill/>
-          </a:ln>
-          <a:effectLst/>
-        </p:spPr>
-        <p:style>
-          <a:lnRef idx="1">
-            <a:schemeClr val="accent1"/>
-          </a:lnRef>
-          <a:fillRef idx="3">
-            <a:schemeClr val="accent1"/>
-          </a:fillRef>
-          <a:effectRef idx="2">
-            <a:schemeClr val="accent1"/>
-          </a:effectRef>
-          <a:fontRef idx="minor">
-            <a:schemeClr val="lt1"/>
-          </a:fontRef>
-        </p:style>
-        <p:txBody>
-          <a:bodyPr rtlCol="0" anchor="ctr"/>
-          <a:lstStyle/>
-          <a:p/>
-        </p:txBody>
-      </p:sp>
-      <p:sp>
-        <p:nvSpPr>
-          <p:cNvPr id="7" name="TextBox 6"/>
-          <p:cNvSpPr txBox="1"/>
-          <p:nvPr/>
-        </p:nvSpPr>
-        <p:spPr>
-          <a:xfrm>
-            <a:off x="548640" y="1508760"/>
-            <a:ext cx="2011680" cy="457200"/>
-          </a:xfrm>
-          <a:prstGeom prst="rect">
-            <a:avLst/>
-          </a:prstGeom>
-          <a:noFill/>
-        </p:spPr>
-        <p:txBody>
-          <a:bodyPr wrap="square" anchor="ctr" lIns="0" rIns="0" tIns="0" bIns="0"/>
-          <a:lstStyle/>
-          <a:p>
-            <a:pPr algn="ctr"/>
-            <a:r>
-              <a:rPr sz="1400" b="1" i="0">
-                <a:solidFill>
-                  <a:srgbClr val="202122"/>
-                </a:solidFill>
-                <a:latin typeface="Calibri"/>
-              </a:rPr>
-              <a:t>25 minutes</a:t>
-            </a:r>
-          </a:p>
-        </p:txBody>
-      </p:sp>
-      <p:sp>
-        <p:nvSpPr>
-          <p:cNvPr id="8" name="TextBox 7"/>
-          <p:cNvSpPr txBox="1"/>
-          <p:nvPr/>
-        </p:nvSpPr>
-        <p:spPr>
-          <a:xfrm>
-            <a:off x="2743200" y="1508760"/>
-            <a:ext cx="4754880" cy="457200"/>
-          </a:xfrm>
-          <a:prstGeom prst="rect">
-            <a:avLst/>
-          </a:prstGeom>
-          <a:noFill/>
-        </p:spPr>
-        <p:txBody>
-          <a:bodyPr wrap="square" anchor="ctr" lIns="0" rIns="0" tIns="0" bIns="0"/>
-          <a:lstStyle/>
-          <a:p>
-            <a:pPr algn="l"/>
-            <a:r>
-              <a:rPr sz="1400" b="0" i="1">
-                <a:solidFill>
-                  <a:srgbClr val="54595D"/>
-                </a:solidFill>
-                <a:latin typeface="Calibri"/>
-              </a:rPr>
-              <a:t>Pairs</a:t>
-            </a:r>
-          </a:p>
-        </p:txBody>
-      </p:sp>
-      <p:sp>
-        <p:nvSpPr>
-          <p:cNvPr id="9" name="Oval 8"/>
-          <p:cNvSpPr/>
-          <p:nvPr/>
-        </p:nvSpPr>
-        <p:spPr>
-          <a:xfrm>
-            <a:off x="548640" y="2482596"/>
-            <a:ext cx="384048" cy="384048"/>
-          </a:xfrm>
-          <a:prstGeom prst="ellipse">
-            <a:avLst/>
-          </a:prstGeom>
-          <a:solidFill>
-            <a:srgbClr val="0645AD"/>
-          </a:solidFill>
-          <a:ln>
-            <a:noFill/>
-          </a:ln>
-          <a:effectLst/>
-        </p:spPr>
-        <p:style>
-          <a:lnRef idx="1">
-            <a:schemeClr val="accent1"/>
-          </a:lnRef>
-          <a:fillRef idx="3">
-            <a:schemeClr val="accent1"/>
-          </a:fillRef>
-          <a:effectRef idx="2">
-            <a:schemeClr val="accent1"/>
-          </a:effectRef>
-          <a:fontRef idx="minor">
-            <a:schemeClr val="lt1"/>
-          </a:fontRef>
-        </p:style>
-        <p:txBody>
-          <a:bodyPr rtlCol="0" anchor="ctr" lIns="0" rIns="0" tIns="0" bIns="0"/>
-          <a:lstStyle/>
-          <a:p>
-            <a:pPr algn="ctr"/>
-            <a:r>
-              <a:rPr sz="1300" b="1">
-                <a:solidFill>
-                  <a:srgbClr val="FFFFFF"/>
-                </a:solidFill>
-                <a:latin typeface="Calibri"/>
-              </a:rPr>
-              <a:t>1</a:t>
-            </a:r>
-          </a:p>
-        </p:txBody>
-      </p:sp>
-      <p:sp>
-        <p:nvSpPr>
-          <p:cNvPr id="10" name="TextBox 9"/>
-          <p:cNvSpPr txBox="1"/>
-          <p:nvPr/>
-        </p:nvSpPr>
-        <p:spPr>
-          <a:xfrm>
-            <a:off x="1143000" y="2240280"/>
-            <a:ext cx="5943600" cy="868680"/>
-          </a:xfrm>
-          <a:prstGeom prst="rect">
-            <a:avLst/>
-          </a:prstGeom>
-          <a:noFill/>
-        </p:spPr>
-        <p:txBody>
-          <a:bodyPr wrap="square" anchor="ctr" lIns="0" rIns="0" tIns="0" bIns="0"/>
-          <a:lstStyle/>
-          <a:p>
-            <a:pPr algn="l"/>
-            <a:r>
-              <a:rPr sz="1700" b="0" i="0">
-                <a:solidFill>
-                  <a:srgbClr val="202122"/>
-                </a:solidFill>
-                <a:latin typeface="Calibri"/>
-              </a:rPr>
-              <a:t>Draw a closed loop system diagram for a greenhouse that controls temperature and watering.</a:t>
-            </a:r>
-          </a:p>
-        </p:txBody>
-      </p:sp>
-      <p:sp>
-        <p:nvSpPr>
-          <p:cNvPr id="11" name="Oval 10"/>
-          <p:cNvSpPr/>
-          <p:nvPr/>
-        </p:nvSpPr>
-        <p:spPr>
-          <a:xfrm>
-            <a:off x="548640" y="3461004"/>
-            <a:ext cx="384048" cy="384048"/>
-          </a:xfrm>
-          <a:prstGeom prst="ellipse">
-            <a:avLst/>
-          </a:prstGeom>
-          <a:solidFill>
-            <a:srgbClr val="0645AD"/>
-          </a:solidFill>
-          <a:ln>
-            <a:noFill/>
-          </a:ln>
-          <a:effectLst/>
-        </p:spPr>
-        <p:style>
-          <a:lnRef idx="1">
-            <a:schemeClr val="accent1"/>
-          </a:lnRef>
-          <a:fillRef idx="3">
-            <a:schemeClr val="accent1"/>
-          </a:fillRef>
-          <a:effectRef idx="2">
-            <a:schemeClr val="accent1"/>
-          </a:effectRef>
-          <a:fontRef idx="minor">
-            <a:schemeClr val="lt1"/>
-          </a:fontRef>
-        </p:style>
-        <p:txBody>
-          <a:bodyPr rtlCol="0" anchor="ctr" lIns="0" rIns="0" tIns="0" bIns="0"/>
-          <a:lstStyle/>
-          <a:p>
-            <a:pPr algn="ctr"/>
-            <a:r>
-              <a:rPr sz="1300" b="1">
-                <a:solidFill>
-                  <a:srgbClr val="FFFFFF"/>
-                </a:solidFill>
-                <a:latin typeface="Calibri"/>
-              </a:rPr>
-              <a:t>2</a:t>
-            </a:r>
-          </a:p>
-        </p:txBody>
-      </p:sp>
-      <p:sp>
-        <p:nvSpPr>
-          <p:cNvPr id="12" name="TextBox 11"/>
-          <p:cNvSpPr txBox="1"/>
-          <p:nvPr/>
-        </p:nvSpPr>
-        <p:spPr>
-          <a:xfrm>
-            <a:off x="1143000" y="3218688"/>
-            <a:ext cx="5943600" cy="868680"/>
-          </a:xfrm>
-          <a:prstGeom prst="rect">
-            <a:avLst/>
-          </a:prstGeom>
-          <a:noFill/>
-        </p:spPr>
-        <p:txBody>
-          <a:bodyPr wrap="square" anchor="ctr" lIns="0" rIns="0" tIns="0" bIns="0"/>
-          <a:lstStyle/>
-          <a:p>
-            <a:pPr algn="l"/>
-            <a:r>
-              <a:rPr sz="1700" b="0" i="0">
-                <a:solidFill>
-                  <a:srgbClr val="202122"/>
-                </a:solidFill>
-                <a:latin typeface="Calibri"/>
-              </a:rPr>
-              <a:t>Show two inputs, two outputs, the controller and feedback paths.</a:t>
-            </a:r>
-          </a:p>
-        </p:txBody>
-      </p:sp>
-      <p:sp>
-        <p:nvSpPr>
-          <p:cNvPr id="13" name="Oval 12"/>
-          <p:cNvSpPr/>
-          <p:nvPr/>
-        </p:nvSpPr>
-        <p:spPr>
-          <a:xfrm>
-            <a:off x="548640" y="4439412"/>
-            <a:ext cx="384048" cy="384048"/>
-          </a:xfrm>
-          <a:prstGeom prst="ellipse">
-            <a:avLst/>
-          </a:prstGeom>
-          <a:solidFill>
-            <a:srgbClr val="0645AD"/>
-          </a:solidFill>
-          <a:ln>
-            <a:noFill/>
-          </a:ln>
-          <a:effectLst/>
-        </p:spPr>
-        <p:style>
-          <a:lnRef idx="1">
-            <a:schemeClr val="accent1"/>
-          </a:lnRef>
-          <a:fillRef idx="3">
-            <a:schemeClr val="accent1"/>
-          </a:fillRef>
-          <a:effectRef idx="2">
-            <a:schemeClr val="accent1"/>
-          </a:effectRef>
-          <a:fontRef idx="minor">
-            <a:schemeClr val="lt1"/>
-          </a:fontRef>
-        </p:style>
-        <p:txBody>
-          <a:bodyPr rtlCol="0" anchor="ctr" lIns="0" rIns="0" tIns="0" bIns="0"/>
-          <a:lstStyle/>
-          <a:p>
-            <a:pPr algn="ctr"/>
-            <a:r>
-              <a:rPr sz="1300" b="1">
-                <a:solidFill>
-                  <a:srgbClr val="FFFFFF"/>
-                </a:solidFill>
-                <a:latin typeface="Calibri"/>
-              </a:rPr>
-              <a:t>3</a:t>
-            </a:r>
-          </a:p>
-        </p:txBody>
-      </p:sp>
-      <p:sp>
-        <p:nvSpPr>
-          <p:cNvPr id="14" name="TextBox 13"/>
-          <p:cNvSpPr txBox="1"/>
-          <p:nvPr/>
-        </p:nvSpPr>
-        <p:spPr>
-          <a:xfrm>
-            <a:off x="1143000" y="4197096"/>
-            <a:ext cx="5943600" cy="868680"/>
-          </a:xfrm>
-          <a:prstGeom prst="rect">
-            <a:avLst/>
-          </a:prstGeom>
-          <a:noFill/>
-        </p:spPr>
-        <p:txBody>
-          <a:bodyPr wrap="square" anchor="ctr" lIns="0" rIns="0" tIns="0" bIns="0"/>
-          <a:lstStyle/>
-          <a:p>
-            <a:pPr algn="l"/>
-            <a:r>
-              <a:rPr sz="1700" b="0" i="0">
-                <a:solidFill>
-                  <a:srgbClr val="202122"/>
-                </a:solidFill>
-                <a:latin typeface="Calibri"/>
-              </a:rPr>
-              <a:t>Label the summing points and set points.</a:t>
-            </a:r>
-          </a:p>
-        </p:txBody>
-      </p:sp>
-      <p:sp>
-        <p:nvSpPr>
-          <p:cNvPr id="15" name="Oval 14"/>
-          <p:cNvSpPr/>
-          <p:nvPr/>
-        </p:nvSpPr>
-        <p:spPr>
-          <a:xfrm>
-            <a:off x="548640" y="5417820"/>
-            <a:ext cx="384048" cy="384048"/>
-          </a:xfrm>
-          <a:prstGeom prst="ellipse">
-            <a:avLst/>
-          </a:prstGeom>
-          <a:solidFill>
-            <a:srgbClr val="0645AD"/>
-          </a:solidFill>
-          <a:ln>
-            <a:noFill/>
-          </a:ln>
-          <a:effectLst/>
-        </p:spPr>
-        <p:style>
-          <a:lnRef idx="1">
-            <a:schemeClr val="accent1"/>
-          </a:lnRef>
-          <a:fillRef idx="3">
-            <a:schemeClr val="accent1"/>
-          </a:fillRef>
-          <a:effectRef idx="2">
-            <a:schemeClr val="accent1"/>
-          </a:effectRef>
-          <a:fontRef idx="minor">
-            <a:schemeClr val="lt1"/>
-          </a:fontRef>
-        </p:style>
-        <p:txBody>
-          <a:bodyPr rtlCol="0" anchor="ctr" lIns="0" rIns="0" tIns="0" bIns="0"/>
-          <a:lstStyle/>
-          <a:p>
-            <a:pPr algn="ctr"/>
-            <a:r>
-              <a:rPr sz="1300" b="1">
-                <a:solidFill>
-                  <a:srgbClr val="FFFFFF"/>
-                </a:solidFill>
-                <a:latin typeface="Calibri"/>
-              </a:rPr>
-              <a:t>4</a:t>
-            </a:r>
-          </a:p>
-        </p:txBody>
-      </p:sp>
-      <p:sp>
-        <p:nvSpPr>
-          <p:cNvPr id="16" name="TextBox 15"/>
-          <p:cNvSpPr txBox="1"/>
-          <p:nvPr/>
-        </p:nvSpPr>
-        <p:spPr>
-          <a:xfrm>
-            <a:off x="1143000" y="5175504"/>
-            <a:ext cx="5943600" cy="868680"/>
-          </a:xfrm>
-          <a:prstGeom prst="rect">
-            <a:avLst/>
-          </a:prstGeom>
-          <a:noFill/>
-        </p:spPr>
-        <p:txBody>
-          <a:bodyPr wrap="square" anchor="ctr" lIns="0" rIns="0" tIns="0" bIns="0"/>
-          <a:lstStyle/>
-          <a:p>
-            <a:pPr algn="l"/>
-            <a:r>
-              <a:rPr sz="1700" b="0" i="0">
-                <a:solidFill>
-                  <a:srgbClr val="202122"/>
-                </a:solidFill>
-                <a:latin typeface="Calibri"/>
-              </a:rPr>
-              <a:t>Explain what would happen if it were under-damped.</a:t>
-            </a:r>
-          </a:p>
-        </p:txBody>
-      </p:sp>
-      <p:sp>
-        <p:nvSpPr>
-          <p:cNvPr id="17" name="Rounded Rectangle 16"/>
-          <p:cNvSpPr/>
-          <p:nvPr/>
-        </p:nvSpPr>
-        <p:spPr>
-          <a:xfrm>
-            <a:off x="7772400" y="1508760"/>
-            <a:ext cx="3867912" cy="4572000"/>
-          </a:xfrm>
-          <a:prstGeom prst="roundRect">
-            <a:avLst>
-              <a:gd name="adj" fmla="val 8000"/>
-            </a:avLst>
-          </a:prstGeom>
-          <a:solidFill>
-            <a:srgbClr val="EAF3FF"/>
-          </a:solidFill>
-          <a:ln>
-            <a:noFill/>
-          </a:ln>
-          <a:effectLst/>
-        </p:spPr>
-        <p:style>
-          <a:lnRef idx="1">
-            <a:schemeClr val="accent1"/>
-          </a:lnRef>
-          <a:fillRef idx="3">
-            <a:schemeClr val="accent1"/>
-          </a:fillRef>
-          <a:effectRef idx="2">
-            <a:schemeClr val="accent1"/>
-          </a:effectRef>
-          <a:fontRef idx="minor">
-            <a:schemeClr val="lt1"/>
-          </a:fontRef>
-        </p:style>
-        <p:txBody>
-          <a:bodyPr rtlCol="0" anchor="ctr"/>
-          <a:lstStyle/>
-          <a:p/>
-        </p:txBody>
-      </p:sp>
-      <p:sp>
-        <p:nvSpPr>
-          <p:cNvPr id="18" name="TextBox 17"/>
-          <p:cNvSpPr txBox="1"/>
-          <p:nvPr/>
-        </p:nvSpPr>
-        <p:spPr>
-          <a:xfrm>
-            <a:off x="8046720" y="1737360"/>
-            <a:ext cx="3291840" cy="365760"/>
-          </a:xfrm>
-          <a:prstGeom prst="rect">
-            <a:avLst/>
-          </a:prstGeom>
-          <a:noFill/>
-        </p:spPr>
-        <p:txBody>
-          <a:bodyPr wrap="square" anchor="t" lIns="0" rIns="0" tIns="0" bIns="0"/>
-          <a:lstStyle/>
-          <a:p>
-            <a:pPr algn="l"/>
-            <a:r>
-              <a:rPr sz="1300" b="1" i="0">
-                <a:solidFill>
-                  <a:srgbClr val="0645AD"/>
-                </a:solidFill>
-                <a:latin typeface="Calibri"/>
-              </a:rPr>
-              <a:t>SUCCESS CRITERIA</a:t>
-            </a:r>
-          </a:p>
-        </p:txBody>
-      </p:sp>
-      <p:sp>
-        <p:nvSpPr>
-          <p:cNvPr id="19" name="TextBox 18"/>
-          <p:cNvSpPr txBox="1"/>
-          <p:nvPr/>
-        </p:nvSpPr>
-        <p:spPr>
-          <a:xfrm>
-            <a:off x="8046720" y="2240280"/>
-            <a:ext cx="3337560" cy="3657600"/>
-          </a:xfrm>
-          <a:prstGeom prst="rect">
-            <a:avLst/>
-          </a:prstGeom>
-          <a:noFill/>
-        </p:spPr>
-        <p:txBody>
-          <a:bodyPr wrap="square" lIns="0" rIns="0" tIns="0" bIns="0">
-            <a:spAutoFit/>
-          </a:bodyPr>
-          <a:lstStyle/>
-          <a:p>
-            <a:pPr marL="274320" indent="-274320">
-              <a:spcAft>
-                <a:spcPts val="810"/>
-              </a:spcAft>
-              <a:buClr>
-                <a:srgbClr val="0645AD"/>
-              </a:buClr>
-              <a:buFont typeface="Arial"/>
-              <a:buChar char="•"/>
-            </a:pPr>
-            <a:r>
-              <a:rPr sz="1800" b="0">
-                <a:solidFill>
-                  <a:srgbClr val="202122"/>
-                </a:solidFill>
-                <a:latin typeface="Calibri"/>
-              </a:rPr>
-              <a:t>Multiple inputs and outputs shown</a:t>
-            </a:r>
-          </a:p>
-          <a:p>
-            <a:pPr marL="274320" indent="-274320">
-              <a:spcAft>
-                <a:spcPts val="810"/>
-              </a:spcAft>
-              <a:buClr>
-                <a:srgbClr val="0645AD"/>
-              </a:buClr>
-              <a:buFont typeface="Arial"/>
-              <a:buChar char="•"/>
-            </a:pPr>
-            <a:r>
-              <a:rPr sz="1800" b="0">
-                <a:solidFill>
-                  <a:srgbClr val="202122"/>
-                </a:solidFill>
-                <a:latin typeface="Calibri"/>
-              </a:rPr>
-              <a:t>Feedback correctly drawn</a:t>
-            </a:r>
-          </a:p>
-          <a:p>
-            <a:pPr marL="274320" indent="-274320">
-              <a:spcAft>
-                <a:spcPts val="810"/>
-              </a:spcAft>
-              <a:buClr>
-                <a:srgbClr val="0645AD"/>
-              </a:buClr>
-              <a:buFont typeface="Arial"/>
-              <a:buChar char="•"/>
-            </a:pPr>
-            <a:r>
-              <a:rPr sz="1800" b="0">
-                <a:solidFill>
-                  <a:srgbClr val="202122"/>
-                </a:solidFill>
-                <a:latin typeface="Calibri"/>
-              </a:rPr>
-              <a:t>Damping explained</a:t>
-            </a:r>
-          </a:p>
-        </p:txBody>
-      </p:sp>
     </p:spTree>
   </p:cSld>
   <p:clrMapOvr>
